--- a/PMOS_Architecture_Presentation.pptx
+++ b/PMOS_Architecture_Presentation.pptx
@@ -15,6 +15,10 @@
     <p:sldId id="263" r:id="rId14"/>
     <p:sldId id="264" r:id="rId15"/>
     <p:sldId id="265" r:id="rId16"/>
+    <p:sldId id="266" r:id="rId17"/>
+    <p:sldId id="267" r:id="rId18"/>
+    <p:sldId id="268" r:id="rId19"/>
+    <p:sldId id="269" r:id="rId20"/>
   </p:sldIdLst>
   <p:sldSz cx="12191695" cy="6858000" type="screen4x3"/>
   <p:notesSz cx="6858000" cy="9144000"/>
@@ -3287,8 +3291,8 @@
         </p:nvSpPr>
         <p:spPr>
           <a:xfrm>
-            <a:off x="914400" y="914400"/>
-            <a:ext cx="10058400" cy="914400"/>
+            <a:off x="457200" y="274320"/>
+            <a:ext cx="10972800" cy="548640"/>
           </a:xfrm>
           <a:prstGeom prst="rect">
             <a:avLst/>
@@ -3302,7 +3306,7 @@
           <a:lstStyle/>
           <a:p>
             <a:pPr algn="ctr">
-              <a:defRPr sz="5400" b="1">
+              <a:defRPr sz="2800" b="1">
                 <a:solidFill>
                   <a:srgbClr val="007BFF"/>
                 </a:solidFill>
@@ -3310,7 +3314,7 @@
               </a:defRPr>
             </a:pPr>
             <a:r>
-              <a:t>PMOS</a:t>
+              <a:t>Business Domain Data — Home Lending Lifecycle</a:t>
             </a:r>
           </a:p>
         </p:txBody>
@@ -3323,8 +3327,8 @@
         </p:nvSpPr>
         <p:spPr>
           <a:xfrm>
-            <a:off x="914400" y="2011680"/>
-            <a:ext cx="10058400" cy="548640"/>
+            <a:off x="457200" y="822960"/>
+            <a:ext cx="10972800" cy="365760"/>
           </a:xfrm>
           <a:prstGeom prst="rect">
             <a:avLst/>
@@ -3338,7 +3342,60 @@
           <a:lstStyle/>
           <a:p>
             <a:pPr algn="ctr">
-              <a:defRPr sz="2200" b="0">
+              <a:defRPr sz="1300" b="0">
+                <a:solidFill>
+                  <a:srgbClr val="B0B0B0"/>
+                </a:solidFill>
+                <a:latin typeface="Segoe UI"/>
+              </a:defRPr>
+            </a:pPr>
+            <a:r>
+              <a:t>Six MySQL schemas modeling the full customer → origination → servicing journey, queryable end-to-end via registered DATABASE tools</a:t>
+            </a:r>
+          </a:p>
+        </p:txBody>
+      </p:sp>
+      <p:sp>
+        <p:nvSpPr>
+          <p:cNvPr id="4" name="Rounded Rectangle 3"/>
+          <p:cNvSpPr/>
+          <p:nvPr/>
+        </p:nvSpPr>
+        <p:spPr>
+          <a:xfrm>
+            <a:off x="320040" y="1554480"/>
+            <a:ext cx="2286000" cy="1005840"/>
+          </a:xfrm>
+          <a:prstGeom prst="roundRect">
+            <a:avLst/>
+          </a:prstGeom>
+          <a:solidFill>
+            <a:srgbClr val="00C853"/>
+          </a:solidFill>
+          <a:ln>
+            <a:noFill/>
+          </a:ln>
+        </p:spPr>
+        <p:style>
+          <a:lnRef idx="1">
+            <a:schemeClr val="accent1"/>
+          </a:lnRef>
+          <a:fillRef idx="3">
+            <a:schemeClr val="accent1"/>
+          </a:fillRef>
+          <a:effectRef idx="2">
+            <a:schemeClr val="accent1"/>
+          </a:effectRef>
+          <a:fontRef idx="minor">
+            <a:schemeClr val="lt1"/>
+          </a:fontRef>
+        </p:style>
+        <p:txBody>
+          <a:bodyPr rtlCol="0" anchor="ctr" wrap="square"/>
+          <a:lstStyle/>
+          <a:p>
+            <a:pPr algn="ctr">
+              <a:defRPr sz="1100" b="1">
                 <a:solidFill>
                   <a:srgbClr val="FFFFFF"/>
                 </a:solidFill>
@@ -3346,25 +3403,398 @@
               </a:defRPr>
             </a:pPr>
             <a:r>
-              <a:t>Connect any data source. Ask any question.</a:t>
-            </a:r>
-            <a:br/>
-            <a:r>
-              <a:t>Get answers in minutes, not hours.</a:t>
-            </a:r>
-          </a:p>
-        </p:txBody>
-      </p:sp>
-      <p:sp>
-        <p:nvSpPr>
-          <p:cNvPr id="4" name="TextBox 3"/>
+              <a:t>Chase My Home</a:t>
+            </a:r>
+            <a:br/>
+            <a:br/>
+            <a:r>
+              <a:t>Explore / Buy / Manage</a:t>
+            </a:r>
+          </a:p>
+        </p:txBody>
+      </p:sp>
+      <p:cxnSp>
+        <p:nvCxnSpPr>
+          <p:cNvPr id="5" name="Connector 4"/>
+          <p:cNvCxnSpPr/>
+          <p:nvPr/>
+        </p:nvCxnSpPr>
+        <p:spPr>
+          <a:xfrm>
+            <a:off x="2606040" y="2057400"/>
+            <a:ext cx="91440" cy="0"/>
+          </a:xfrm>
+          <a:prstGeom prst="line">
+            <a:avLst/>
+          </a:prstGeom>
+          <a:ln w="19050">
+            <a:solidFill>
+              <a:srgbClr val="FFFFFF"/>
+            </a:solidFill>
+          </a:ln>
+        </p:spPr>
+        <p:style>
+          <a:lnRef idx="2">
+            <a:schemeClr val="accent1"/>
+          </a:lnRef>
+          <a:fillRef idx="0">
+            <a:schemeClr val="accent1"/>
+          </a:fillRef>
+          <a:effectRef idx="1">
+            <a:schemeClr val="accent1"/>
+          </a:effectRef>
+          <a:fontRef idx="minor">
+            <a:schemeClr val="tx1"/>
+          </a:fontRef>
+        </p:style>
+      </p:cxnSp>
+      <p:sp>
+        <p:nvSpPr>
+          <p:cNvPr id="6" name="Rounded Rectangle 5"/>
+          <p:cNvSpPr/>
+          <p:nvPr/>
+        </p:nvSpPr>
+        <p:spPr>
+          <a:xfrm>
+            <a:off x="2697480" y="1554480"/>
+            <a:ext cx="2286000" cy="1005840"/>
+          </a:xfrm>
+          <a:prstGeom prst="roundRect">
+            <a:avLst/>
+          </a:prstGeom>
+          <a:solidFill>
+            <a:srgbClr val="4DA6FF"/>
+          </a:solidFill>
+          <a:ln>
+            <a:noFill/>
+          </a:ln>
+        </p:spPr>
+        <p:style>
+          <a:lnRef idx="1">
+            <a:schemeClr val="accent1"/>
+          </a:lnRef>
+          <a:fillRef idx="3">
+            <a:schemeClr val="accent1"/>
+          </a:fillRef>
+          <a:effectRef idx="2">
+            <a:schemeClr val="accent1"/>
+          </a:effectRef>
+          <a:fontRef idx="minor">
+            <a:schemeClr val="lt1"/>
+          </a:fontRef>
+        </p:style>
+        <p:txBody>
+          <a:bodyPr rtlCol="0" anchor="ctr" wrap="square"/>
+          <a:lstStyle/>
+          <a:p>
+            <a:pPr algn="ctr">
+              <a:defRPr sz="1100" b="1">
+                <a:solidFill>
+                  <a:srgbClr val="FFFFFF"/>
+                </a:solidFill>
+                <a:latin typeface="Segoe UI"/>
+              </a:defRPr>
+            </a:pPr>
+            <a:r>
+              <a:t>Marketing</a:t>
+            </a:r>
+            <a:br/>
+            <a:br/>
+            <a:r>
+              <a:t>Campaigns, leads, attribution</a:t>
+            </a:r>
+          </a:p>
+        </p:txBody>
+      </p:sp>
+      <p:cxnSp>
+        <p:nvCxnSpPr>
+          <p:cNvPr id="7" name="Connector 6"/>
+          <p:cNvCxnSpPr/>
+          <p:nvPr/>
+        </p:nvCxnSpPr>
+        <p:spPr>
+          <a:xfrm>
+            <a:off x="4983480" y="2057400"/>
+            <a:ext cx="91440" cy="0"/>
+          </a:xfrm>
+          <a:prstGeom prst="line">
+            <a:avLst/>
+          </a:prstGeom>
+          <a:ln w="19050">
+            <a:solidFill>
+              <a:srgbClr val="FFFFFF"/>
+            </a:solidFill>
+          </a:ln>
+        </p:spPr>
+        <p:style>
+          <a:lnRef idx="2">
+            <a:schemeClr val="accent1"/>
+          </a:lnRef>
+          <a:fillRef idx="0">
+            <a:schemeClr val="accent1"/>
+          </a:fillRef>
+          <a:effectRef idx="1">
+            <a:schemeClr val="accent1"/>
+          </a:effectRef>
+          <a:fontRef idx="minor">
+            <a:schemeClr val="tx1"/>
+          </a:fontRef>
+        </p:style>
+      </p:cxnSp>
+      <p:sp>
+        <p:nvSpPr>
+          <p:cNvPr id="8" name="Rounded Rectangle 7"/>
+          <p:cNvSpPr/>
+          <p:nvPr/>
+        </p:nvSpPr>
+        <p:spPr>
+          <a:xfrm>
+            <a:off x="5074920" y="1554480"/>
+            <a:ext cx="2286000" cy="1005840"/>
+          </a:xfrm>
+          <a:prstGeom prst="roundRect">
+            <a:avLst/>
+          </a:prstGeom>
+          <a:solidFill>
+            <a:srgbClr val="4DA6FF"/>
+          </a:solidFill>
+          <a:ln>
+            <a:noFill/>
+          </a:ln>
+        </p:spPr>
+        <p:style>
+          <a:lnRef idx="1">
+            <a:schemeClr val="accent1"/>
+          </a:lnRef>
+          <a:fillRef idx="3">
+            <a:schemeClr val="accent1"/>
+          </a:fillRef>
+          <a:effectRef idx="2">
+            <a:schemeClr val="accent1"/>
+          </a:effectRef>
+          <a:fontRef idx="minor">
+            <a:schemeClr val="lt1"/>
+          </a:fontRef>
+        </p:style>
+        <p:txBody>
+          <a:bodyPr rtlCol="0" anchor="ctr" wrap="square"/>
+          <a:lstStyle/>
+          <a:p>
+            <a:pPr algn="ctr">
+              <a:defRPr sz="1100" b="1">
+                <a:solidFill>
+                  <a:srgbClr val="FFFFFF"/>
+                </a:solidFill>
+                <a:latin typeface="Segoe UI"/>
+              </a:defRPr>
+            </a:pPr>
+            <a:r>
+              <a:t>Sales</a:t>
+            </a:r>
+            <a:br/>
+            <a:br/>
+            <a:r>
+              <a:t>Officers, pipeline, commissions</a:t>
+            </a:r>
+          </a:p>
+        </p:txBody>
+      </p:sp>
+      <p:cxnSp>
+        <p:nvCxnSpPr>
+          <p:cNvPr id="9" name="Connector 8"/>
+          <p:cNvCxnSpPr/>
+          <p:nvPr/>
+        </p:nvCxnSpPr>
+        <p:spPr>
+          <a:xfrm>
+            <a:off x="7360920" y="2057400"/>
+            <a:ext cx="91440" cy="0"/>
+          </a:xfrm>
+          <a:prstGeom prst="line">
+            <a:avLst/>
+          </a:prstGeom>
+          <a:ln w="19050">
+            <a:solidFill>
+              <a:srgbClr val="FFFFFF"/>
+            </a:solidFill>
+          </a:ln>
+        </p:spPr>
+        <p:style>
+          <a:lnRef idx="2">
+            <a:schemeClr val="accent1"/>
+          </a:lnRef>
+          <a:fillRef idx="0">
+            <a:schemeClr val="accent1"/>
+          </a:fillRef>
+          <a:effectRef idx="1">
+            <a:schemeClr val="accent1"/>
+          </a:effectRef>
+          <a:fontRef idx="minor">
+            <a:schemeClr val="tx1"/>
+          </a:fontRef>
+        </p:style>
+      </p:cxnSp>
+      <p:sp>
+        <p:nvSpPr>
+          <p:cNvPr id="10" name="Rounded Rectangle 9"/>
+          <p:cNvSpPr/>
+          <p:nvPr/>
+        </p:nvSpPr>
+        <p:spPr>
+          <a:xfrm>
+            <a:off x="7452360" y="1554480"/>
+            <a:ext cx="2286000" cy="1005840"/>
+          </a:xfrm>
+          <a:prstGeom prst="roundRect">
+            <a:avLst/>
+          </a:prstGeom>
+          <a:solidFill>
+            <a:srgbClr val="FF9F00"/>
+          </a:solidFill>
+          <a:ln>
+            <a:noFill/>
+          </a:ln>
+        </p:spPr>
+        <p:style>
+          <a:lnRef idx="1">
+            <a:schemeClr val="accent1"/>
+          </a:lnRef>
+          <a:fillRef idx="3">
+            <a:schemeClr val="accent1"/>
+          </a:fillRef>
+          <a:effectRef idx="2">
+            <a:schemeClr val="accent1"/>
+          </a:effectRef>
+          <a:fontRef idx="minor">
+            <a:schemeClr val="lt1"/>
+          </a:fontRef>
+        </p:style>
+        <p:txBody>
+          <a:bodyPr rtlCol="0" anchor="ctr" wrap="square"/>
+          <a:lstStyle/>
+          <a:p>
+            <a:pPr algn="ctr">
+              <a:defRPr sz="1100" b="1">
+                <a:solidFill>
+                  <a:srgbClr val="FFFFFF"/>
+                </a:solidFill>
+                <a:latin typeface="Segoe UI"/>
+              </a:defRPr>
+            </a:pPr>
+            <a:r>
+              <a:t>Origination</a:t>
+            </a:r>
+            <a:br/>
+            <a:br/>
+            <a:r>
+              <a:t>Consumer + Correspondent</a:t>
+            </a:r>
+          </a:p>
+        </p:txBody>
+      </p:sp>
+      <p:cxnSp>
+        <p:nvCxnSpPr>
+          <p:cNvPr id="11" name="Connector 10"/>
+          <p:cNvCxnSpPr/>
+          <p:nvPr/>
+        </p:nvCxnSpPr>
+        <p:spPr>
+          <a:xfrm>
+            <a:off x="9738360" y="2057400"/>
+            <a:ext cx="91440" cy="0"/>
+          </a:xfrm>
+          <a:prstGeom prst="line">
+            <a:avLst/>
+          </a:prstGeom>
+          <a:ln w="19050">
+            <a:solidFill>
+              <a:srgbClr val="FFFFFF"/>
+            </a:solidFill>
+          </a:ln>
+        </p:spPr>
+        <p:style>
+          <a:lnRef idx="2">
+            <a:schemeClr val="accent1"/>
+          </a:lnRef>
+          <a:fillRef idx="0">
+            <a:schemeClr val="accent1"/>
+          </a:fillRef>
+          <a:effectRef idx="1">
+            <a:schemeClr val="accent1"/>
+          </a:effectRef>
+          <a:fontRef idx="minor">
+            <a:schemeClr val="tx1"/>
+          </a:fontRef>
+        </p:style>
+      </p:cxnSp>
+      <p:sp>
+        <p:nvSpPr>
+          <p:cNvPr id="12" name="Rounded Rectangle 11"/>
+          <p:cNvSpPr/>
+          <p:nvPr/>
+        </p:nvSpPr>
+        <p:spPr>
+          <a:xfrm>
+            <a:off x="9829800" y="1554480"/>
+            <a:ext cx="2286000" cy="1005840"/>
+          </a:xfrm>
+          <a:prstGeom prst="roundRect">
+            <a:avLst/>
+          </a:prstGeom>
+          <a:solidFill>
+            <a:srgbClr val="AB47BC"/>
+          </a:solidFill>
+          <a:ln>
+            <a:noFill/>
+          </a:ln>
+        </p:spPr>
+        <p:style>
+          <a:lnRef idx="1">
+            <a:schemeClr val="accent1"/>
+          </a:lnRef>
+          <a:fillRef idx="3">
+            <a:schemeClr val="accent1"/>
+          </a:fillRef>
+          <a:effectRef idx="2">
+            <a:schemeClr val="accent1"/>
+          </a:effectRef>
+          <a:fontRef idx="minor">
+            <a:schemeClr val="lt1"/>
+          </a:fontRef>
+        </p:style>
+        <p:txBody>
+          <a:bodyPr rtlCol="0" anchor="ctr" wrap="square"/>
+          <a:lstStyle/>
+          <a:p>
+            <a:pPr algn="ctr">
+              <a:defRPr sz="1100" b="1">
+                <a:solidFill>
+                  <a:srgbClr val="FFFFFF"/>
+                </a:solidFill>
+                <a:latin typeface="Segoe UI"/>
+              </a:defRPr>
+            </a:pPr>
+            <a:r>
+              <a:t>Servicing</a:t>
+            </a:r>
+            <a:br/>
+            <a:br/>
+            <a:r>
+              <a:t>Loans, defaults, FC, REDS</a:t>
+            </a:r>
+          </a:p>
+        </p:txBody>
+      </p:sp>
+      <p:sp>
+        <p:nvSpPr>
+          <p:cNvPr id="13" name="TextBox 12"/>
           <p:cNvSpPr txBox="1"/>
           <p:nvPr/>
         </p:nvSpPr>
         <p:spPr>
           <a:xfrm>
-            <a:off x="1371600" y="3200400"/>
-            <a:ext cx="9144000" cy="2743200"/>
+            <a:off x="457200" y="2926080"/>
+            <a:ext cx="10972800" cy="457200"/>
           </a:xfrm>
           <a:prstGeom prst="rect">
             <a:avLst/>
@@ -3378,49 +3808,115 @@
           <a:lstStyle/>
           <a:p>
             <a:pPr algn="ctr">
-              <a:defRPr sz="1500" b="0">
-                <a:solidFill>
-                  <a:srgbClr val="B0B0B0"/>
-                </a:solidFill>
-                <a:latin typeface="Segoe UI"/>
-              </a:defRPr>
-            </a:pPr>
-            <a:r>
-              <a:t>7 microservices  |  4 data stores  |  6 agents  |  7 Redis streams</a:t>
-            </a:r>
-            <a:br/>
-            <a:br/>
-            <a:r>
-              <a:t>Recursive sub-agent spawning  |  Capability negotiation  |  RL scoring</a:t>
-            </a:r>
-            <a:br/>
-            <a:br/>
-            <a:r>
-              <a:t>4-tier memory  |  RAG pipeline  |  Full audit trail  |  Self-extending</a:t>
-            </a:r>
-            <a:br/>
-            <a:br/>
-            <a:r>
-              <a:t>PDF, DOCX, XLSX, HTML, CSV, JSON, Markdown  |  MySQL, Neo4j, Qdrant</a:t>
-            </a:r>
-            <a:br/>
-            <a:br/>
-            <a:r>
-              <a:t>One question → decompose → negotiate → execute → score → learn → respond</a:t>
-            </a:r>
-          </a:p>
-        </p:txBody>
-      </p:sp>
-      <p:sp>
-        <p:nvSpPr>
-          <p:cNvPr id="5" name="TextBox 4"/>
+              <a:defRPr sz="1400" b="1">
+                <a:solidFill>
+                  <a:srgbClr val="FFFFFF"/>
+                </a:solidFill>
+                <a:latin typeface="Segoe UI"/>
+              </a:defRPr>
+            </a:pPr>
+            <a:r>
+              <a:t>27 tables • 230 seed rows • 6 DATABASE tools registered in pmos.tools • cross-schema referential integrity</a:t>
+            </a:r>
+          </a:p>
+        </p:txBody>
+      </p:sp>
+      <p:sp>
+        <p:nvSpPr>
+          <p:cNvPr id="14" name="Rounded Rectangle 13"/>
+          <p:cNvSpPr/>
+          <p:nvPr/>
+        </p:nvSpPr>
+        <p:spPr>
+          <a:xfrm>
+            <a:off x="457200" y="3657600"/>
+            <a:ext cx="3657600" cy="2651760"/>
+          </a:xfrm>
+          <a:prstGeom prst="roundRect">
+            <a:avLst/>
+          </a:prstGeom>
+          <a:solidFill>
+            <a:srgbClr val="353555"/>
+          </a:solidFill>
+          <a:ln>
+            <a:noFill/>
+          </a:ln>
+        </p:spPr>
+        <p:style>
+          <a:lnRef idx="1">
+            <a:schemeClr val="accent1"/>
+          </a:lnRef>
+          <a:fillRef idx="3">
+            <a:schemeClr val="accent1"/>
+          </a:fillRef>
+          <a:effectRef idx="2">
+            <a:schemeClr val="accent1"/>
+          </a:effectRef>
+          <a:fontRef idx="minor">
+            <a:schemeClr val="lt1"/>
+          </a:fontRef>
+        </p:style>
+        <p:txBody>
+          <a:bodyPr rtlCol="0" anchor="ctr"/>
+          <a:lstStyle/>
+          <a:p>
+            <a:pPr algn="ctr"/>
+          </a:p>
+        </p:txBody>
+      </p:sp>
+      <p:sp>
+        <p:nvSpPr>
+          <p:cNvPr id="15" name="Rectangle 14"/>
+          <p:cNvSpPr/>
+          <p:nvPr/>
+        </p:nvSpPr>
+        <p:spPr>
+          <a:xfrm>
+            <a:off x="457200" y="3657600"/>
+            <a:ext cx="54864" cy="2651760"/>
+          </a:xfrm>
+          <a:prstGeom prst="rect">
+            <a:avLst/>
+          </a:prstGeom>
+          <a:solidFill>
+            <a:srgbClr val="AB47BC"/>
+          </a:solidFill>
+          <a:ln>
+            <a:noFill/>
+          </a:ln>
+        </p:spPr>
+        <p:style>
+          <a:lnRef idx="1">
+            <a:schemeClr val="accent1"/>
+          </a:lnRef>
+          <a:fillRef idx="3">
+            <a:schemeClr val="accent1"/>
+          </a:fillRef>
+          <a:effectRef idx="2">
+            <a:schemeClr val="accent1"/>
+          </a:effectRef>
+          <a:fontRef idx="minor">
+            <a:schemeClr val="lt1"/>
+          </a:fontRef>
+        </p:style>
+        <p:txBody>
+          <a:bodyPr rtlCol="0" anchor="ctr"/>
+          <a:lstStyle/>
+          <a:p>
+            <a:pPr algn="ctr"/>
+          </a:p>
+        </p:txBody>
+      </p:sp>
+      <p:sp>
+        <p:nvSpPr>
+          <p:cNvPr id="16" name="TextBox 15"/>
           <p:cNvSpPr txBox="1"/>
           <p:nvPr/>
         </p:nvSpPr>
         <p:spPr>
           <a:xfrm>
-            <a:off x="2743200" y="5760720"/>
-            <a:ext cx="6400800" cy="457200"/>
+            <a:off x="640080" y="3749039"/>
+            <a:ext cx="3383280" cy="320040"/>
           </a:xfrm>
           <a:prstGeom prst="rect">
             <a:avLst/>
@@ -3433,16 +3929,3286 @@
           </a:bodyPr>
           <a:lstStyle/>
           <a:p>
+            <a:pPr algn="l">
+              <a:defRPr sz="1300" b="1">
+                <a:solidFill>
+                  <a:srgbClr val="AB47BC"/>
+                </a:solidFill>
+                <a:latin typeface="Segoe UI"/>
+              </a:defRPr>
+            </a:pPr>
+            <a:r>
+              <a:t>LIVE EXAMPLE</a:t>
+            </a:r>
+          </a:p>
+        </p:txBody>
+      </p:sp>
+      <p:sp>
+        <p:nvSpPr>
+          <p:cNvPr id="17" name="TextBox 16"/>
+          <p:cNvSpPr txBox="1"/>
+          <p:nvPr/>
+        </p:nvSpPr>
+        <p:spPr>
+          <a:xfrm>
+            <a:off x="640080" y="4069080"/>
+            <a:ext cx="3383280" cy="2148839"/>
+          </a:xfrm>
+          <a:prstGeom prst="rect">
+            <a:avLst/>
+          </a:prstGeom>
+          <a:noFill/>
+        </p:spPr>
+        <p:txBody>
+          <a:bodyPr wrap="square">
+            <a:spAutoFit/>
+          </a:bodyPr>
+          <a:lstStyle/>
+          <a:p>
+            <a:pPr algn="l">
+              <a:defRPr sz="1000" b="0">
+                <a:solidFill>
+                  <a:srgbClr val="B0B0B0"/>
+                </a:solidFill>
+                <a:latin typeface="Segoe UI"/>
+              </a:defRPr>
+            </a:pPr>
+            <a:r>
+              <a:t>Q: Which loans are in DEFAULT or FORECLOSURE?</a:t>
+            </a:r>
+            <a:br/>
+            <a:br/>
+            <a:r>
+              <a:t>• L0007 Northern Light — $790K — Annaly REIT</a:t>
+            </a:r>
+            <a:br/>
+            <a:r>
+              <a:t>• L0009 Atlas — $340K — AGNC REIT</a:t>
+            </a:r>
+            <a:br/>
+            <a:br/>
+            <a:r>
+              <a:t>Agent used servicing_db tool, returned deterministic SQL answer in 21s.</a:t>
+            </a:r>
+          </a:p>
+        </p:txBody>
+      </p:sp>
+      <p:sp>
+        <p:nvSpPr>
+          <p:cNvPr id="18" name="Rounded Rectangle 17"/>
+          <p:cNvSpPr/>
+          <p:nvPr/>
+        </p:nvSpPr>
+        <p:spPr>
+          <a:xfrm>
+            <a:off x="4297680" y="3657600"/>
+            <a:ext cx="3657600" cy="2651760"/>
+          </a:xfrm>
+          <a:prstGeom prst="roundRect">
+            <a:avLst/>
+          </a:prstGeom>
+          <a:solidFill>
+            <a:srgbClr val="353555"/>
+          </a:solidFill>
+          <a:ln>
+            <a:noFill/>
+          </a:ln>
+        </p:spPr>
+        <p:style>
+          <a:lnRef idx="1">
+            <a:schemeClr val="accent1"/>
+          </a:lnRef>
+          <a:fillRef idx="3">
+            <a:schemeClr val="accent1"/>
+          </a:fillRef>
+          <a:effectRef idx="2">
+            <a:schemeClr val="accent1"/>
+          </a:effectRef>
+          <a:fontRef idx="minor">
+            <a:schemeClr val="lt1"/>
+          </a:fontRef>
+        </p:style>
+        <p:txBody>
+          <a:bodyPr rtlCol="0" anchor="ctr"/>
+          <a:lstStyle/>
+          <a:p>
+            <a:pPr algn="ctr"/>
+          </a:p>
+        </p:txBody>
+      </p:sp>
+      <p:sp>
+        <p:nvSpPr>
+          <p:cNvPr id="19" name="Rectangle 18"/>
+          <p:cNvSpPr/>
+          <p:nvPr/>
+        </p:nvSpPr>
+        <p:spPr>
+          <a:xfrm>
+            <a:off x="4297680" y="3657600"/>
+            <a:ext cx="54864" cy="2651760"/>
+          </a:xfrm>
+          <a:prstGeom prst="rect">
+            <a:avLst/>
+          </a:prstGeom>
+          <a:solidFill>
+            <a:srgbClr val="4DA6FF"/>
+          </a:solidFill>
+          <a:ln>
+            <a:noFill/>
+          </a:ln>
+        </p:spPr>
+        <p:style>
+          <a:lnRef idx="1">
+            <a:schemeClr val="accent1"/>
+          </a:lnRef>
+          <a:fillRef idx="3">
+            <a:schemeClr val="accent1"/>
+          </a:fillRef>
+          <a:effectRef idx="2">
+            <a:schemeClr val="accent1"/>
+          </a:effectRef>
+          <a:fontRef idx="minor">
+            <a:schemeClr val="lt1"/>
+          </a:fontRef>
+        </p:style>
+        <p:txBody>
+          <a:bodyPr rtlCol="0" anchor="ctr"/>
+          <a:lstStyle/>
+          <a:p>
+            <a:pPr algn="ctr"/>
+          </a:p>
+        </p:txBody>
+      </p:sp>
+      <p:sp>
+        <p:nvSpPr>
+          <p:cNvPr id="20" name="TextBox 19"/>
+          <p:cNvSpPr txBox="1"/>
+          <p:nvPr/>
+        </p:nvSpPr>
+        <p:spPr>
+          <a:xfrm>
+            <a:off x="4480560" y="3749039"/>
+            <a:ext cx="3383280" cy="320040"/>
+          </a:xfrm>
+          <a:prstGeom prst="rect">
+            <a:avLst/>
+          </a:prstGeom>
+          <a:noFill/>
+        </p:spPr>
+        <p:txBody>
+          <a:bodyPr wrap="square">
+            <a:spAutoFit/>
+          </a:bodyPr>
+          <a:lstStyle/>
+          <a:p>
+            <a:pPr algn="l">
+              <a:defRPr sz="1300" b="1">
+                <a:solidFill>
+                  <a:srgbClr val="4DA6FF"/>
+                </a:solidFill>
+                <a:latin typeface="Segoe UI"/>
+              </a:defRPr>
+            </a:pPr>
+            <a:r>
+              <a:t>CROSS-SYSTEM QUERY</a:t>
+            </a:r>
+          </a:p>
+        </p:txBody>
+      </p:sp>
+      <p:sp>
+        <p:nvSpPr>
+          <p:cNvPr id="21" name="TextBox 20"/>
+          <p:cNvSpPr txBox="1"/>
+          <p:nvPr/>
+        </p:nvSpPr>
+        <p:spPr>
+          <a:xfrm>
+            <a:off x="4480560" y="4069080"/>
+            <a:ext cx="3383280" cy="2148839"/>
+          </a:xfrm>
+          <a:prstGeom prst="rect">
+            <a:avLst/>
+          </a:prstGeom>
+          <a:noFill/>
+        </p:spPr>
+        <p:txBody>
+          <a:bodyPr wrap="square">
+            <a:spAutoFit/>
+          </a:bodyPr>
+          <a:lstStyle/>
+          <a:p>
+            <a:pPr algn="l">
+              <a:defRPr sz="1000" b="0">
+                <a:solidFill>
+                  <a:srgbClr val="B0B0B0"/>
+                </a:solidFill>
+                <a:latin typeface="Segoe UI"/>
+              </a:defRPr>
+            </a:pPr>
+            <a:r>
+              <a:t>Neo4j TaskGraphs joined with MySQL home-lending data.</a:t>
+            </a:r>
+            <a:br/>
+            <a:br/>
+            <a:r>
+              <a:t>5 illustrative questions answered by scripts/cross_system_query.py:</a:t>
+            </a:r>
+            <a:br/>
+            <a:r>
+              <a:t>risk lifecycle, marketing funnel, investor distress exposure, agent routing.</a:t>
+            </a:r>
+          </a:p>
+        </p:txBody>
+      </p:sp>
+      <p:sp>
+        <p:nvSpPr>
+          <p:cNvPr id="22" name="Rounded Rectangle 21"/>
+          <p:cNvSpPr/>
+          <p:nvPr/>
+        </p:nvSpPr>
+        <p:spPr>
+          <a:xfrm>
+            <a:off x="8138160" y="3657600"/>
+            <a:ext cx="3657600" cy="2651760"/>
+          </a:xfrm>
+          <a:prstGeom prst="roundRect">
+            <a:avLst/>
+          </a:prstGeom>
+          <a:solidFill>
+            <a:srgbClr val="353555"/>
+          </a:solidFill>
+          <a:ln>
+            <a:noFill/>
+          </a:ln>
+        </p:spPr>
+        <p:style>
+          <a:lnRef idx="1">
+            <a:schemeClr val="accent1"/>
+          </a:lnRef>
+          <a:fillRef idx="3">
+            <a:schemeClr val="accent1"/>
+          </a:fillRef>
+          <a:effectRef idx="2">
+            <a:schemeClr val="accent1"/>
+          </a:effectRef>
+          <a:fontRef idx="minor">
+            <a:schemeClr val="lt1"/>
+          </a:fontRef>
+        </p:style>
+        <p:txBody>
+          <a:bodyPr rtlCol="0" anchor="ctr"/>
+          <a:lstStyle/>
+          <a:p>
+            <a:pPr algn="ctr"/>
+          </a:p>
+        </p:txBody>
+      </p:sp>
+      <p:sp>
+        <p:nvSpPr>
+          <p:cNvPr id="23" name="Rectangle 22"/>
+          <p:cNvSpPr/>
+          <p:nvPr/>
+        </p:nvSpPr>
+        <p:spPr>
+          <a:xfrm>
+            <a:off x="8138160" y="3657600"/>
+            <a:ext cx="54864" cy="2651760"/>
+          </a:xfrm>
+          <a:prstGeom prst="rect">
+            <a:avLst/>
+          </a:prstGeom>
+          <a:solidFill>
+            <a:srgbClr val="00C853"/>
+          </a:solidFill>
+          <a:ln>
+            <a:noFill/>
+          </a:ln>
+        </p:spPr>
+        <p:style>
+          <a:lnRef idx="1">
+            <a:schemeClr val="accent1"/>
+          </a:lnRef>
+          <a:fillRef idx="3">
+            <a:schemeClr val="accent1"/>
+          </a:fillRef>
+          <a:effectRef idx="2">
+            <a:schemeClr val="accent1"/>
+          </a:effectRef>
+          <a:fontRef idx="minor">
+            <a:schemeClr val="lt1"/>
+          </a:fontRef>
+        </p:style>
+        <p:txBody>
+          <a:bodyPr rtlCol="0" anchor="ctr"/>
+          <a:lstStyle/>
+          <a:p>
+            <a:pPr algn="ctr"/>
+          </a:p>
+        </p:txBody>
+      </p:sp>
+      <p:sp>
+        <p:nvSpPr>
+          <p:cNvPr id="24" name="TextBox 23"/>
+          <p:cNvSpPr txBox="1"/>
+          <p:nvPr/>
+        </p:nvSpPr>
+        <p:spPr>
+          <a:xfrm>
+            <a:off x="8321040" y="3749039"/>
+            <a:ext cx="3383280" cy="320040"/>
+          </a:xfrm>
+          <a:prstGeom prst="rect">
+            <a:avLst/>
+          </a:prstGeom>
+          <a:noFill/>
+        </p:spPr>
+        <p:txBody>
+          <a:bodyPr wrap="square">
+            <a:spAutoFit/>
+          </a:bodyPr>
+          <a:lstStyle/>
+          <a:p>
+            <a:pPr algn="l">
+              <a:defRPr sz="1300" b="1">
+                <a:solidFill>
+                  <a:srgbClr val="00C853"/>
+                </a:solidFill>
+                <a:latin typeface="Segoe UI"/>
+              </a:defRPr>
+            </a:pPr>
+            <a:r>
+              <a:t>7 LAWS ENFORCED</a:t>
+            </a:r>
+          </a:p>
+        </p:txBody>
+      </p:sp>
+      <p:sp>
+        <p:nvSpPr>
+          <p:cNvPr id="25" name="TextBox 24"/>
+          <p:cNvSpPr txBox="1"/>
+          <p:nvPr/>
+        </p:nvSpPr>
+        <p:spPr>
+          <a:xfrm>
+            <a:off x="8321040" y="4069080"/>
+            <a:ext cx="3383280" cy="2148839"/>
+          </a:xfrm>
+          <a:prstGeom prst="rect">
+            <a:avLst/>
+          </a:prstGeom>
+          <a:noFill/>
+        </p:spPr>
+        <p:txBody>
+          <a:bodyPr wrap="square">
+            <a:spAutoFit/>
+          </a:bodyPr>
+          <a:lstStyle/>
+          <a:p>
+            <a:pPr algn="l">
+              <a:defRPr sz="1000" b="0">
+                <a:solidFill>
+                  <a:srgbClr val="B0B0B0"/>
+                </a:solidFill>
+                <a:latin typeface="Segoe UI"/>
+              </a:defRPr>
+            </a:pPr>
+            <a:r>
+              <a:t>• LLM decomposes every request</a:t>
+            </a:r>
+            <a:br/>
+            <a:r>
+              <a:t>• Scoring bands adapt via RL</a:t>
+            </a:r>
+            <a:br/>
+            <a:r>
+              <a:t>• Prompts assembled at runtime</a:t>
+            </a:r>
+            <a:br/>
+            <a:r>
+              <a:t>• Every tool defined in MySQL</a:t>
+            </a:r>
+            <a:br/>
+            <a:r>
+              <a:t>• trace_id on every path</a:t>
+            </a:r>
+          </a:p>
+        </p:txBody>
+      </p:sp>
+    </p:spTree>
+  </p:cSld>
+  <p:clrMapOvr>
+    <a:masterClrMapping/>
+  </p:clrMapOvr>
+</p:sld>
+</file>
+
+<file path=ppt/slides/slide11.xml><?xml version="1.0" encoding="utf-8"?>
+<p:sld xmlns:a="http://schemas.openxmlformats.org/drawingml/2006/main" xmlns:p="http://schemas.openxmlformats.org/presentationml/2006/main" xmlns:r="http://schemas.openxmlformats.org/officeDocument/2006/relationships">
+  <p:cSld>
+    <p:bg>
+      <p:bgPr>
+        <a:solidFill>
+          <a:srgbClr val="1A1A2E"/>
+        </a:solidFill>
+        <a:effectLst/>
+      </p:bgPr>
+    </p:bg>
+    <p:spTree>
+      <p:nvGrpSpPr>
+        <p:cNvPr id="1" name=""/>
+        <p:cNvGrpSpPr/>
+        <p:nvPr/>
+      </p:nvGrpSpPr>
+      <p:grpSpPr/>
+      <p:sp>
+        <p:nvSpPr>
+          <p:cNvPr id="2" name="TextBox 1"/>
+          <p:cNvSpPr txBox="1"/>
+          <p:nvPr/>
+        </p:nvSpPr>
+        <p:spPr>
+          <a:xfrm>
+            <a:off x="457200" y="274320"/>
+            <a:ext cx="10972800" cy="548640"/>
+          </a:xfrm>
+          <a:prstGeom prst="rect">
+            <a:avLst/>
+          </a:prstGeom>
+          <a:noFill/>
+        </p:spPr>
+        <p:txBody>
+          <a:bodyPr wrap="square">
+            <a:spAutoFit/>
+          </a:bodyPr>
+          <a:lstStyle/>
+          <a:p>
+            <a:pPr algn="ctr">
+              <a:defRPr sz="2800" b="1">
+                <a:solidFill>
+                  <a:srgbClr val="007BFF"/>
+                </a:solidFill>
+                <a:latin typeface="Segoe UI"/>
+              </a:defRPr>
+            </a:pPr>
+            <a:r>
+              <a:t>Model Governance — Inference Traceability</a:t>
+            </a:r>
+          </a:p>
+        </p:txBody>
+      </p:sp>
+      <p:sp>
+        <p:nvSpPr>
+          <p:cNvPr id="3" name="TextBox 2"/>
+          <p:cNvSpPr txBox="1"/>
+          <p:nvPr/>
+        </p:nvSpPr>
+        <p:spPr>
+          <a:xfrm>
+            <a:off x="457200" y="822960"/>
+            <a:ext cx="10972800" cy="365760"/>
+          </a:xfrm>
+          <a:prstGeom prst="rect">
+            <a:avLst/>
+          </a:prstGeom>
+          <a:noFill/>
+        </p:spPr>
+        <p:txBody>
+          <a:bodyPr wrap="square">
+            <a:spAutoFit/>
+          </a:bodyPr>
+          <a:lstStyle/>
+          <a:p>
             <a:pPr algn="ctr">
               <a:defRPr sz="1300" b="0">
                 <a:solidFill>
+                  <a:srgbClr val="B0B0B0"/>
+                </a:solidFill>
+                <a:latin typeface="Segoe UI"/>
+              </a:defRPr>
+            </a:pPr>
+            <a:r>
+              <a:t>For any answer the system produces, show the full layered reasoning chain</a:t>
+            </a:r>
+          </a:p>
+        </p:txBody>
+      </p:sp>
+      <p:sp>
+        <p:nvSpPr>
+          <p:cNvPr id="4" name="Rounded Rectangle 3"/>
+          <p:cNvSpPr/>
+          <p:nvPr/>
+        </p:nvSpPr>
+        <p:spPr>
+          <a:xfrm>
+            <a:off x="914400" y="1463040"/>
+            <a:ext cx="2743200" cy="365760"/>
+          </a:xfrm>
+          <a:prstGeom prst="roundRect">
+            <a:avLst/>
+          </a:prstGeom>
+          <a:solidFill>
+            <a:srgbClr val="007BFF"/>
+          </a:solidFill>
+          <a:ln>
+            <a:noFill/>
+          </a:ln>
+        </p:spPr>
+        <p:style>
+          <a:lnRef idx="1">
+            <a:schemeClr val="accent1"/>
+          </a:lnRef>
+          <a:fillRef idx="3">
+            <a:schemeClr val="accent1"/>
+          </a:fillRef>
+          <a:effectRef idx="2">
+            <a:schemeClr val="accent1"/>
+          </a:effectRef>
+          <a:fontRef idx="minor">
+            <a:schemeClr val="lt1"/>
+          </a:fontRef>
+        </p:style>
+        <p:txBody>
+          <a:bodyPr rtlCol="0" anchor="ctr" wrap="square"/>
+          <a:lstStyle/>
+          <a:p>
+            <a:pPr algn="ctr">
+              <a:defRPr sz="1100" b="1">
+                <a:solidFill>
+                  <a:srgbClr val="FFFFFF"/>
+                </a:solidFill>
+                <a:latin typeface="Segoe UI"/>
+              </a:defRPr>
+            </a:pPr>
+            <a:r>
+              <a:t>USER MESSAGE</a:t>
+            </a:r>
+          </a:p>
+        </p:txBody>
+      </p:sp>
+      <p:sp>
+        <p:nvSpPr>
+          <p:cNvPr id="5" name="TextBox 4"/>
+          <p:cNvSpPr txBox="1"/>
+          <p:nvPr/>
+        </p:nvSpPr>
+        <p:spPr>
+          <a:xfrm>
+            <a:off x="3931920" y="1508760"/>
+            <a:ext cx="7315200" cy="274320"/>
+          </a:xfrm>
+          <a:prstGeom prst="rect">
+            <a:avLst/>
+          </a:prstGeom>
+          <a:noFill/>
+        </p:spPr>
+        <p:txBody>
+          <a:bodyPr wrap="square">
+            <a:spAutoFit/>
+          </a:bodyPr>
+          <a:lstStyle/>
+          <a:p>
+            <a:pPr algn="l">
+              <a:defRPr sz="1100" b="0">
+                <a:solidFill>
+                  <a:srgbClr val="B0B0B0"/>
+                </a:solidFill>
+                <a:latin typeface="Segoe UI"/>
+              </a:defRPr>
+            </a:pPr>
+            <a:r>
+              <a:t>→ tracked in MySQL + Neo4j, joined on trace_id</a:t>
+            </a:r>
+          </a:p>
+        </p:txBody>
+      </p:sp>
+      <p:sp>
+        <p:nvSpPr>
+          <p:cNvPr id="6" name="Rounded Rectangle 5"/>
+          <p:cNvSpPr/>
+          <p:nvPr/>
+        </p:nvSpPr>
+        <p:spPr>
+          <a:xfrm>
+            <a:off x="914400" y="1965960"/>
+            <a:ext cx="2743200" cy="365760"/>
+          </a:xfrm>
+          <a:prstGeom prst="roundRect">
+            <a:avLst/>
+          </a:prstGeom>
+          <a:solidFill>
+            <a:srgbClr val="AB47BC"/>
+          </a:solidFill>
+          <a:ln>
+            <a:noFill/>
+          </a:ln>
+        </p:spPr>
+        <p:style>
+          <a:lnRef idx="1">
+            <a:schemeClr val="accent1"/>
+          </a:lnRef>
+          <a:fillRef idx="3">
+            <a:schemeClr val="accent1"/>
+          </a:fillRef>
+          <a:effectRef idx="2">
+            <a:schemeClr val="accent1"/>
+          </a:effectRef>
+          <a:fontRef idx="minor">
+            <a:schemeClr val="lt1"/>
+          </a:fontRef>
+        </p:style>
+        <p:txBody>
+          <a:bodyPr rtlCol="0" anchor="ctr" wrap="square"/>
+          <a:lstStyle/>
+          <a:p>
+            <a:pPr algn="ctr">
+              <a:defRPr sz="1100" b="1">
+                <a:solidFill>
+                  <a:srgbClr val="FFFFFF"/>
+                </a:solidFill>
+                <a:latin typeface="Segoe UI"/>
+              </a:defRPr>
+            </a:pPr>
+            <a:r>
+              <a:t>TASK NODE</a:t>
+            </a:r>
+          </a:p>
+        </p:txBody>
+      </p:sp>
+      <p:sp>
+        <p:nvSpPr>
+          <p:cNvPr id="7" name="TextBox 6"/>
+          <p:cNvSpPr txBox="1"/>
+          <p:nvPr/>
+        </p:nvSpPr>
+        <p:spPr>
+          <a:xfrm>
+            <a:off x="3931920" y="2011680"/>
+            <a:ext cx="7315200" cy="274320"/>
+          </a:xfrm>
+          <a:prstGeom prst="rect">
+            <a:avLst/>
+          </a:prstGeom>
+          <a:noFill/>
+        </p:spPr>
+        <p:txBody>
+          <a:bodyPr wrap="square">
+            <a:spAutoFit/>
+          </a:bodyPr>
+          <a:lstStyle/>
+          <a:p>
+            <a:pPr algn="l">
+              <a:defRPr sz="1100" b="0">
+                <a:solidFill>
+                  <a:srgbClr val="B0B0B0"/>
+                </a:solidFill>
+                <a:latin typeface="Segoe UI"/>
+              </a:defRPr>
+            </a:pPr>
+            <a:r>
+              <a:t>→ tracked in MySQL + Neo4j, joined on trace_id</a:t>
+            </a:r>
+          </a:p>
+        </p:txBody>
+      </p:sp>
+      <p:sp>
+        <p:nvSpPr>
+          <p:cNvPr id="8" name="Rounded Rectangle 7"/>
+          <p:cNvSpPr/>
+          <p:nvPr/>
+        </p:nvSpPr>
+        <p:spPr>
+          <a:xfrm>
+            <a:off x="914400" y="2468880"/>
+            <a:ext cx="2743200" cy="365760"/>
+          </a:xfrm>
+          <a:prstGeom prst="roundRect">
+            <a:avLst/>
+          </a:prstGeom>
+          <a:solidFill>
+            <a:srgbClr val="4DA6FF"/>
+          </a:solidFill>
+          <a:ln>
+            <a:noFill/>
+          </a:ln>
+        </p:spPr>
+        <p:style>
+          <a:lnRef idx="1">
+            <a:schemeClr val="accent1"/>
+          </a:lnRef>
+          <a:fillRef idx="3">
+            <a:schemeClr val="accent1"/>
+          </a:fillRef>
+          <a:effectRef idx="2">
+            <a:schemeClr val="accent1"/>
+          </a:effectRef>
+          <a:fontRef idx="minor">
+            <a:schemeClr val="lt1"/>
+          </a:fontRef>
+        </p:style>
+        <p:txBody>
+          <a:bodyPr rtlCol="0" anchor="ctr" wrap="square"/>
+          <a:lstStyle/>
+          <a:p>
+            <a:pPr algn="ctr">
+              <a:defRPr sz="1100" b="1">
+                <a:solidFill>
+                  <a:srgbClr val="FFFFFF"/>
+                </a:solidFill>
+                <a:latin typeface="Segoe UI"/>
+              </a:defRPr>
+            </a:pPr>
+            <a:r>
+              <a:t>PIPELINE STEP</a:t>
+            </a:r>
+          </a:p>
+        </p:txBody>
+      </p:sp>
+      <p:sp>
+        <p:nvSpPr>
+          <p:cNvPr id="9" name="TextBox 8"/>
+          <p:cNvSpPr txBox="1"/>
+          <p:nvPr/>
+        </p:nvSpPr>
+        <p:spPr>
+          <a:xfrm>
+            <a:off x="3931920" y="2514600"/>
+            <a:ext cx="7315200" cy="274320"/>
+          </a:xfrm>
+          <a:prstGeom prst="rect">
+            <a:avLst/>
+          </a:prstGeom>
+          <a:noFill/>
+        </p:spPr>
+        <p:txBody>
+          <a:bodyPr wrap="square">
+            <a:spAutoFit/>
+          </a:bodyPr>
+          <a:lstStyle/>
+          <a:p>
+            <a:pPr algn="l">
+              <a:defRPr sz="1100" b="0">
+                <a:solidFill>
+                  <a:srgbClr val="B0B0B0"/>
+                </a:solidFill>
+                <a:latin typeface="Segoe UI"/>
+              </a:defRPr>
+            </a:pPr>
+            <a:r>
+              <a:t>→ tracked in MySQL + Neo4j, joined on trace_id</a:t>
+            </a:r>
+          </a:p>
+        </p:txBody>
+      </p:sp>
+      <p:sp>
+        <p:nvSpPr>
+          <p:cNvPr id="10" name="Rounded Rectangle 9"/>
+          <p:cNvSpPr/>
+          <p:nvPr/>
+        </p:nvSpPr>
+        <p:spPr>
+          <a:xfrm>
+            <a:off x="914400" y="2971800"/>
+            <a:ext cx="2743200" cy="365760"/>
+          </a:xfrm>
+          <a:prstGeom prst="roundRect">
+            <a:avLst/>
+          </a:prstGeom>
+          <a:solidFill>
+            <a:srgbClr val="00C853"/>
+          </a:solidFill>
+          <a:ln>
+            <a:noFill/>
+          </a:ln>
+        </p:spPr>
+        <p:style>
+          <a:lnRef idx="1">
+            <a:schemeClr val="accent1"/>
+          </a:lnRef>
+          <a:fillRef idx="3">
+            <a:schemeClr val="accent1"/>
+          </a:fillRef>
+          <a:effectRef idx="2">
+            <a:schemeClr val="accent1"/>
+          </a:effectRef>
+          <a:fontRef idx="minor">
+            <a:schemeClr val="lt1"/>
+          </a:fontRef>
+        </p:style>
+        <p:txBody>
+          <a:bodyPr rtlCol="0" anchor="ctr" wrap="square"/>
+          <a:lstStyle/>
+          <a:p>
+            <a:pPr algn="ctr">
+              <a:defRPr sz="1100" b="1">
+                <a:solidFill>
+                  <a:srgbClr val="FFFFFF"/>
+                </a:solidFill>
+                <a:latin typeface="Segoe UI"/>
+              </a:defRPr>
+            </a:pPr>
+            <a:r>
+              <a:t>TOOL CALL</a:t>
+            </a:r>
+          </a:p>
+        </p:txBody>
+      </p:sp>
+      <p:sp>
+        <p:nvSpPr>
+          <p:cNvPr id="11" name="TextBox 10"/>
+          <p:cNvSpPr txBox="1"/>
+          <p:nvPr/>
+        </p:nvSpPr>
+        <p:spPr>
+          <a:xfrm>
+            <a:off x="3931920" y="3017520"/>
+            <a:ext cx="7315200" cy="274320"/>
+          </a:xfrm>
+          <a:prstGeom prst="rect">
+            <a:avLst/>
+          </a:prstGeom>
+          <a:noFill/>
+        </p:spPr>
+        <p:txBody>
+          <a:bodyPr wrap="square">
+            <a:spAutoFit/>
+          </a:bodyPr>
+          <a:lstStyle/>
+          <a:p>
+            <a:pPr algn="l">
+              <a:defRPr sz="1100" b="0">
+                <a:solidFill>
+                  <a:srgbClr val="B0B0B0"/>
+                </a:solidFill>
+                <a:latin typeface="Segoe UI"/>
+              </a:defRPr>
+            </a:pPr>
+            <a:r>
+              <a:t>→ tracked in MySQL + Neo4j, joined on trace_id</a:t>
+            </a:r>
+          </a:p>
+        </p:txBody>
+      </p:sp>
+      <p:sp>
+        <p:nvSpPr>
+          <p:cNvPr id="12" name="Rounded Rectangle 11"/>
+          <p:cNvSpPr/>
+          <p:nvPr/>
+        </p:nvSpPr>
+        <p:spPr>
+          <a:xfrm>
+            <a:off x="914400" y="3474720"/>
+            <a:ext cx="2743200" cy="365760"/>
+          </a:xfrm>
+          <a:prstGeom prst="roundRect">
+            <a:avLst/>
+          </a:prstGeom>
+          <a:solidFill>
+            <a:srgbClr val="FF9F00"/>
+          </a:solidFill>
+          <a:ln>
+            <a:noFill/>
+          </a:ln>
+        </p:spPr>
+        <p:style>
+          <a:lnRef idx="1">
+            <a:schemeClr val="accent1"/>
+          </a:lnRef>
+          <a:fillRef idx="3">
+            <a:schemeClr val="accent1"/>
+          </a:fillRef>
+          <a:effectRef idx="2">
+            <a:schemeClr val="accent1"/>
+          </a:effectRef>
+          <a:fontRef idx="minor">
+            <a:schemeClr val="lt1"/>
+          </a:fontRef>
+        </p:style>
+        <p:txBody>
+          <a:bodyPr rtlCol="0" anchor="ctr" wrap="square"/>
+          <a:lstStyle/>
+          <a:p>
+            <a:pPr algn="ctr">
+              <a:defRPr sz="1100" b="1">
+                <a:solidFill>
+                  <a:srgbClr val="FFFFFF"/>
+                </a:solidFill>
+                <a:latin typeface="Segoe UI"/>
+              </a:defRPr>
+            </a:pPr>
+            <a:r>
+              <a:t>SCORING</a:t>
+            </a:r>
+          </a:p>
+        </p:txBody>
+      </p:sp>
+      <p:sp>
+        <p:nvSpPr>
+          <p:cNvPr id="13" name="TextBox 12"/>
+          <p:cNvSpPr txBox="1"/>
+          <p:nvPr/>
+        </p:nvSpPr>
+        <p:spPr>
+          <a:xfrm>
+            <a:off x="3931920" y="3520439"/>
+            <a:ext cx="7315200" cy="274320"/>
+          </a:xfrm>
+          <a:prstGeom prst="rect">
+            <a:avLst/>
+          </a:prstGeom>
+          <a:noFill/>
+        </p:spPr>
+        <p:txBody>
+          <a:bodyPr wrap="square">
+            <a:spAutoFit/>
+          </a:bodyPr>
+          <a:lstStyle/>
+          <a:p>
+            <a:pPr algn="l">
+              <a:defRPr sz="1100" b="0">
+                <a:solidFill>
+                  <a:srgbClr val="B0B0B0"/>
+                </a:solidFill>
+                <a:latin typeface="Segoe UI"/>
+              </a:defRPr>
+            </a:pPr>
+            <a:r>
+              <a:t>→ tracked in MySQL + Neo4j, joined on trace_id</a:t>
+            </a:r>
+          </a:p>
+        </p:txBody>
+      </p:sp>
+      <p:sp>
+        <p:nvSpPr>
+          <p:cNvPr id="14" name="Rounded Rectangle 13"/>
+          <p:cNvSpPr/>
+          <p:nvPr/>
+        </p:nvSpPr>
+        <p:spPr>
+          <a:xfrm>
+            <a:off x="914400" y="3977639"/>
+            <a:ext cx="2743200" cy="365760"/>
+          </a:xfrm>
+          <a:prstGeom prst="roundRect">
+            <a:avLst/>
+          </a:prstGeom>
+          <a:solidFill>
+            <a:srgbClr val="F44336"/>
+          </a:solidFill>
+          <a:ln>
+            <a:noFill/>
+          </a:ln>
+        </p:spPr>
+        <p:style>
+          <a:lnRef idx="1">
+            <a:schemeClr val="accent1"/>
+          </a:lnRef>
+          <a:fillRef idx="3">
+            <a:schemeClr val="accent1"/>
+          </a:fillRef>
+          <a:effectRef idx="2">
+            <a:schemeClr val="accent1"/>
+          </a:effectRef>
+          <a:fontRef idx="minor">
+            <a:schemeClr val="lt1"/>
+          </a:fontRef>
+        </p:style>
+        <p:txBody>
+          <a:bodyPr rtlCol="0" anchor="ctr" wrap="square"/>
+          <a:lstStyle/>
+          <a:p>
+            <a:pPr algn="ctr">
+              <a:defRPr sz="1100" b="1">
+                <a:solidFill>
+                  <a:srgbClr val="FFFFFF"/>
+                </a:solidFill>
+                <a:latin typeface="Segoe UI"/>
+              </a:defRPr>
+            </a:pPr>
+            <a:r>
+              <a:t>RL FEEDBACK</a:t>
+            </a:r>
+          </a:p>
+        </p:txBody>
+      </p:sp>
+      <p:sp>
+        <p:nvSpPr>
+          <p:cNvPr id="15" name="TextBox 14"/>
+          <p:cNvSpPr txBox="1"/>
+          <p:nvPr/>
+        </p:nvSpPr>
+        <p:spPr>
+          <a:xfrm>
+            <a:off x="3931920" y="4023359"/>
+            <a:ext cx="7315200" cy="274320"/>
+          </a:xfrm>
+          <a:prstGeom prst="rect">
+            <a:avLst/>
+          </a:prstGeom>
+          <a:noFill/>
+        </p:spPr>
+        <p:txBody>
+          <a:bodyPr wrap="square">
+            <a:spAutoFit/>
+          </a:bodyPr>
+          <a:lstStyle/>
+          <a:p>
+            <a:pPr algn="l">
+              <a:defRPr sz="1100" b="0">
+                <a:solidFill>
+                  <a:srgbClr val="B0B0B0"/>
+                </a:solidFill>
+                <a:latin typeface="Segoe UI"/>
+              </a:defRPr>
+            </a:pPr>
+            <a:r>
+              <a:t>→ tracked in MySQL + Neo4j, joined on trace_id</a:t>
+            </a:r>
+          </a:p>
+        </p:txBody>
+      </p:sp>
+      <p:sp>
+        <p:nvSpPr>
+          <p:cNvPr id="16" name="Rounded Rectangle 15"/>
+          <p:cNvSpPr/>
+          <p:nvPr/>
+        </p:nvSpPr>
+        <p:spPr>
+          <a:xfrm>
+            <a:off x="914400" y="4480559"/>
+            <a:ext cx="2743200" cy="365760"/>
+          </a:xfrm>
+          <a:prstGeom prst="roundRect">
+            <a:avLst/>
+          </a:prstGeom>
+          <a:solidFill>
+            <a:srgbClr val="353555"/>
+          </a:solidFill>
+          <a:ln>
+            <a:noFill/>
+          </a:ln>
+        </p:spPr>
+        <p:style>
+          <a:lnRef idx="1">
+            <a:schemeClr val="accent1"/>
+          </a:lnRef>
+          <a:fillRef idx="3">
+            <a:schemeClr val="accent1"/>
+          </a:fillRef>
+          <a:effectRef idx="2">
+            <a:schemeClr val="accent1"/>
+          </a:effectRef>
+          <a:fontRef idx="minor">
+            <a:schemeClr val="lt1"/>
+          </a:fontRef>
+        </p:style>
+        <p:txBody>
+          <a:bodyPr rtlCol="0" anchor="ctr" wrap="square"/>
+          <a:lstStyle/>
+          <a:p>
+            <a:pPr algn="ctr">
+              <a:defRPr sz="1100" b="1">
+                <a:solidFill>
+                  <a:srgbClr val="FFFFFF"/>
+                </a:solidFill>
+                <a:latin typeface="Segoe UI"/>
+              </a:defRPr>
+            </a:pPr>
+            <a:r>
+              <a:t>AGENT INTERACTION</a:t>
+            </a:r>
+          </a:p>
+        </p:txBody>
+      </p:sp>
+      <p:sp>
+        <p:nvSpPr>
+          <p:cNvPr id="17" name="TextBox 16"/>
+          <p:cNvSpPr txBox="1"/>
+          <p:nvPr/>
+        </p:nvSpPr>
+        <p:spPr>
+          <a:xfrm>
+            <a:off x="3931920" y="4526279"/>
+            <a:ext cx="7315200" cy="274320"/>
+          </a:xfrm>
+          <a:prstGeom prst="rect">
+            <a:avLst/>
+          </a:prstGeom>
+          <a:noFill/>
+        </p:spPr>
+        <p:txBody>
+          <a:bodyPr wrap="square">
+            <a:spAutoFit/>
+          </a:bodyPr>
+          <a:lstStyle/>
+          <a:p>
+            <a:pPr algn="l">
+              <a:defRPr sz="1100" b="0">
+                <a:solidFill>
+                  <a:srgbClr val="B0B0B0"/>
+                </a:solidFill>
+                <a:latin typeface="Segoe UI"/>
+              </a:defRPr>
+            </a:pPr>
+            <a:r>
+              <a:t>→ tracked in MySQL + Neo4j, joined on trace_id</a:t>
+            </a:r>
+          </a:p>
+        </p:txBody>
+      </p:sp>
+      <p:sp>
+        <p:nvSpPr>
+          <p:cNvPr id="18" name="Rounded Rectangle 17"/>
+          <p:cNvSpPr/>
+          <p:nvPr/>
+        </p:nvSpPr>
+        <p:spPr>
+          <a:xfrm>
+            <a:off x="914400" y="4983479"/>
+            <a:ext cx="2743200" cy="365760"/>
+          </a:xfrm>
+          <a:prstGeom prst="roundRect">
+            <a:avLst/>
+          </a:prstGeom>
+          <a:solidFill>
+            <a:srgbClr val="00C853"/>
+          </a:solidFill>
+          <a:ln>
+            <a:noFill/>
+          </a:ln>
+        </p:spPr>
+        <p:style>
+          <a:lnRef idx="1">
+            <a:schemeClr val="accent1"/>
+          </a:lnRef>
+          <a:fillRef idx="3">
+            <a:schemeClr val="accent1"/>
+          </a:fillRef>
+          <a:effectRef idx="2">
+            <a:schemeClr val="accent1"/>
+          </a:effectRef>
+          <a:fontRef idx="minor">
+            <a:schemeClr val="lt1"/>
+          </a:fontRef>
+        </p:style>
+        <p:txBody>
+          <a:bodyPr rtlCol="0" anchor="ctr" wrap="square"/>
+          <a:lstStyle/>
+          <a:p>
+            <a:pPr algn="ctr">
+              <a:defRPr sz="1100" b="1">
+                <a:solidFill>
+                  <a:srgbClr val="FFFFFF"/>
+                </a:solidFill>
+                <a:latin typeface="Segoe UI"/>
+              </a:defRPr>
+            </a:pPr>
+            <a:r>
+              <a:t>ASSISTANT RESPONSE</a:t>
+            </a:r>
+          </a:p>
+        </p:txBody>
+      </p:sp>
+      <p:sp>
+        <p:nvSpPr>
+          <p:cNvPr id="19" name="TextBox 18"/>
+          <p:cNvSpPr txBox="1"/>
+          <p:nvPr/>
+        </p:nvSpPr>
+        <p:spPr>
+          <a:xfrm>
+            <a:off x="3931920" y="5029199"/>
+            <a:ext cx="7315200" cy="274320"/>
+          </a:xfrm>
+          <a:prstGeom prst="rect">
+            <a:avLst/>
+          </a:prstGeom>
+          <a:noFill/>
+        </p:spPr>
+        <p:txBody>
+          <a:bodyPr wrap="square">
+            <a:spAutoFit/>
+          </a:bodyPr>
+          <a:lstStyle/>
+          <a:p>
+            <a:pPr algn="l">
+              <a:defRPr sz="1100" b="0">
+                <a:solidFill>
+                  <a:srgbClr val="B0B0B0"/>
+                </a:solidFill>
+                <a:latin typeface="Segoe UI"/>
+              </a:defRPr>
+            </a:pPr>
+            <a:r>
+              <a:t>→ tracked in MySQL + Neo4j, joined on trace_id</a:t>
+            </a:r>
+          </a:p>
+        </p:txBody>
+      </p:sp>
+      <p:sp>
+        <p:nvSpPr>
+          <p:cNvPr id="20" name="Rounded Rectangle 19"/>
+          <p:cNvSpPr/>
+          <p:nvPr/>
+        </p:nvSpPr>
+        <p:spPr>
+          <a:xfrm>
+            <a:off x="457200" y="5760720"/>
+            <a:ext cx="11247120" cy="914400"/>
+          </a:xfrm>
+          <a:prstGeom prst="roundRect">
+            <a:avLst/>
+          </a:prstGeom>
+          <a:solidFill>
+            <a:srgbClr val="353555"/>
+          </a:solidFill>
+          <a:ln>
+            <a:noFill/>
+          </a:ln>
+        </p:spPr>
+        <p:style>
+          <a:lnRef idx="1">
+            <a:schemeClr val="accent1"/>
+          </a:lnRef>
+          <a:fillRef idx="3">
+            <a:schemeClr val="accent1"/>
+          </a:fillRef>
+          <a:effectRef idx="2">
+            <a:schemeClr val="accent1"/>
+          </a:effectRef>
+          <a:fontRef idx="minor">
+            <a:schemeClr val="lt1"/>
+          </a:fontRef>
+        </p:style>
+        <p:txBody>
+          <a:bodyPr rtlCol="0" anchor="ctr"/>
+          <a:lstStyle/>
+          <a:p>
+            <a:pPr algn="ctr"/>
+          </a:p>
+        </p:txBody>
+      </p:sp>
+      <p:sp>
+        <p:nvSpPr>
+          <p:cNvPr id="21" name="Rectangle 20"/>
+          <p:cNvSpPr/>
+          <p:nvPr/>
+        </p:nvSpPr>
+        <p:spPr>
+          <a:xfrm>
+            <a:off x="457200" y="5760720"/>
+            <a:ext cx="54864" cy="914400"/>
+          </a:xfrm>
+          <a:prstGeom prst="rect">
+            <a:avLst/>
+          </a:prstGeom>
+          <a:solidFill>
+            <a:srgbClr val="00C853"/>
+          </a:solidFill>
+          <a:ln>
+            <a:noFill/>
+          </a:ln>
+        </p:spPr>
+        <p:style>
+          <a:lnRef idx="1">
+            <a:schemeClr val="accent1"/>
+          </a:lnRef>
+          <a:fillRef idx="3">
+            <a:schemeClr val="accent1"/>
+          </a:fillRef>
+          <a:effectRef idx="2">
+            <a:schemeClr val="accent1"/>
+          </a:effectRef>
+          <a:fontRef idx="minor">
+            <a:schemeClr val="lt1"/>
+          </a:fontRef>
+        </p:style>
+        <p:txBody>
+          <a:bodyPr rtlCol="0" anchor="ctr"/>
+          <a:lstStyle/>
+          <a:p>
+            <a:pPr algn="ctr"/>
+          </a:p>
+        </p:txBody>
+      </p:sp>
+      <p:sp>
+        <p:nvSpPr>
+          <p:cNvPr id="22" name="TextBox 21"/>
+          <p:cNvSpPr txBox="1"/>
+          <p:nvPr/>
+        </p:nvSpPr>
+        <p:spPr>
+          <a:xfrm>
+            <a:off x="640080" y="5852159"/>
+            <a:ext cx="10972800" cy="320040"/>
+          </a:xfrm>
+          <a:prstGeom prst="rect">
+            <a:avLst/>
+          </a:prstGeom>
+          <a:noFill/>
+        </p:spPr>
+        <p:txBody>
+          <a:bodyPr wrap="square">
+            <a:spAutoFit/>
+          </a:bodyPr>
+          <a:lstStyle/>
+          <a:p>
+            <a:pPr algn="l">
+              <a:defRPr sz="1300" b="1">
+                <a:solidFill>
+                  <a:srgbClr val="00C853"/>
+                </a:solidFill>
+                <a:latin typeface="Segoe UI"/>
+              </a:defRPr>
+            </a:pPr>
+            <a:r>
+              <a:t>GET /v1/governance/traces/{trace_id}</a:t>
+            </a:r>
+          </a:p>
+        </p:txBody>
+      </p:sp>
+      <p:sp>
+        <p:nvSpPr>
+          <p:cNvPr id="23" name="TextBox 22"/>
+          <p:cNvSpPr txBox="1"/>
+          <p:nvPr/>
+        </p:nvSpPr>
+        <p:spPr>
+          <a:xfrm>
+            <a:off x="640080" y="6172200"/>
+            <a:ext cx="10972800" cy="411479"/>
+          </a:xfrm>
+          <a:prstGeom prst="rect">
+            <a:avLst/>
+          </a:prstGeom>
+          <a:noFill/>
+        </p:spPr>
+        <p:txBody>
+          <a:bodyPr wrap="square">
+            <a:spAutoFit/>
+          </a:bodyPr>
+          <a:lstStyle/>
+          <a:p>
+            <a:pPr algn="l">
+              <a:defRPr sz="1000" b="0">
+                <a:solidFill>
+                  <a:srgbClr val="B0B0B0"/>
+                </a:solidFill>
+                <a:latin typeface="Segoe UI"/>
+              </a:defRPr>
+            </a:pPr>
+            <a:r>
+              <a:t>Aggregates messages, execution_graph_log, tool_execution_history, score_history, rl_feedback_log, TaskNodes, AgentInteractions into one time-sorted timeline. Used to diagnose the v2 'silent fallback' bug and prove v3 agents actually called servicing_db.</a:t>
+            </a:r>
+          </a:p>
+        </p:txBody>
+      </p:sp>
+    </p:spTree>
+  </p:cSld>
+  <p:clrMapOvr>
+    <a:masterClrMapping/>
+  </p:clrMapOvr>
+</p:sld>
+</file>
+
+<file path=ppt/slides/slide12.xml><?xml version="1.0" encoding="utf-8"?>
+<p:sld xmlns:a="http://schemas.openxmlformats.org/drawingml/2006/main" xmlns:p="http://schemas.openxmlformats.org/presentationml/2006/main" xmlns:r="http://schemas.openxmlformats.org/officeDocument/2006/relationships">
+  <p:cSld>
+    <p:bg>
+      <p:bgPr>
+        <a:solidFill>
+          <a:srgbClr val="1A1A2E"/>
+        </a:solidFill>
+        <a:effectLst/>
+      </p:bgPr>
+    </p:bg>
+    <p:spTree>
+      <p:nvGrpSpPr>
+        <p:cNvPr id="1" name=""/>
+        <p:cNvGrpSpPr/>
+        <p:nvPr/>
+      </p:nvGrpSpPr>
+      <p:grpSpPr/>
+      <p:sp>
+        <p:nvSpPr>
+          <p:cNvPr id="2" name="TextBox 1"/>
+          <p:cNvSpPr txBox="1"/>
+          <p:nvPr/>
+        </p:nvSpPr>
+        <p:spPr>
+          <a:xfrm>
+            <a:off x="457200" y="274320"/>
+            <a:ext cx="10972800" cy="548640"/>
+          </a:xfrm>
+          <a:prstGeom prst="rect">
+            <a:avLst/>
+          </a:prstGeom>
+          <a:noFill/>
+        </p:spPr>
+        <p:txBody>
+          <a:bodyPr wrap="square">
+            <a:spAutoFit/>
+          </a:bodyPr>
+          <a:lstStyle/>
+          <a:p>
+            <a:pPr algn="ctr">
+              <a:defRPr sz="2800" b="1">
+                <a:solidFill>
+                  <a:srgbClr val="007BFF"/>
+                </a:solidFill>
+                <a:latin typeface="Segoe UI"/>
+              </a:defRPr>
+            </a:pPr>
+            <a:r>
+              <a:t>ML Insights — Self-Improving Orchestration</a:t>
+            </a:r>
+          </a:p>
+        </p:txBody>
+      </p:sp>
+      <p:sp>
+        <p:nvSpPr>
+          <p:cNvPr id="3" name="TextBox 2"/>
+          <p:cNvSpPr txBox="1"/>
+          <p:nvPr/>
+        </p:nvSpPr>
+        <p:spPr>
+          <a:xfrm>
+            <a:off x="457200" y="822960"/>
+            <a:ext cx="10972800" cy="365760"/>
+          </a:xfrm>
+          <a:prstGeom prst="rect">
+            <a:avLst/>
+          </a:prstGeom>
+          <a:noFill/>
+        </p:spPr>
+        <p:txBody>
+          <a:bodyPr wrap="square">
+            <a:spAutoFit/>
+          </a:bodyPr>
+          <a:lstStyle/>
+          <a:p>
+            <a:pPr algn="ctr">
+              <a:defRPr sz="1300" b="0">
+                <a:solidFill>
+                  <a:srgbClr val="B0B0B0"/>
+                </a:solidFill>
+                <a:latin typeface="Segoe UI"/>
+              </a:defRPr>
+            </a:pPr>
+            <a:r>
+              <a:t>Four learning loops tapped into the pipeline, all visible in one operator page</a:t>
+            </a:r>
+          </a:p>
+        </p:txBody>
+      </p:sp>
+      <p:sp>
+        <p:nvSpPr>
+          <p:cNvPr id="4" name="Rounded Rectangle 3"/>
+          <p:cNvSpPr/>
+          <p:nvPr/>
+        </p:nvSpPr>
+        <p:spPr>
+          <a:xfrm>
+            <a:off x="457200" y="1371600"/>
+            <a:ext cx="5486400" cy="2377440"/>
+          </a:xfrm>
+          <a:prstGeom prst="roundRect">
+            <a:avLst/>
+          </a:prstGeom>
+          <a:solidFill>
+            <a:srgbClr val="353555"/>
+          </a:solidFill>
+          <a:ln>
+            <a:noFill/>
+          </a:ln>
+        </p:spPr>
+        <p:style>
+          <a:lnRef idx="1">
+            <a:schemeClr val="accent1"/>
+          </a:lnRef>
+          <a:fillRef idx="3">
+            <a:schemeClr val="accent1"/>
+          </a:fillRef>
+          <a:effectRef idx="2">
+            <a:schemeClr val="accent1"/>
+          </a:effectRef>
+          <a:fontRef idx="minor">
+            <a:schemeClr val="lt1"/>
+          </a:fontRef>
+        </p:style>
+        <p:txBody>
+          <a:bodyPr rtlCol="0" anchor="ctr"/>
+          <a:lstStyle/>
+          <a:p>
+            <a:pPr algn="ctr"/>
+          </a:p>
+        </p:txBody>
+      </p:sp>
+      <p:sp>
+        <p:nvSpPr>
+          <p:cNvPr id="5" name="Rectangle 4"/>
+          <p:cNvSpPr/>
+          <p:nvPr/>
+        </p:nvSpPr>
+        <p:spPr>
+          <a:xfrm>
+            <a:off x="457200" y="1371600"/>
+            <a:ext cx="54864" cy="2377440"/>
+          </a:xfrm>
+          <a:prstGeom prst="rect">
+            <a:avLst/>
+          </a:prstGeom>
+          <a:solidFill>
+            <a:srgbClr val="AB47BC"/>
+          </a:solidFill>
+          <a:ln>
+            <a:noFill/>
+          </a:ln>
+        </p:spPr>
+        <p:style>
+          <a:lnRef idx="1">
+            <a:schemeClr val="accent1"/>
+          </a:lnRef>
+          <a:fillRef idx="3">
+            <a:schemeClr val="accent1"/>
+          </a:fillRef>
+          <a:effectRef idx="2">
+            <a:schemeClr val="accent1"/>
+          </a:effectRef>
+          <a:fontRef idx="minor">
+            <a:schemeClr val="lt1"/>
+          </a:fontRef>
+        </p:style>
+        <p:txBody>
+          <a:bodyPr rtlCol="0" anchor="ctr"/>
+          <a:lstStyle/>
+          <a:p>
+            <a:pPr algn="ctr"/>
+          </a:p>
+        </p:txBody>
+      </p:sp>
+      <p:sp>
+        <p:nvSpPr>
+          <p:cNvPr id="6" name="TextBox 5"/>
+          <p:cNvSpPr txBox="1"/>
+          <p:nvPr/>
+        </p:nvSpPr>
+        <p:spPr>
+          <a:xfrm>
+            <a:off x="640080" y="1463040"/>
+            <a:ext cx="5212080" cy="320040"/>
+          </a:xfrm>
+          <a:prstGeom prst="rect">
+            <a:avLst/>
+          </a:prstGeom>
+          <a:noFill/>
+        </p:spPr>
+        <p:txBody>
+          <a:bodyPr wrap="square">
+            <a:spAutoFit/>
+          </a:bodyPr>
+          <a:lstStyle/>
+          <a:p>
+            <a:pPr algn="l">
+              <a:defRPr sz="1300" b="1">
+                <a:solidFill>
+                  <a:srgbClr val="AB47BC"/>
+                </a:solidFill>
+                <a:latin typeface="Segoe UI"/>
+              </a:defRPr>
+            </a:pPr>
+            <a:r>
+              <a:t>1A — Contextual Bandits (SHADOW)</a:t>
+            </a:r>
+          </a:p>
+        </p:txBody>
+      </p:sp>
+      <p:sp>
+        <p:nvSpPr>
+          <p:cNvPr id="7" name="TextBox 6"/>
+          <p:cNvSpPr txBox="1"/>
+          <p:nvPr/>
+        </p:nvSpPr>
+        <p:spPr>
+          <a:xfrm>
+            <a:off x="640080" y="1783080"/>
+            <a:ext cx="5212080" cy="1874519"/>
+          </a:xfrm>
+          <a:prstGeom prst="rect">
+            <a:avLst/>
+          </a:prstGeom>
+          <a:noFill/>
+        </p:spPr>
+        <p:txBody>
+          <a:bodyPr wrap="square">
+            <a:spAutoFit/>
+          </a:bodyPr>
+          <a:lstStyle/>
+          <a:p>
+            <a:pPr algn="l">
+              <a:defRPr sz="1000" b="0">
+                <a:solidFill>
+                  <a:srgbClr val="B0B0B0"/>
+                </a:solidFill>
+                <a:latin typeface="Segoe UI"/>
+              </a:defRPr>
+            </a:pPr>
+            <a:r>
+              <a:t>Thompson Sampling over Beta(α, β) per (agent, context).</a:t>
+            </a:r>
+            <a:br/>
+            <a:r>
+              <a:t>Hooked into Step 3 negotiation. Logs what the bandit would pick alongside the bid winner. Flipping to LIVE is one line once arms reach 20 pulls.</a:t>
+            </a:r>
+            <a:br/>
+            <a:r>
+              <a:t>60% baseline prior per operator request.</a:t>
+            </a:r>
+          </a:p>
+        </p:txBody>
+      </p:sp>
+      <p:sp>
+        <p:nvSpPr>
+          <p:cNvPr id="8" name="Rounded Rectangle 7"/>
+          <p:cNvSpPr/>
+          <p:nvPr/>
+        </p:nvSpPr>
+        <p:spPr>
+          <a:xfrm>
+            <a:off x="6217920" y="1371600"/>
+            <a:ext cx="5486400" cy="2377440"/>
+          </a:xfrm>
+          <a:prstGeom prst="roundRect">
+            <a:avLst/>
+          </a:prstGeom>
+          <a:solidFill>
+            <a:srgbClr val="353555"/>
+          </a:solidFill>
+          <a:ln>
+            <a:noFill/>
+          </a:ln>
+        </p:spPr>
+        <p:style>
+          <a:lnRef idx="1">
+            <a:schemeClr val="accent1"/>
+          </a:lnRef>
+          <a:fillRef idx="3">
+            <a:schemeClr val="accent1"/>
+          </a:fillRef>
+          <a:effectRef idx="2">
+            <a:schemeClr val="accent1"/>
+          </a:effectRef>
+          <a:fontRef idx="minor">
+            <a:schemeClr val="lt1"/>
+          </a:fontRef>
+        </p:style>
+        <p:txBody>
+          <a:bodyPr rtlCol="0" anchor="ctr"/>
+          <a:lstStyle/>
+          <a:p>
+            <a:pPr algn="ctr"/>
+          </a:p>
+        </p:txBody>
+      </p:sp>
+      <p:sp>
+        <p:nvSpPr>
+          <p:cNvPr id="9" name="Rectangle 8"/>
+          <p:cNvSpPr/>
+          <p:nvPr/>
+        </p:nvSpPr>
+        <p:spPr>
+          <a:xfrm>
+            <a:off x="6217920" y="1371600"/>
+            <a:ext cx="54864" cy="2377440"/>
+          </a:xfrm>
+          <a:prstGeom prst="rect">
+            <a:avLst/>
+          </a:prstGeom>
+          <a:solidFill>
+            <a:srgbClr val="4DA6FF"/>
+          </a:solidFill>
+          <a:ln>
+            <a:noFill/>
+          </a:ln>
+        </p:spPr>
+        <p:style>
+          <a:lnRef idx="1">
+            <a:schemeClr val="accent1"/>
+          </a:lnRef>
+          <a:fillRef idx="3">
+            <a:schemeClr val="accent1"/>
+          </a:fillRef>
+          <a:effectRef idx="2">
+            <a:schemeClr val="accent1"/>
+          </a:effectRef>
+          <a:fontRef idx="minor">
+            <a:schemeClr val="lt1"/>
+          </a:fontRef>
+        </p:style>
+        <p:txBody>
+          <a:bodyPr rtlCol="0" anchor="ctr"/>
+          <a:lstStyle/>
+          <a:p>
+            <a:pPr algn="ctr"/>
+          </a:p>
+        </p:txBody>
+      </p:sp>
+      <p:sp>
+        <p:nvSpPr>
+          <p:cNvPr id="10" name="TextBox 9"/>
+          <p:cNvSpPr txBox="1"/>
+          <p:nvPr/>
+        </p:nvSpPr>
+        <p:spPr>
+          <a:xfrm>
+            <a:off x="6400800" y="1463040"/>
+            <a:ext cx="5212080" cy="320040"/>
+          </a:xfrm>
+          <a:prstGeom prst="rect">
+            <a:avLst/>
+          </a:prstGeom>
+          <a:noFill/>
+        </p:spPr>
+        <p:txBody>
+          <a:bodyPr wrap="square">
+            <a:spAutoFit/>
+          </a:bodyPr>
+          <a:lstStyle/>
+          <a:p>
+            <a:pPr algn="l">
+              <a:defRPr sz="1300" b="1">
+                <a:solidFill>
                   <a:srgbClr val="4DA6FF"/>
                 </a:solidFill>
                 <a:latin typeface="Segoe UI"/>
               </a:defRPr>
             </a:pPr>
             <a:r>
-              <a:t>github.com/kreonakrish  |  localhost:3000</a:t>
+              <a:t>2C — Node2Vec TaskNode Embeddings</a:t>
+            </a:r>
+          </a:p>
+        </p:txBody>
+      </p:sp>
+      <p:sp>
+        <p:nvSpPr>
+          <p:cNvPr id="11" name="TextBox 10"/>
+          <p:cNvSpPr txBox="1"/>
+          <p:nvPr/>
+        </p:nvSpPr>
+        <p:spPr>
+          <a:xfrm>
+            <a:off x="6400800" y="1783080"/>
+            <a:ext cx="5212080" cy="1874519"/>
+          </a:xfrm>
+          <a:prstGeom prst="rect">
+            <a:avLst/>
+          </a:prstGeom>
+          <a:noFill/>
+        </p:spPr>
+        <p:txBody>
+          <a:bodyPr wrap="square">
+            <a:spAutoFit/>
+          </a:bodyPr>
+          <a:lstStyle/>
+          <a:p>
+            <a:pPr algn="l">
+              <a:defRPr sz="1000" b="0">
+                <a:solidFill>
+                  <a:srgbClr val="B0B0B0"/>
+                </a:solidFill>
+                <a:latin typeface="Segoe UI"/>
+              </a:defRPr>
+            </a:pPr>
+            <a:r>
+              <a:t>Real Node2Vec (networkx + gensim) over Neo4j TaskGraph.</a:t>
+            </a:r>
+            <a:br/>
+            <a:r>
+              <a:t>595 nodes embedded across 116 graphs.</a:t>
+            </a:r>
+            <a:br/>
+            <a:r>
+              <a:t>Feeds the learned scorer; reusable feature surface for future GNN work.</a:t>
+            </a:r>
+            <a:br/>
+            <a:r>
+              <a:t>Pure-Python spectral-embedding fallback for zero-dep inference.</a:t>
+            </a:r>
+          </a:p>
+        </p:txBody>
+      </p:sp>
+      <p:sp>
+        <p:nvSpPr>
+          <p:cNvPr id="12" name="Rounded Rectangle 11"/>
+          <p:cNvSpPr/>
+          <p:nvPr/>
+        </p:nvSpPr>
+        <p:spPr>
+          <a:xfrm>
+            <a:off x="457200" y="3931920"/>
+            <a:ext cx="5486400" cy="2377440"/>
+          </a:xfrm>
+          <a:prstGeom prst="roundRect">
+            <a:avLst/>
+          </a:prstGeom>
+          <a:solidFill>
+            <a:srgbClr val="353555"/>
+          </a:solidFill>
+          <a:ln>
+            <a:noFill/>
+          </a:ln>
+        </p:spPr>
+        <p:style>
+          <a:lnRef idx="1">
+            <a:schemeClr val="accent1"/>
+          </a:lnRef>
+          <a:fillRef idx="3">
+            <a:schemeClr val="accent1"/>
+          </a:fillRef>
+          <a:effectRef idx="2">
+            <a:schemeClr val="accent1"/>
+          </a:effectRef>
+          <a:fontRef idx="minor">
+            <a:schemeClr val="lt1"/>
+          </a:fontRef>
+        </p:style>
+        <p:txBody>
+          <a:bodyPr rtlCol="0" anchor="ctr"/>
+          <a:lstStyle/>
+          <a:p>
+            <a:pPr algn="ctr"/>
+          </a:p>
+        </p:txBody>
+      </p:sp>
+      <p:sp>
+        <p:nvSpPr>
+          <p:cNvPr id="13" name="Rectangle 12"/>
+          <p:cNvSpPr/>
+          <p:nvPr/>
+        </p:nvSpPr>
+        <p:spPr>
+          <a:xfrm>
+            <a:off x="457200" y="3931920"/>
+            <a:ext cx="54864" cy="2377440"/>
+          </a:xfrm>
+          <a:prstGeom prst="rect">
+            <a:avLst/>
+          </a:prstGeom>
+          <a:solidFill>
+            <a:srgbClr val="FF9F00"/>
+          </a:solidFill>
+          <a:ln>
+            <a:noFill/>
+          </a:ln>
+        </p:spPr>
+        <p:style>
+          <a:lnRef idx="1">
+            <a:schemeClr val="accent1"/>
+          </a:lnRef>
+          <a:fillRef idx="3">
+            <a:schemeClr val="accent1"/>
+          </a:fillRef>
+          <a:effectRef idx="2">
+            <a:schemeClr val="accent1"/>
+          </a:effectRef>
+          <a:fontRef idx="minor">
+            <a:schemeClr val="lt1"/>
+          </a:fontRef>
+        </p:style>
+        <p:txBody>
+          <a:bodyPr rtlCol="0" anchor="ctr"/>
+          <a:lstStyle/>
+          <a:p>
+            <a:pPr algn="ctr"/>
+          </a:p>
+        </p:txBody>
+      </p:sp>
+      <p:sp>
+        <p:nvSpPr>
+          <p:cNvPr id="14" name="TextBox 13"/>
+          <p:cNvSpPr txBox="1"/>
+          <p:nvPr/>
+        </p:nvSpPr>
+        <p:spPr>
+          <a:xfrm>
+            <a:off x="640080" y="4023359"/>
+            <a:ext cx="5212080" cy="320040"/>
+          </a:xfrm>
+          <a:prstGeom prst="rect">
+            <a:avLst/>
+          </a:prstGeom>
+          <a:noFill/>
+        </p:spPr>
+        <p:txBody>
+          <a:bodyPr wrap="square">
+            <a:spAutoFit/>
+          </a:bodyPr>
+          <a:lstStyle/>
+          <a:p>
+            <a:pPr algn="l">
+              <a:defRPr sz="1300" b="1">
+                <a:solidFill>
+                  <a:srgbClr val="FF9F00"/>
+                </a:solidFill>
+                <a:latin typeface="Segoe UI"/>
+              </a:defRPr>
+            </a:pPr>
+            <a:r>
+              <a:t>1B — Learned Quality Scorer (SHADOW)</a:t>
+            </a:r>
+          </a:p>
+        </p:txBody>
+      </p:sp>
+      <p:sp>
+        <p:nvSpPr>
+          <p:cNvPr id="15" name="TextBox 14"/>
+          <p:cNvSpPr txBox="1"/>
+          <p:nvPr/>
+        </p:nvSpPr>
+        <p:spPr>
+          <a:xfrm>
+            <a:off x="640080" y="4343400"/>
+            <a:ext cx="5212080" cy="1874519"/>
+          </a:xfrm>
+          <a:prstGeom prst="rect">
+            <a:avLst/>
+          </a:prstGeom>
+          <a:noFill/>
+        </p:spPr>
+        <p:txBody>
+          <a:bodyPr wrap="square">
+            <a:spAutoFit/>
+          </a:bodyPr>
+          <a:lstStyle/>
+          <a:p>
+            <a:pPr algn="l">
+              <a:defRPr sz="1000" b="0">
+                <a:solidFill>
+                  <a:srgbClr val="B0B0B0"/>
+                </a:solidFill>
+                <a:latin typeface="Segoe UI"/>
+              </a:defRPr>
+            </a:pPr>
+            <a:r>
+              <a:t>Logistic regression trained offline on thumbs-up/down + 60% bootstrap.</a:t>
+            </a:r>
+            <a:br/>
+            <a:r>
+              <a:t>val_accuracy 0.786, val_auc 0.875 on the first 70 samples.</a:t>
+            </a:r>
+            <a:br/>
+            <a:r>
+              <a:t>Pure-Python sigmoid inference in orchestrator container (no numpy/sklearn).</a:t>
+            </a:r>
+            <a:br/>
+            <a:r>
+              <a:t>22 shadow predictions logged per conversation.</a:t>
+            </a:r>
+          </a:p>
+        </p:txBody>
+      </p:sp>
+      <p:sp>
+        <p:nvSpPr>
+          <p:cNvPr id="16" name="Rounded Rectangle 15"/>
+          <p:cNvSpPr/>
+          <p:nvPr/>
+        </p:nvSpPr>
+        <p:spPr>
+          <a:xfrm>
+            <a:off x="6217920" y="3931920"/>
+            <a:ext cx="5486400" cy="2377440"/>
+          </a:xfrm>
+          <a:prstGeom prst="roundRect">
+            <a:avLst/>
+          </a:prstGeom>
+          <a:solidFill>
+            <a:srgbClr val="353555"/>
+          </a:solidFill>
+          <a:ln>
+            <a:noFill/>
+          </a:ln>
+        </p:spPr>
+        <p:style>
+          <a:lnRef idx="1">
+            <a:schemeClr val="accent1"/>
+          </a:lnRef>
+          <a:fillRef idx="3">
+            <a:schemeClr val="accent1"/>
+          </a:fillRef>
+          <a:effectRef idx="2">
+            <a:schemeClr val="accent1"/>
+          </a:effectRef>
+          <a:fontRef idx="minor">
+            <a:schemeClr val="lt1"/>
+          </a:fontRef>
+        </p:style>
+        <p:txBody>
+          <a:bodyPr rtlCol="0" anchor="ctr"/>
+          <a:lstStyle/>
+          <a:p>
+            <a:pPr algn="ctr"/>
+          </a:p>
+        </p:txBody>
+      </p:sp>
+      <p:sp>
+        <p:nvSpPr>
+          <p:cNvPr id="17" name="Rectangle 16"/>
+          <p:cNvSpPr/>
+          <p:nvPr/>
+        </p:nvSpPr>
+        <p:spPr>
+          <a:xfrm>
+            <a:off x="6217920" y="3931920"/>
+            <a:ext cx="54864" cy="2377440"/>
+          </a:xfrm>
+          <a:prstGeom prst="rect">
+            <a:avLst/>
+          </a:prstGeom>
+          <a:solidFill>
+            <a:srgbClr val="00C853"/>
+          </a:solidFill>
+          <a:ln>
+            <a:noFill/>
+          </a:ln>
+        </p:spPr>
+        <p:style>
+          <a:lnRef idx="1">
+            <a:schemeClr val="accent1"/>
+          </a:lnRef>
+          <a:fillRef idx="3">
+            <a:schemeClr val="accent1"/>
+          </a:fillRef>
+          <a:effectRef idx="2">
+            <a:schemeClr val="accent1"/>
+          </a:effectRef>
+          <a:fontRef idx="minor">
+            <a:schemeClr val="lt1"/>
+          </a:fontRef>
+        </p:style>
+        <p:txBody>
+          <a:bodyPr rtlCol="0" anchor="ctr"/>
+          <a:lstStyle/>
+          <a:p>
+            <a:pPr algn="ctr"/>
+          </a:p>
+        </p:txBody>
+      </p:sp>
+      <p:sp>
+        <p:nvSpPr>
+          <p:cNvPr id="18" name="TextBox 17"/>
+          <p:cNvSpPr txBox="1"/>
+          <p:nvPr/>
+        </p:nvSpPr>
+        <p:spPr>
+          <a:xfrm>
+            <a:off x="6400800" y="4023359"/>
+            <a:ext cx="5212080" cy="320040"/>
+          </a:xfrm>
+          <a:prstGeom prst="rect">
+            <a:avLst/>
+          </a:prstGeom>
+          <a:noFill/>
+        </p:spPr>
+        <p:txBody>
+          <a:bodyPr wrap="square">
+            <a:spAutoFit/>
+          </a:bodyPr>
+          <a:lstStyle/>
+          <a:p>
+            <a:pPr algn="l">
+              <a:defRPr sz="1300" b="1">
+                <a:solidFill>
+                  <a:srgbClr val="00C853"/>
+                </a:solidFill>
+                <a:latin typeface="Segoe UI"/>
+              </a:defRPr>
+            </a:pPr>
+            <a:r>
+              <a:t>2D — SOP Auto-Discovery</a:t>
+            </a:r>
+          </a:p>
+        </p:txBody>
+      </p:sp>
+      <p:sp>
+        <p:nvSpPr>
+          <p:cNvPr id="19" name="TextBox 18"/>
+          <p:cNvSpPr txBox="1"/>
+          <p:nvPr/>
+        </p:nvSpPr>
+        <p:spPr>
+          <a:xfrm>
+            <a:off x="6400800" y="4343400"/>
+            <a:ext cx="5212080" cy="1874519"/>
+          </a:xfrm>
+          <a:prstGeom prst="rect">
+            <a:avLst/>
+          </a:prstGeom>
+          <a:noFill/>
+        </p:spPr>
+        <p:txBody>
+          <a:bodyPr wrap="square">
+            <a:spAutoFit/>
+          </a:bodyPr>
+          <a:lstStyle/>
+          <a:p>
+            <a:pPr algn="l">
+              <a:defRPr sz="1000" b="0">
+                <a:solidFill>
+                  <a:srgbClr val="B0B0B0"/>
+                </a:solidFill>
+                <a:latin typeface="Segoe UI"/>
+              </a:defRPr>
+            </a:pPr>
+            <a:r>
+              <a:t>TF-IDF + DBSCAN clustering of recent user messages.</a:t>
+            </a:r>
+            <a:br/>
+            <a:r>
+              <a:t>8 proposals produced from 40 real messages on first run.</a:t>
+            </a:r>
+            <a:br/>
+            <a:r>
+              <a:t>Human-in-loop review: Promote writes SOPNode into Neo4j, Reject/Correct feed reinforcement signal.</a:t>
+            </a:r>
+          </a:p>
+        </p:txBody>
+      </p:sp>
+    </p:spTree>
+  </p:cSld>
+  <p:clrMapOvr>
+    <a:masterClrMapping/>
+  </p:clrMapOvr>
+</p:sld>
+</file>
+
+<file path=ppt/slides/slide13.xml><?xml version="1.0" encoding="utf-8"?>
+<p:sld xmlns:a="http://schemas.openxmlformats.org/drawingml/2006/main" xmlns:p="http://schemas.openxmlformats.org/presentationml/2006/main" xmlns:r="http://schemas.openxmlformats.org/officeDocument/2006/relationships">
+  <p:cSld>
+    <p:bg>
+      <p:bgPr>
+        <a:solidFill>
+          <a:srgbClr val="1A1A2E"/>
+        </a:solidFill>
+        <a:effectLst/>
+      </p:bgPr>
+    </p:bg>
+    <p:spTree>
+      <p:nvGrpSpPr>
+        <p:cNvPr id="1" name=""/>
+        <p:cNvGrpSpPr/>
+        <p:nvPr/>
+      </p:nvGrpSpPr>
+      <p:grpSpPr/>
+      <p:sp>
+        <p:nvSpPr>
+          <p:cNvPr id="2" name="TextBox 1"/>
+          <p:cNvSpPr txBox="1"/>
+          <p:nvPr/>
+        </p:nvSpPr>
+        <p:spPr>
+          <a:xfrm>
+            <a:off x="457200" y="274320"/>
+            <a:ext cx="10972800" cy="548640"/>
+          </a:xfrm>
+          <a:prstGeom prst="rect">
+            <a:avLst/>
+          </a:prstGeom>
+          <a:noFill/>
+        </p:spPr>
+        <p:txBody>
+          <a:bodyPr wrap="square">
+            <a:spAutoFit/>
+          </a:bodyPr>
+          <a:lstStyle/>
+          <a:p>
+            <a:pPr algn="ctr">
+              <a:defRPr sz="2800" b="1">
+                <a:solidFill>
+                  <a:srgbClr val="007BFF"/>
+                </a:solidFill>
+                <a:latin typeface="Segoe UI"/>
+              </a:defRPr>
+            </a:pPr>
+            <a:r>
+              <a:t>Data Catalog — Semantic Knowledge Graph</a:t>
+            </a:r>
+          </a:p>
+        </p:txBody>
+      </p:sp>
+      <p:sp>
+        <p:nvSpPr>
+          <p:cNvPr id="3" name="TextBox 2"/>
+          <p:cNvSpPr txBox="1"/>
+          <p:nvPr/>
+        </p:nvSpPr>
+        <p:spPr>
+          <a:xfrm>
+            <a:off x="457200" y="822960"/>
+            <a:ext cx="10972800" cy="365760"/>
+          </a:xfrm>
+          <a:prstGeom prst="rect">
+            <a:avLst/>
+          </a:prstGeom>
+          <a:noFill/>
+        </p:spPr>
+        <p:txBody>
+          <a:bodyPr wrap="square">
+            <a:spAutoFit/>
+          </a:bodyPr>
+          <a:lstStyle/>
+          <a:p>
+            <a:pPr algn="ctr">
+              <a:defRPr sz="1300" b="0">
+                <a:solidFill>
+                  <a:srgbClr val="B0B0B0"/>
+                </a:solidFill>
+                <a:latin typeface="Segoe UI"/>
+              </a:defRPr>
+            </a:pPr>
+            <a:r>
+              <a:t>Crawl physical metadata → LLM maps to business ontology → auditor RL feedback loop</a:t>
+            </a:r>
+          </a:p>
+        </p:txBody>
+      </p:sp>
+      <p:sp>
+        <p:nvSpPr>
+          <p:cNvPr id="4" name="Rounded Rectangle 3"/>
+          <p:cNvSpPr/>
+          <p:nvPr/>
+        </p:nvSpPr>
+        <p:spPr>
+          <a:xfrm>
+            <a:off x="365760" y="1554480"/>
+            <a:ext cx="2194560" cy="1097280"/>
+          </a:xfrm>
+          <a:prstGeom prst="roundRect">
+            <a:avLst/>
+          </a:prstGeom>
+          <a:solidFill>
+            <a:srgbClr val="4DA6FF"/>
+          </a:solidFill>
+          <a:ln>
+            <a:noFill/>
+          </a:ln>
+        </p:spPr>
+        <p:style>
+          <a:lnRef idx="1">
+            <a:schemeClr val="accent1"/>
+          </a:lnRef>
+          <a:fillRef idx="3">
+            <a:schemeClr val="accent1"/>
+          </a:fillRef>
+          <a:effectRef idx="2">
+            <a:schemeClr val="accent1"/>
+          </a:effectRef>
+          <a:fontRef idx="minor">
+            <a:schemeClr val="lt1"/>
+          </a:fontRef>
+        </p:style>
+        <p:txBody>
+          <a:bodyPr rtlCol="0" anchor="ctr" wrap="square"/>
+          <a:lstStyle/>
+          <a:p>
+            <a:pPr algn="ctr">
+              <a:defRPr sz="1100" b="1">
+                <a:solidFill>
+                  <a:srgbClr val="FFFFFF"/>
+                </a:solidFill>
+                <a:latin typeface="Segoe UI"/>
+              </a:defRPr>
+            </a:pPr>
+            <a:r>
+              <a:t>CRAWL</a:t>
+            </a:r>
+            <a:br/>
+            <a:br/>
+            <a:r>
+              <a:t>INFORMATION_SCHEMA</a:t>
+            </a:r>
+          </a:p>
+        </p:txBody>
+      </p:sp>
+      <p:cxnSp>
+        <p:nvCxnSpPr>
+          <p:cNvPr id="5" name="Connector 4"/>
+          <p:cNvCxnSpPr/>
+          <p:nvPr/>
+        </p:nvCxnSpPr>
+        <p:spPr>
+          <a:xfrm>
+            <a:off x="2560320" y="2103120"/>
+            <a:ext cx="91440" cy="0"/>
+          </a:xfrm>
+          <a:prstGeom prst="line">
+            <a:avLst/>
+          </a:prstGeom>
+          <a:ln w="19050">
+            <a:solidFill>
+              <a:srgbClr val="FFFFFF"/>
+            </a:solidFill>
+          </a:ln>
+        </p:spPr>
+        <p:style>
+          <a:lnRef idx="2">
+            <a:schemeClr val="accent1"/>
+          </a:lnRef>
+          <a:fillRef idx="0">
+            <a:schemeClr val="accent1"/>
+          </a:fillRef>
+          <a:effectRef idx="1">
+            <a:schemeClr val="accent1"/>
+          </a:effectRef>
+          <a:fontRef idx="minor">
+            <a:schemeClr val="tx1"/>
+          </a:fontRef>
+        </p:style>
+      </p:cxnSp>
+      <p:sp>
+        <p:nvSpPr>
+          <p:cNvPr id="6" name="Rounded Rectangle 5"/>
+          <p:cNvSpPr/>
+          <p:nvPr/>
+        </p:nvSpPr>
+        <p:spPr>
+          <a:xfrm>
+            <a:off x="2651760" y="1554480"/>
+            <a:ext cx="2194560" cy="1097280"/>
+          </a:xfrm>
+          <a:prstGeom prst="roundRect">
+            <a:avLst/>
+          </a:prstGeom>
+          <a:solidFill>
+            <a:srgbClr val="FF9F00"/>
+          </a:solidFill>
+          <a:ln>
+            <a:noFill/>
+          </a:ln>
+        </p:spPr>
+        <p:style>
+          <a:lnRef idx="1">
+            <a:schemeClr val="accent1"/>
+          </a:lnRef>
+          <a:fillRef idx="3">
+            <a:schemeClr val="accent1"/>
+          </a:fillRef>
+          <a:effectRef idx="2">
+            <a:schemeClr val="accent1"/>
+          </a:effectRef>
+          <a:fontRef idx="minor">
+            <a:schemeClr val="lt1"/>
+          </a:fontRef>
+        </p:style>
+        <p:txBody>
+          <a:bodyPr rtlCol="0" anchor="ctr" wrap="square"/>
+          <a:lstStyle/>
+          <a:p>
+            <a:pPr algn="ctr">
+              <a:defRPr sz="1100" b="1">
+                <a:solidFill>
+                  <a:srgbClr val="FFFFFF"/>
+                </a:solidFill>
+                <a:latin typeface="Segoe UI"/>
+              </a:defRPr>
+            </a:pPr>
+            <a:r>
+              <a:t>MAP</a:t>
+            </a:r>
+            <a:br/>
+            <a:br/>
+            <a:r>
+              <a:t>LLM proposes</a:t>
+            </a:r>
+            <a:br/>
+            <a:r>
+              <a:t>Domain/Entity/Attribute</a:t>
+            </a:r>
+          </a:p>
+        </p:txBody>
+      </p:sp>
+      <p:cxnSp>
+        <p:nvCxnSpPr>
+          <p:cNvPr id="7" name="Connector 6"/>
+          <p:cNvCxnSpPr/>
+          <p:nvPr/>
+        </p:nvCxnSpPr>
+        <p:spPr>
+          <a:xfrm>
+            <a:off x="4846320" y="2103120"/>
+            <a:ext cx="91439" cy="0"/>
+          </a:xfrm>
+          <a:prstGeom prst="line">
+            <a:avLst/>
+          </a:prstGeom>
+          <a:ln w="19050">
+            <a:solidFill>
+              <a:srgbClr val="FFFFFF"/>
+            </a:solidFill>
+          </a:ln>
+        </p:spPr>
+        <p:style>
+          <a:lnRef idx="2">
+            <a:schemeClr val="accent1"/>
+          </a:lnRef>
+          <a:fillRef idx="0">
+            <a:schemeClr val="accent1"/>
+          </a:fillRef>
+          <a:effectRef idx="1">
+            <a:schemeClr val="accent1"/>
+          </a:effectRef>
+          <a:fontRef idx="minor">
+            <a:schemeClr val="tx1"/>
+          </a:fontRef>
+        </p:style>
+      </p:cxnSp>
+      <p:sp>
+        <p:nvSpPr>
+          <p:cNvPr id="8" name="Rounded Rectangle 7"/>
+          <p:cNvSpPr/>
+          <p:nvPr/>
+        </p:nvSpPr>
+        <p:spPr>
+          <a:xfrm>
+            <a:off x="4937760" y="1554480"/>
+            <a:ext cx="2194560" cy="1097280"/>
+          </a:xfrm>
+          <a:prstGeom prst="roundRect">
+            <a:avLst/>
+          </a:prstGeom>
+          <a:solidFill>
+            <a:srgbClr val="AB47BC"/>
+          </a:solidFill>
+          <a:ln>
+            <a:noFill/>
+          </a:ln>
+        </p:spPr>
+        <p:style>
+          <a:lnRef idx="1">
+            <a:schemeClr val="accent1"/>
+          </a:lnRef>
+          <a:fillRef idx="3">
+            <a:schemeClr val="accent1"/>
+          </a:fillRef>
+          <a:effectRef idx="2">
+            <a:schemeClr val="accent1"/>
+          </a:effectRef>
+          <a:fontRef idx="minor">
+            <a:schemeClr val="lt1"/>
+          </a:fontRef>
+        </p:style>
+        <p:txBody>
+          <a:bodyPr rtlCol="0" anchor="ctr" wrap="square"/>
+          <a:lstStyle/>
+          <a:p>
+            <a:pPr algn="ctr">
+              <a:defRPr sz="1100" b="1">
+                <a:solidFill>
+                  <a:srgbClr val="FFFFFF"/>
+                </a:solidFill>
+                <a:latin typeface="Segoe UI"/>
+              </a:defRPr>
+            </a:pPr>
+            <a:r>
+              <a:t>WRITE</a:t>
+            </a:r>
+            <a:br/>
+            <a:br/>
+            <a:r>
+              <a:t>Neo4j ontology</a:t>
+            </a:r>
+            <a:br/>
+            <a:r>
+              <a:t>+ MySQL audit</a:t>
+            </a:r>
+          </a:p>
+        </p:txBody>
+      </p:sp>
+      <p:cxnSp>
+        <p:nvCxnSpPr>
+          <p:cNvPr id="9" name="Connector 8"/>
+          <p:cNvCxnSpPr/>
+          <p:nvPr/>
+        </p:nvCxnSpPr>
+        <p:spPr>
+          <a:xfrm>
+            <a:off x="7132320" y="2103120"/>
+            <a:ext cx="91440" cy="0"/>
+          </a:xfrm>
+          <a:prstGeom prst="line">
+            <a:avLst/>
+          </a:prstGeom>
+          <a:ln w="19050">
+            <a:solidFill>
+              <a:srgbClr val="FFFFFF"/>
+            </a:solidFill>
+          </a:ln>
+        </p:spPr>
+        <p:style>
+          <a:lnRef idx="2">
+            <a:schemeClr val="accent1"/>
+          </a:lnRef>
+          <a:fillRef idx="0">
+            <a:schemeClr val="accent1"/>
+          </a:fillRef>
+          <a:effectRef idx="1">
+            <a:schemeClr val="accent1"/>
+          </a:effectRef>
+          <a:fontRef idx="minor">
+            <a:schemeClr val="tx1"/>
+          </a:fontRef>
+        </p:style>
+      </p:cxnSp>
+      <p:sp>
+        <p:nvSpPr>
+          <p:cNvPr id="10" name="Rounded Rectangle 9"/>
+          <p:cNvSpPr/>
+          <p:nvPr/>
+        </p:nvSpPr>
+        <p:spPr>
+          <a:xfrm>
+            <a:off x="7223760" y="1554480"/>
+            <a:ext cx="2194560" cy="1097280"/>
+          </a:xfrm>
+          <a:prstGeom prst="roundRect">
+            <a:avLst/>
+          </a:prstGeom>
+          <a:solidFill>
+            <a:srgbClr val="00C853"/>
+          </a:solidFill>
+          <a:ln>
+            <a:noFill/>
+          </a:ln>
+        </p:spPr>
+        <p:style>
+          <a:lnRef idx="1">
+            <a:schemeClr val="accent1"/>
+          </a:lnRef>
+          <a:fillRef idx="3">
+            <a:schemeClr val="accent1"/>
+          </a:fillRef>
+          <a:effectRef idx="2">
+            <a:schemeClr val="accent1"/>
+          </a:effectRef>
+          <a:fontRef idx="minor">
+            <a:schemeClr val="lt1"/>
+          </a:fontRef>
+        </p:style>
+        <p:txBody>
+          <a:bodyPr rtlCol="0" anchor="ctr" wrap="square"/>
+          <a:lstStyle/>
+          <a:p>
+            <a:pPr algn="ctr">
+              <a:defRPr sz="1100" b="1">
+                <a:solidFill>
+                  <a:srgbClr val="FFFFFF"/>
+                </a:solidFill>
+                <a:latin typeface="Segoe UI"/>
+              </a:defRPr>
+            </a:pPr>
+            <a:r>
+              <a:t>REVIEW</a:t>
+            </a:r>
+            <a:br/>
+            <a:br/>
+            <a:r>
+              <a:t>Auditor:</a:t>
+            </a:r>
+            <a:br/>
+            <a:r>
+              <a:t>confirm/correct/reject</a:t>
+            </a:r>
+          </a:p>
+        </p:txBody>
+      </p:sp>
+      <p:cxnSp>
+        <p:nvCxnSpPr>
+          <p:cNvPr id="11" name="Connector 10"/>
+          <p:cNvCxnSpPr/>
+          <p:nvPr/>
+        </p:nvCxnSpPr>
+        <p:spPr>
+          <a:xfrm>
+            <a:off x="9418320" y="2103120"/>
+            <a:ext cx="91440" cy="0"/>
+          </a:xfrm>
+          <a:prstGeom prst="line">
+            <a:avLst/>
+          </a:prstGeom>
+          <a:ln w="19050">
+            <a:solidFill>
+              <a:srgbClr val="FFFFFF"/>
+            </a:solidFill>
+          </a:ln>
+        </p:spPr>
+        <p:style>
+          <a:lnRef idx="2">
+            <a:schemeClr val="accent1"/>
+          </a:lnRef>
+          <a:fillRef idx="0">
+            <a:schemeClr val="accent1"/>
+          </a:fillRef>
+          <a:effectRef idx="1">
+            <a:schemeClr val="accent1"/>
+          </a:effectRef>
+          <a:fontRef idx="minor">
+            <a:schemeClr val="tx1"/>
+          </a:fontRef>
+        </p:style>
+      </p:cxnSp>
+      <p:sp>
+        <p:nvSpPr>
+          <p:cNvPr id="12" name="Rounded Rectangle 11"/>
+          <p:cNvSpPr/>
+          <p:nvPr/>
+        </p:nvSpPr>
+        <p:spPr>
+          <a:xfrm>
+            <a:off x="9509760" y="1554480"/>
+            <a:ext cx="2194560" cy="1097280"/>
+          </a:xfrm>
+          <a:prstGeom prst="roundRect">
+            <a:avLst/>
+          </a:prstGeom>
+          <a:solidFill>
+            <a:srgbClr val="F44336"/>
+          </a:solidFill>
+          <a:ln>
+            <a:noFill/>
+          </a:ln>
+        </p:spPr>
+        <p:style>
+          <a:lnRef idx="1">
+            <a:schemeClr val="accent1"/>
+          </a:lnRef>
+          <a:fillRef idx="3">
+            <a:schemeClr val="accent1"/>
+          </a:fillRef>
+          <a:effectRef idx="2">
+            <a:schemeClr val="accent1"/>
+          </a:effectRef>
+          <a:fontRef idx="minor">
+            <a:schemeClr val="lt1"/>
+          </a:fontRef>
+        </p:style>
+        <p:txBody>
+          <a:bodyPr rtlCol="0" anchor="ctr" wrap="square"/>
+          <a:lstStyle/>
+          <a:p>
+            <a:pPr algn="ctr">
+              <a:defRPr sz="1100" b="1">
+                <a:solidFill>
+                  <a:srgbClr val="FFFFFF"/>
+                </a:solidFill>
+                <a:latin typeface="Segoe UI"/>
+              </a:defRPr>
+            </a:pPr>
+            <a:r>
+              <a:t>FEEDBACK</a:t>
+            </a:r>
+            <a:br/>
+            <a:br/>
+            <a:r>
+              <a:t>RL reward</a:t>
+            </a:r>
+            <a:br/>
+            <a:r>
+              <a:t>+1 / −0.5 / −1</a:t>
+            </a:r>
+          </a:p>
+        </p:txBody>
+      </p:sp>
+      <p:sp>
+        <p:nvSpPr>
+          <p:cNvPr id="13" name="TextBox 12"/>
+          <p:cNvSpPr txBox="1"/>
+          <p:nvPr/>
+        </p:nvSpPr>
+        <p:spPr>
+          <a:xfrm>
+            <a:off x="457200" y="2926080"/>
+            <a:ext cx="10972800" cy="457200"/>
+          </a:xfrm>
+          <a:prstGeom prst="rect">
+            <a:avLst/>
+          </a:prstGeom>
+          <a:noFill/>
+        </p:spPr>
+        <p:txBody>
+          <a:bodyPr wrap="square">
+            <a:spAutoFit/>
+          </a:bodyPr>
+          <a:lstStyle/>
+          <a:p>
+            <a:pPr algn="ctr">
+              <a:defRPr sz="1400" b="1">
+                <a:solidFill>
+                  <a:srgbClr val="FFFFFF"/>
+                </a:solidFill>
+                <a:latin typeface="Segoe UI"/>
+              </a:defRPr>
+            </a:pPr>
+            <a:r>
+              <a:t>Phase 1: MySQL crawler → pmos_servicing • 9 assets • 63 columns • 63 auto-mappings in 44s</a:t>
+            </a:r>
+          </a:p>
+        </p:txBody>
+      </p:sp>
+      <p:sp>
+        <p:nvSpPr>
+          <p:cNvPr id="14" name="Rounded Rectangle 13"/>
+          <p:cNvSpPr/>
+          <p:nvPr/>
+        </p:nvSpPr>
+        <p:spPr>
+          <a:xfrm>
+            <a:off x="457200" y="3657600"/>
+            <a:ext cx="5486400" cy="2651760"/>
+          </a:xfrm>
+          <a:prstGeom prst="roundRect">
+            <a:avLst/>
+          </a:prstGeom>
+          <a:solidFill>
+            <a:srgbClr val="353555"/>
+          </a:solidFill>
+          <a:ln>
+            <a:noFill/>
+          </a:ln>
+        </p:spPr>
+        <p:style>
+          <a:lnRef idx="1">
+            <a:schemeClr val="accent1"/>
+          </a:lnRef>
+          <a:fillRef idx="3">
+            <a:schemeClr val="accent1"/>
+          </a:fillRef>
+          <a:effectRef idx="2">
+            <a:schemeClr val="accent1"/>
+          </a:effectRef>
+          <a:fontRef idx="minor">
+            <a:schemeClr val="lt1"/>
+          </a:fontRef>
+        </p:style>
+        <p:txBody>
+          <a:bodyPr rtlCol="0" anchor="ctr"/>
+          <a:lstStyle/>
+          <a:p>
+            <a:pPr algn="ctr"/>
+          </a:p>
+        </p:txBody>
+      </p:sp>
+      <p:sp>
+        <p:nvSpPr>
+          <p:cNvPr id="15" name="Rectangle 14"/>
+          <p:cNvSpPr/>
+          <p:nvPr/>
+        </p:nvSpPr>
+        <p:spPr>
+          <a:xfrm>
+            <a:off x="457200" y="3657600"/>
+            <a:ext cx="54864" cy="2651760"/>
+          </a:xfrm>
+          <a:prstGeom prst="rect">
+            <a:avLst/>
+          </a:prstGeom>
+          <a:solidFill>
+            <a:srgbClr val="007BFF"/>
+          </a:solidFill>
+          <a:ln>
+            <a:noFill/>
+          </a:ln>
+        </p:spPr>
+        <p:style>
+          <a:lnRef idx="1">
+            <a:schemeClr val="accent1"/>
+          </a:lnRef>
+          <a:fillRef idx="3">
+            <a:schemeClr val="accent1"/>
+          </a:fillRef>
+          <a:effectRef idx="2">
+            <a:schemeClr val="accent1"/>
+          </a:effectRef>
+          <a:fontRef idx="minor">
+            <a:schemeClr val="lt1"/>
+          </a:fontRef>
+        </p:style>
+        <p:txBody>
+          <a:bodyPr rtlCol="0" anchor="ctr"/>
+          <a:lstStyle/>
+          <a:p>
+            <a:pPr algn="ctr"/>
+          </a:p>
+        </p:txBody>
+      </p:sp>
+      <p:sp>
+        <p:nvSpPr>
+          <p:cNvPr id="16" name="TextBox 15"/>
+          <p:cNvSpPr txBox="1"/>
+          <p:nvPr/>
+        </p:nvSpPr>
+        <p:spPr>
+          <a:xfrm>
+            <a:off x="640080" y="3749039"/>
+            <a:ext cx="5212080" cy="320040"/>
+          </a:xfrm>
+          <a:prstGeom prst="rect">
+            <a:avLst/>
+          </a:prstGeom>
+          <a:noFill/>
+        </p:spPr>
+        <p:txBody>
+          <a:bodyPr wrap="square">
+            <a:spAutoFit/>
+          </a:bodyPr>
+          <a:lstStyle/>
+          <a:p>
+            <a:pPr algn="l">
+              <a:defRPr sz="1300" b="1">
+                <a:solidFill>
+                  <a:srgbClr val="007BFF"/>
+                </a:solidFill>
+                <a:latin typeface="Segoe UI"/>
+              </a:defRPr>
+            </a:pPr>
+            <a:r>
+              <a:t>KNOWLEDGE GRAPH ONTOLOGY</a:t>
+            </a:r>
+          </a:p>
+        </p:txBody>
+      </p:sp>
+      <p:sp>
+        <p:nvSpPr>
+          <p:cNvPr id="17" name="TextBox 16"/>
+          <p:cNvSpPr txBox="1"/>
+          <p:nvPr/>
+        </p:nvSpPr>
+        <p:spPr>
+          <a:xfrm>
+            <a:off x="640080" y="4069080"/>
+            <a:ext cx="5212080" cy="2148839"/>
+          </a:xfrm>
+          <a:prstGeom prst="rect">
+            <a:avLst/>
+          </a:prstGeom>
+          <a:noFill/>
+        </p:spPr>
+        <p:txBody>
+          <a:bodyPr wrap="square">
+            <a:spAutoFit/>
+          </a:bodyPr>
+          <a:lstStyle/>
+          <a:p>
+            <a:pPr algn="l">
+              <a:defRPr sz="1000" b="0">
+                <a:solidFill>
+                  <a:srgbClr val="B0B0B0"/>
+                </a:solidFill>
+                <a:latin typeface="Segoe UI"/>
+              </a:defRPr>
+            </a:pPr>
+            <a:r>
+              <a:t>(:DataSource)─[HAS_ASSET]→(:DataAsset)</a:t>
+            </a:r>
+            <a:br/>
+            <a:r>
+              <a:t>           ─[HAS_COLUMN]→(:DataColumn)</a:t>
+            </a:r>
+            <a:br/>
+            <a:br/>
+            <a:r>
+              <a:t>(:BusinessDomain)─[HAS_ENTITY]→(:BusinessEntity)</a:t>
+            </a:r>
+            <a:br/>
+            <a:r>
+              <a:t>              ─[HAS_ATTRIBUTE]→(:BusinessAttribute)</a:t>
+            </a:r>
+            <a:br/>
+            <a:r>
+              <a:t>                      ─[MAPS_TO]→(:DataColumn)</a:t>
+            </a:r>
+            <a:br/>
+            <a:br/>
+            <a:r>
+              <a:t>(:DataColumn)─[REFERENCES]→(:DataColumn)  (physical FK)</a:t>
+            </a:r>
+          </a:p>
+        </p:txBody>
+      </p:sp>
+      <p:sp>
+        <p:nvSpPr>
+          <p:cNvPr id="18" name="Rounded Rectangle 17"/>
+          <p:cNvSpPr/>
+          <p:nvPr/>
+        </p:nvSpPr>
+        <p:spPr>
+          <a:xfrm>
+            <a:off x="6217920" y="3657600"/>
+            <a:ext cx="5486400" cy="2651760"/>
+          </a:xfrm>
+          <a:prstGeom prst="roundRect">
+            <a:avLst/>
+          </a:prstGeom>
+          <a:solidFill>
+            <a:srgbClr val="353555"/>
+          </a:solidFill>
+          <a:ln>
+            <a:noFill/>
+          </a:ln>
+        </p:spPr>
+        <p:style>
+          <a:lnRef idx="1">
+            <a:schemeClr val="accent1"/>
+          </a:lnRef>
+          <a:fillRef idx="3">
+            <a:schemeClr val="accent1"/>
+          </a:fillRef>
+          <a:effectRef idx="2">
+            <a:schemeClr val="accent1"/>
+          </a:effectRef>
+          <a:fontRef idx="minor">
+            <a:schemeClr val="lt1"/>
+          </a:fontRef>
+        </p:style>
+        <p:txBody>
+          <a:bodyPr rtlCol="0" anchor="ctr"/>
+          <a:lstStyle/>
+          <a:p>
+            <a:pPr algn="ctr"/>
+          </a:p>
+        </p:txBody>
+      </p:sp>
+      <p:sp>
+        <p:nvSpPr>
+          <p:cNvPr id="19" name="Rectangle 18"/>
+          <p:cNvSpPr/>
+          <p:nvPr/>
+        </p:nvSpPr>
+        <p:spPr>
+          <a:xfrm>
+            <a:off x="6217920" y="3657600"/>
+            <a:ext cx="54864" cy="2651760"/>
+          </a:xfrm>
+          <a:prstGeom prst="rect">
+            <a:avLst/>
+          </a:prstGeom>
+          <a:solidFill>
+            <a:srgbClr val="00C853"/>
+          </a:solidFill>
+          <a:ln>
+            <a:noFill/>
+          </a:ln>
+        </p:spPr>
+        <p:style>
+          <a:lnRef idx="1">
+            <a:schemeClr val="accent1"/>
+          </a:lnRef>
+          <a:fillRef idx="3">
+            <a:schemeClr val="accent1"/>
+          </a:fillRef>
+          <a:effectRef idx="2">
+            <a:schemeClr val="accent1"/>
+          </a:effectRef>
+          <a:fontRef idx="minor">
+            <a:schemeClr val="lt1"/>
+          </a:fontRef>
+        </p:style>
+        <p:txBody>
+          <a:bodyPr rtlCol="0" anchor="ctr"/>
+          <a:lstStyle/>
+          <a:p>
+            <a:pPr algn="ctr"/>
+          </a:p>
+        </p:txBody>
+      </p:sp>
+      <p:sp>
+        <p:nvSpPr>
+          <p:cNvPr id="20" name="TextBox 19"/>
+          <p:cNvSpPr txBox="1"/>
+          <p:nvPr/>
+        </p:nvSpPr>
+        <p:spPr>
+          <a:xfrm>
+            <a:off x="6400800" y="3749039"/>
+            <a:ext cx="5212080" cy="320040"/>
+          </a:xfrm>
+          <a:prstGeom prst="rect">
+            <a:avLst/>
+          </a:prstGeom>
+          <a:noFill/>
+        </p:spPr>
+        <p:txBody>
+          <a:bodyPr wrap="square">
+            <a:spAutoFit/>
+          </a:bodyPr>
+          <a:lstStyle/>
+          <a:p>
+            <a:pPr algn="l">
+              <a:defRPr sz="1300" b="1">
+                <a:solidFill>
+                  <a:srgbClr val="00C853"/>
+                </a:solidFill>
+                <a:latin typeface="Segoe UI"/>
+              </a:defRPr>
+            </a:pPr>
+            <a:r>
+              <a:t>LIVE RESULTS</a:t>
+            </a:r>
+          </a:p>
+        </p:txBody>
+      </p:sp>
+      <p:sp>
+        <p:nvSpPr>
+          <p:cNvPr id="21" name="TextBox 20"/>
+          <p:cNvSpPr txBox="1"/>
+          <p:nvPr/>
+        </p:nvSpPr>
+        <p:spPr>
+          <a:xfrm>
+            <a:off x="6400800" y="4069080"/>
+            <a:ext cx="5212080" cy="2148839"/>
+          </a:xfrm>
+          <a:prstGeom prst="rect">
+            <a:avLst/>
+          </a:prstGeom>
+          <a:noFill/>
+        </p:spPr>
+        <p:txBody>
+          <a:bodyPr wrap="square">
+            <a:spAutoFit/>
+          </a:bodyPr>
+          <a:lstStyle/>
+          <a:p>
+            <a:pPr algn="l">
+              <a:defRPr sz="1000" b="0">
+                <a:solidFill>
+                  <a:srgbClr val="B0B0B0"/>
+                </a:solidFill>
+                <a:latin typeface="Segoe UI"/>
+              </a:defRPr>
+            </a:pPr>
+            <a:r>
+              <a:t>• Domain: Servicing</a:t>
+            </a:r>
+            <a:br/>
+            <a:r>
+              <a:t>• Entities: Loan, Payment, Investor, Default,</a:t>
+            </a:r>
+            <a:br/>
+            <a:r>
+              <a:t>  Bankruptcy, Foreclosure, EarlyResolution,</a:t>
+            </a:r>
+            <a:br/>
+            <a:r>
+              <a:t>  RiskAssessment, RegulatoryFiling</a:t>
+            </a:r>
+            <a:br/>
+            <a:r>
+              <a:t>• avg confidence: 0.957</a:t>
+            </a:r>
+            <a:br/>
+            <a:r>
+              <a:t>• LLM enriched: term_months → loan_term_months,</a:t>
+            </a:r>
+            <a:br/>
+            <a:r>
+              <a:t>  origination_ref → origination_reference</a:t>
+            </a:r>
+          </a:p>
+        </p:txBody>
+      </p:sp>
+    </p:spTree>
+  </p:cSld>
+  <p:clrMapOvr>
+    <a:masterClrMapping/>
+  </p:clrMapOvr>
+</p:sld>
+</file>
+
+<file path=ppt/slides/slide14.xml><?xml version="1.0" encoding="utf-8"?>
+<p:sld xmlns:a="http://schemas.openxmlformats.org/drawingml/2006/main" xmlns:p="http://schemas.openxmlformats.org/presentationml/2006/main" xmlns:r="http://schemas.openxmlformats.org/officeDocument/2006/relationships">
+  <p:cSld>
+    <p:bg>
+      <p:bgPr>
+        <a:solidFill>
+          <a:srgbClr val="1A1A2E"/>
+        </a:solidFill>
+        <a:effectLst/>
+      </p:bgPr>
+    </p:bg>
+    <p:spTree>
+      <p:nvGrpSpPr>
+        <p:cNvPr id="1" name=""/>
+        <p:cNvGrpSpPr/>
+        <p:nvPr/>
+      </p:nvGrpSpPr>
+      <p:grpSpPr/>
+      <p:sp>
+        <p:nvSpPr>
+          <p:cNvPr id="2" name="TextBox 1"/>
+          <p:cNvSpPr txBox="1"/>
+          <p:nvPr/>
+        </p:nvSpPr>
+        <p:spPr>
+          <a:xfrm>
+            <a:off x="914400" y="731520"/>
+            <a:ext cx="10058400" cy="914400"/>
+          </a:xfrm>
+          <a:prstGeom prst="rect">
+            <a:avLst/>
+          </a:prstGeom>
+          <a:noFill/>
+        </p:spPr>
+        <p:txBody>
+          <a:bodyPr wrap="square">
+            <a:spAutoFit/>
+          </a:bodyPr>
+          <a:lstStyle/>
+          <a:p>
+            <a:pPr algn="ctr">
+              <a:defRPr sz="5400" b="1">
+                <a:solidFill>
+                  <a:srgbClr val="007BFF"/>
+                </a:solidFill>
+                <a:latin typeface="Segoe UI"/>
+              </a:defRPr>
+            </a:pPr>
+            <a:r>
+              <a:t>PMOS</a:t>
+            </a:r>
+          </a:p>
+        </p:txBody>
+      </p:sp>
+      <p:sp>
+        <p:nvSpPr>
+          <p:cNvPr id="3" name="TextBox 2"/>
+          <p:cNvSpPr txBox="1"/>
+          <p:nvPr/>
+        </p:nvSpPr>
+        <p:spPr>
+          <a:xfrm>
+            <a:off x="914400" y="1828800"/>
+            <a:ext cx="10058400" cy="548640"/>
+          </a:xfrm>
+          <a:prstGeom prst="rect">
+            <a:avLst/>
+          </a:prstGeom>
+          <a:noFill/>
+        </p:spPr>
+        <p:txBody>
+          <a:bodyPr wrap="square">
+            <a:spAutoFit/>
+          </a:bodyPr>
+          <a:lstStyle/>
+          <a:p>
+            <a:pPr algn="ctr">
+              <a:defRPr sz="2200" b="0">
+                <a:solidFill>
+                  <a:srgbClr val="FFFFFF"/>
+                </a:solidFill>
+                <a:latin typeface="Segoe UI"/>
+              </a:defRPr>
+            </a:pPr>
+            <a:r>
+              <a:t>Connect any data source. Ask any question.</a:t>
+            </a:r>
+            <a:br/>
+            <a:r>
+              <a:t>Get deterministic answers in minutes, not hours.</a:t>
+            </a:r>
+          </a:p>
+        </p:txBody>
+      </p:sp>
+      <p:sp>
+        <p:nvSpPr>
+          <p:cNvPr id="4" name="TextBox 3"/>
+          <p:cNvSpPr txBox="1"/>
+          <p:nvPr/>
+        </p:nvSpPr>
+        <p:spPr>
+          <a:xfrm>
+            <a:off x="1371600" y="2926080"/>
+            <a:ext cx="9144000" cy="3200400"/>
+          </a:xfrm>
+          <a:prstGeom prst="rect">
+            <a:avLst/>
+          </a:prstGeom>
+          <a:noFill/>
+        </p:spPr>
+        <p:txBody>
+          <a:bodyPr wrap="square">
+            <a:spAutoFit/>
+          </a:bodyPr>
+          <a:lstStyle/>
+          <a:p>
+            <a:pPr algn="ctr">
+              <a:defRPr sz="1400" b="0">
+                <a:solidFill>
+                  <a:srgbClr val="B0B0B0"/>
+                </a:solidFill>
+                <a:latin typeface="Segoe UI"/>
+              </a:defRPr>
+            </a:pPr>
+            <a:r>
+              <a:t>7 microservices  |  4 data stores  |  6 agents  |  7 Redis streams</a:t>
+            </a:r>
+            <a:br/>
+            <a:br/>
+            <a:r>
+              <a:t>Home-lending business domain — 6 schemas, 27 tables  |  Cross-system queries</a:t>
+            </a:r>
+            <a:br/>
+            <a:br/>
+            <a:r>
+              <a:t>Model Governance — full inference traceability per trace_id</a:t>
+            </a:r>
+            <a:br/>
+            <a:br/>
+            <a:r>
+              <a:t>ML Insights — bandits, Node2Vec, learned scorer, SOP discovery, all shadow-mode</a:t>
+            </a:r>
+            <a:br/>
+            <a:br/>
+            <a:r>
+              <a:t>Data Catalog — metadata crawler framework + semantic knowledge graph + auditor RL</a:t>
+            </a:r>
+            <a:br/>
+            <a:br/>
+            <a:r>
+              <a:t>One question → decompose → negotiate → execute → score → learn → respond</a:t>
+            </a:r>
+          </a:p>
+        </p:txBody>
+      </p:sp>
+      <p:sp>
+        <p:nvSpPr>
+          <p:cNvPr id="5" name="TextBox 4"/>
+          <p:cNvSpPr txBox="1"/>
+          <p:nvPr/>
+        </p:nvSpPr>
+        <p:spPr>
+          <a:xfrm>
+            <a:off x="2743200" y="6126480"/>
+            <a:ext cx="6400800" cy="457200"/>
+          </a:xfrm>
+          <a:prstGeom prst="rect">
+            <a:avLst/>
+          </a:prstGeom>
+          <a:noFill/>
+        </p:spPr>
+        <p:txBody>
+          <a:bodyPr wrap="square">
+            <a:spAutoFit/>
+          </a:bodyPr>
+          <a:lstStyle/>
+          <a:p>
+            <a:pPr algn="ctr">
+              <a:defRPr sz="1300" b="0">
+                <a:solidFill>
+                  <a:srgbClr val="4DA6FF"/>
+                </a:solidFill>
+                <a:latin typeface="Segoe UI"/>
+              </a:defRPr>
+            </a:pPr>
+            <a:r>
+              <a:t>github.com/kreonakrish/pmos  |  localhost:3000</a:t>
             </a:r>
           </a:p>
         </p:txBody>

--- a/PMOS_Architecture_Presentation.pptx
+++ b/PMOS_Architecture_Presentation.pptx
@@ -19,6 +19,10 @@
     <p:sldId id="267" r:id="rId18"/>
     <p:sldId id="268" r:id="rId19"/>
     <p:sldId id="269" r:id="rId20"/>
+    <p:sldId id="270" r:id="rId21"/>
+    <p:sldId id="271" r:id="rId22"/>
+    <p:sldId id="272" r:id="rId23"/>
+    <p:sldId id="273" r:id="rId24"/>
   </p:sldIdLst>
   <p:sldSz cx="12191695" cy="6858000" type="screen4x3"/>
   <p:notesSz cx="6858000" cy="9144000"/>
@@ -7048,8 +7052,8 @@
         </p:nvSpPr>
         <p:spPr>
           <a:xfrm>
-            <a:off x="914400" y="731520"/>
-            <a:ext cx="10058400" cy="914400"/>
+            <a:off x="457200" y="274320"/>
+            <a:ext cx="10972800" cy="548640"/>
           </a:xfrm>
           <a:prstGeom prst="rect">
             <a:avLst/>
@@ -7063,7 +7067,7 @@
           <a:lstStyle/>
           <a:p>
             <a:pPr algn="ctr">
-              <a:defRPr sz="5400" b="1">
+              <a:defRPr sz="2600" b="1">
                 <a:solidFill>
                   <a:srgbClr val="007BFF"/>
                 </a:solidFill>
@@ -7071,7 +7075,7 @@
               </a:defRPr>
             </a:pPr>
             <a:r>
-              <a:t>PMOS</a:t>
+              <a:t>Market Category — Semantic Layer for Federated Data</a:t>
             </a:r>
           </a:p>
         </p:txBody>
@@ -7084,8 +7088,8 @@
         </p:nvSpPr>
         <p:spPr>
           <a:xfrm>
-            <a:off x="914400" y="1828800"/>
-            <a:ext cx="10058400" cy="548640"/>
+            <a:off x="457200" y="822960"/>
+            <a:ext cx="10972800" cy="365760"/>
           </a:xfrm>
           <a:prstGeom prst="rect">
             <a:avLst/>
@@ -7099,19 +7103,15 @@
           <a:lstStyle/>
           <a:p>
             <a:pPr algn="ctr">
-              <a:defRPr sz="2200" b="0">
-                <a:solidFill>
-                  <a:srgbClr val="FFFFFF"/>
-                </a:solidFill>
-                <a:latin typeface="Segoe UI"/>
-              </a:defRPr>
-            </a:pPr>
-            <a:r>
-              <a:t>Connect any data source. Ask any question.</a:t>
-            </a:r>
-            <a:br/>
-            <a:r>
-              <a:t>Get deterministic answers in minutes, not hours.</a:t>
+              <a:defRPr sz="1300" b="0">
+                <a:solidFill>
+                  <a:srgbClr val="B0B0B0"/>
+                </a:solidFill>
+                <a:latin typeface="Segoe UI"/>
+              </a:defRPr>
+            </a:pPr>
+            <a:r>
+              <a:t>What we're building has a name — and several marketing labels — depending on which slice the vendor is selling</a:t>
             </a:r>
           </a:p>
         </p:txBody>
@@ -7124,8 +7124,8 @@
         </p:nvSpPr>
         <p:spPr>
           <a:xfrm>
-            <a:off x="1371600" y="2926080"/>
-            <a:ext cx="9144000" cy="3200400"/>
+            <a:off x="457200" y="1463040"/>
+            <a:ext cx="5486400" cy="274320"/>
           </a:xfrm>
           <a:prstGeom prst="rect">
             <a:avLst/>
@@ -7138,6 +7138,3802 @@
           </a:bodyPr>
           <a:lstStyle/>
           <a:p>
+            <a:pPr algn="l">
+              <a:defRPr sz="1200" b="1">
+                <a:solidFill>
+                  <a:srgbClr val="4DA6FF"/>
+                </a:solidFill>
+                <a:latin typeface="Segoe UI"/>
+              </a:defRPr>
+            </a:pPr>
+            <a:r>
+              <a:t>MARKETING LABELS</a:t>
+            </a:r>
+          </a:p>
+        </p:txBody>
+      </p:sp>
+      <p:sp>
+        <p:nvSpPr>
+          <p:cNvPr id="5" name="TextBox 4"/>
+          <p:cNvSpPr txBox="1"/>
+          <p:nvPr/>
+        </p:nvSpPr>
+        <p:spPr>
+          <a:xfrm>
+            <a:off x="457200" y="1828800"/>
+            <a:ext cx="2377440" cy="292608"/>
+          </a:xfrm>
+          <a:prstGeom prst="rect">
+            <a:avLst/>
+          </a:prstGeom>
+          <a:noFill/>
+        </p:spPr>
+        <p:txBody>
+          <a:bodyPr wrap="square">
+            <a:spAutoFit/>
+          </a:bodyPr>
+          <a:lstStyle/>
+          <a:p>
+            <a:pPr algn="l">
+              <a:defRPr sz="1100" b="1">
+                <a:solidFill>
+                  <a:srgbClr val="FFFFFF"/>
+                </a:solidFill>
+                <a:latin typeface="Segoe UI"/>
+              </a:defRPr>
+            </a:pPr>
+            <a:r>
+              <a:t>Semantic layer</a:t>
+            </a:r>
+          </a:p>
+        </p:txBody>
+      </p:sp>
+      <p:sp>
+        <p:nvSpPr>
+          <p:cNvPr id="6" name="TextBox 5"/>
+          <p:cNvSpPr txBox="1"/>
+          <p:nvPr/>
+        </p:nvSpPr>
+        <p:spPr>
+          <a:xfrm>
+            <a:off x="2834640" y="1828800"/>
+            <a:ext cx="3017520" cy="292608"/>
+          </a:xfrm>
+          <a:prstGeom prst="rect">
+            <a:avLst/>
+          </a:prstGeom>
+          <a:noFill/>
+        </p:spPr>
+        <p:txBody>
+          <a:bodyPr wrap="square">
+            <a:spAutoFit/>
+          </a:bodyPr>
+          <a:lstStyle/>
+          <a:p>
+            <a:pPr algn="l">
+              <a:defRPr sz="1000" b="0">
+                <a:solidFill>
+                  <a:srgbClr val="B0B0B0"/>
+                </a:solidFill>
+                <a:latin typeface="Segoe UI"/>
+              </a:defRPr>
+            </a:pPr>
+            <a:r>
+              <a:t>dbt, Cube, AtScale, Looker, Power BI</a:t>
+            </a:r>
+          </a:p>
+        </p:txBody>
+      </p:sp>
+      <p:sp>
+        <p:nvSpPr>
+          <p:cNvPr id="7" name="TextBox 6"/>
+          <p:cNvSpPr txBox="1"/>
+          <p:nvPr/>
+        </p:nvSpPr>
+        <p:spPr>
+          <a:xfrm>
+            <a:off x="457200" y="2212848"/>
+            <a:ext cx="2377440" cy="292608"/>
+          </a:xfrm>
+          <a:prstGeom prst="rect">
+            <a:avLst/>
+          </a:prstGeom>
+          <a:noFill/>
+        </p:spPr>
+        <p:txBody>
+          <a:bodyPr wrap="square">
+            <a:spAutoFit/>
+          </a:bodyPr>
+          <a:lstStyle/>
+          <a:p>
+            <a:pPr algn="l">
+              <a:defRPr sz="1100" b="1">
+                <a:solidFill>
+                  <a:srgbClr val="FFFFFF"/>
+                </a:solidFill>
+                <a:latin typeface="Segoe UI"/>
+              </a:defRPr>
+            </a:pPr>
+            <a:r>
+              <a:t>Universal semantic layer</a:t>
+            </a:r>
+          </a:p>
+        </p:txBody>
+      </p:sp>
+      <p:sp>
+        <p:nvSpPr>
+          <p:cNvPr id="8" name="TextBox 7"/>
+          <p:cNvSpPr txBox="1"/>
+          <p:nvPr/>
+        </p:nvSpPr>
+        <p:spPr>
+          <a:xfrm>
+            <a:off x="2834640" y="2212848"/>
+            <a:ext cx="3017520" cy="292608"/>
+          </a:xfrm>
+          <a:prstGeom prst="rect">
+            <a:avLst/>
+          </a:prstGeom>
+          <a:noFill/>
+        </p:spPr>
+        <p:txBody>
+          <a:bodyPr wrap="square">
+            <a:spAutoFit/>
+          </a:bodyPr>
+          <a:lstStyle/>
+          <a:p>
+            <a:pPr algn="l">
+              <a:defRPr sz="1000" b="0">
+                <a:solidFill>
+                  <a:srgbClr val="B0B0B0"/>
+                </a:solidFill>
+                <a:latin typeface="Segoe UI"/>
+              </a:defRPr>
+            </a:pPr>
+            <a:r>
+              <a:t>Cube, AtScale (vendor-neutral)</a:t>
+            </a:r>
+          </a:p>
+        </p:txBody>
+      </p:sp>
+      <p:sp>
+        <p:nvSpPr>
+          <p:cNvPr id="9" name="TextBox 8"/>
+          <p:cNvSpPr txBox="1"/>
+          <p:nvPr/>
+        </p:nvSpPr>
+        <p:spPr>
+          <a:xfrm>
+            <a:off x="457200" y="2596896"/>
+            <a:ext cx="2377440" cy="292608"/>
+          </a:xfrm>
+          <a:prstGeom prst="rect">
+            <a:avLst/>
+          </a:prstGeom>
+          <a:noFill/>
+        </p:spPr>
+        <p:txBody>
+          <a:bodyPr wrap="square">
+            <a:spAutoFit/>
+          </a:bodyPr>
+          <a:lstStyle/>
+          <a:p>
+            <a:pPr algn="l">
+              <a:defRPr sz="1100" b="1">
+                <a:solidFill>
+                  <a:srgbClr val="FFFFFF"/>
+                </a:solidFill>
+                <a:latin typeface="Segoe UI"/>
+              </a:defRPr>
+            </a:pPr>
+            <a:r>
+              <a:t>Metric layer / metric store</a:t>
+            </a:r>
+          </a:p>
+        </p:txBody>
+      </p:sp>
+      <p:sp>
+        <p:nvSpPr>
+          <p:cNvPr id="10" name="TextBox 9"/>
+          <p:cNvSpPr txBox="1"/>
+          <p:nvPr/>
+        </p:nvSpPr>
+        <p:spPr>
+          <a:xfrm>
+            <a:off x="2834640" y="2596896"/>
+            <a:ext cx="3017520" cy="292608"/>
+          </a:xfrm>
+          <a:prstGeom prst="rect">
+            <a:avLst/>
+          </a:prstGeom>
+          <a:noFill/>
+        </p:spPr>
+        <p:txBody>
+          <a:bodyPr wrap="square">
+            <a:spAutoFit/>
+          </a:bodyPr>
+          <a:lstStyle/>
+          <a:p>
+            <a:pPr algn="l">
+              <a:defRPr sz="1000" b="0">
+                <a:solidFill>
+                  <a:srgbClr val="B0B0B0"/>
+                </a:solidFill>
+                <a:latin typeface="Segoe UI"/>
+              </a:defRPr>
+            </a:pPr>
+            <a:r>
+              <a:t>dbt MetricFlow</a:t>
+            </a:r>
+          </a:p>
+        </p:txBody>
+      </p:sp>
+      <p:sp>
+        <p:nvSpPr>
+          <p:cNvPr id="11" name="TextBox 10"/>
+          <p:cNvSpPr txBox="1"/>
+          <p:nvPr/>
+        </p:nvSpPr>
+        <p:spPr>
+          <a:xfrm>
+            <a:off x="457200" y="2980944"/>
+            <a:ext cx="2377440" cy="292608"/>
+          </a:xfrm>
+          <a:prstGeom prst="rect">
+            <a:avLst/>
+          </a:prstGeom>
+          <a:noFill/>
+        </p:spPr>
+        <p:txBody>
+          <a:bodyPr wrap="square">
+            <a:spAutoFit/>
+          </a:bodyPr>
+          <a:lstStyle/>
+          <a:p>
+            <a:pPr algn="l">
+              <a:defRPr sz="1100" b="1">
+                <a:solidFill>
+                  <a:srgbClr val="FFFFFF"/>
+                </a:solidFill>
+                <a:latin typeface="Segoe UI"/>
+              </a:defRPr>
+            </a:pPr>
+            <a:r>
+              <a:t>Data catalog with AI</a:t>
+            </a:r>
+          </a:p>
+        </p:txBody>
+      </p:sp>
+      <p:sp>
+        <p:nvSpPr>
+          <p:cNvPr id="12" name="TextBox 11"/>
+          <p:cNvSpPr txBox="1"/>
+          <p:nvPr/>
+        </p:nvSpPr>
+        <p:spPr>
+          <a:xfrm>
+            <a:off x="2834640" y="2980944"/>
+            <a:ext cx="3017520" cy="292608"/>
+          </a:xfrm>
+          <a:prstGeom prst="rect">
+            <a:avLst/>
+          </a:prstGeom>
+          <a:noFill/>
+        </p:spPr>
+        <p:txBody>
+          <a:bodyPr wrap="square">
+            <a:spAutoFit/>
+          </a:bodyPr>
+          <a:lstStyle/>
+          <a:p>
+            <a:pPr algn="l">
+              <a:defRPr sz="1000" b="0">
+                <a:solidFill>
+                  <a:srgbClr val="B0B0B0"/>
+                </a:solidFill>
+                <a:latin typeface="Segoe UI"/>
+              </a:defRPr>
+            </a:pPr>
+            <a:r>
+              <a:t>Alation, Collibra, Atlan, Informatica</a:t>
+            </a:r>
+          </a:p>
+        </p:txBody>
+      </p:sp>
+      <p:sp>
+        <p:nvSpPr>
+          <p:cNvPr id="13" name="TextBox 12"/>
+          <p:cNvSpPr txBox="1"/>
+          <p:nvPr/>
+        </p:nvSpPr>
+        <p:spPr>
+          <a:xfrm>
+            <a:off x="457200" y="3364991"/>
+            <a:ext cx="2377440" cy="292608"/>
+          </a:xfrm>
+          <a:prstGeom prst="rect">
+            <a:avLst/>
+          </a:prstGeom>
+          <a:noFill/>
+        </p:spPr>
+        <p:txBody>
+          <a:bodyPr wrap="square">
+            <a:spAutoFit/>
+          </a:bodyPr>
+          <a:lstStyle/>
+          <a:p>
+            <a:pPr algn="l">
+              <a:defRPr sz="1100" b="1">
+                <a:solidFill>
+                  <a:srgbClr val="FFFFFF"/>
+                </a:solidFill>
+                <a:latin typeface="Segoe UI"/>
+              </a:defRPr>
+            </a:pPr>
+            <a:r>
+              <a:t>Knowledge graph for data</a:t>
+            </a:r>
+          </a:p>
+        </p:txBody>
+      </p:sp>
+      <p:sp>
+        <p:nvSpPr>
+          <p:cNvPr id="14" name="TextBox 13"/>
+          <p:cNvSpPr txBox="1"/>
+          <p:nvPr/>
+        </p:nvSpPr>
+        <p:spPr>
+          <a:xfrm>
+            <a:off x="2834640" y="3364991"/>
+            <a:ext cx="3017520" cy="292608"/>
+          </a:xfrm>
+          <a:prstGeom prst="rect">
+            <a:avLst/>
+          </a:prstGeom>
+          <a:noFill/>
+        </p:spPr>
+        <p:txBody>
+          <a:bodyPr wrap="square">
+            <a:spAutoFit/>
+          </a:bodyPr>
+          <a:lstStyle/>
+          <a:p>
+            <a:pPr algn="l">
+              <a:defRPr sz="1000" b="0">
+                <a:solidFill>
+                  <a:srgbClr val="B0B0B0"/>
+                </a:solidFill>
+                <a:latin typeface="Segoe UI"/>
+              </a:defRPr>
+            </a:pPr>
+            <a:r>
+              <a:t>Stardog, data.world, Neo4j, Anzo</a:t>
+            </a:r>
+          </a:p>
+        </p:txBody>
+      </p:sp>
+      <p:sp>
+        <p:nvSpPr>
+          <p:cNvPr id="15" name="TextBox 14"/>
+          <p:cNvSpPr txBox="1"/>
+          <p:nvPr/>
+        </p:nvSpPr>
+        <p:spPr>
+          <a:xfrm>
+            <a:off x="457200" y="3749039"/>
+            <a:ext cx="2377440" cy="292608"/>
+          </a:xfrm>
+          <a:prstGeom prst="rect">
+            <a:avLst/>
+          </a:prstGeom>
+          <a:noFill/>
+        </p:spPr>
+        <p:txBody>
+          <a:bodyPr wrap="square">
+            <a:spAutoFit/>
+          </a:bodyPr>
+          <a:lstStyle/>
+          <a:p>
+            <a:pPr algn="l">
+              <a:defRPr sz="1100" b="1">
+                <a:solidFill>
+                  <a:srgbClr val="FFFFFF"/>
+                </a:solidFill>
+                <a:latin typeface="Segoe UI"/>
+              </a:defRPr>
+            </a:pPr>
+            <a:r>
+              <a:t>Conversational analytics</a:t>
+            </a:r>
+          </a:p>
+        </p:txBody>
+      </p:sp>
+      <p:sp>
+        <p:nvSpPr>
+          <p:cNvPr id="16" name="TextBox 15"/>
+          <p:cNvSpPr txBox="1"/>
+          <p:nvPr/>
+        </p:nvSpPr>
+        <p:spPr>
+          <a:xfrm>
+            <a:off x="2834640" y="3749039"/>
+            <a:ext cx="3017520" cy="292608"/>
+          </a:xfrm>
+          <a:prstGeom prst="rect">
+            <a:avLst/>
+          </a:prstGeom>
+          <a:noFill/>
+        </p:spPr>
+        <p:txBody>
+          <a:bodyPr wrap="square">
+            <a:spAutoFit/>
+          </a:bodyPr>
+          <a:lstStyle/>
+          <a:p>
+            <a:pPr algn="l">
+              <a:defRPr sz="1000" b="0">
+                <a:solidFill>
+                  <a:srgbClr val="B0B0B0"/>
+                </a:solidFill>
+                <a:latin typeface="Segoe UI"/>
+              </a:defRPr>
+            </a:pPr>
+            <a:r>
+              <a:t>ThoughtSpot, Tableau, Hex, Mode</a:t>
+            </a:r>
+          </a:p>
+        </p:txBody>
+      </p:sp>
+      <p:sp>
+        <p:nvSpPr>
+          <p:cNvPr id="17" name="TextBox 16"/>
+          <p:cNvSpPr txBox="1"/>
+          <p:nvPr/>
+        </p:nvSpPr>
+        <p:spPr>
+          <a:xfrm>
+            <a:off x="457200" y="4133087"/>
+            <a:ext cx="2377440" cy="292608"/>
+          </a:xfrm>
+          <a:prstGeom prst="rect">
+            <a:avLst/>
+          </a:prstGeom>
+          <a:noFill/>
+        </p:spPr>
+        <p:txBody>
+          <a:bodyPr wrap="square">
+            <a:spAutoFit/>
+          </a:bodyPr>
+          <a:lstStyle/>
+          <a:p>
+            <a:pPr algn="l">
+              <a:defRPr sz="1100" b="1">
+                <a:solidFill>
+                  <a:srgbClr val="FFFFFF"/>
+                </a:solidFill>
+                <a:latin typeface="Segoe UI"/>
+              </a:defRPr>
+            </a:pPr>
+            <a:r>
+              <a:t>Text-to-SQL</a:t>
+            </a:r>
+          </a:p>
+        </p:txBody>
+      </p:sp>
+      <p:sp>
+        <p:nvSpPr>
+          <p:cNvPr id="18" name="TextBox 17"/>
+          <p:cNvSpPr txBox="1"/>
+          <p:nvPr/>
+        </p:nvSpPr>
+        <p:spPr>
+          <a:xfrm>
+            <a:off x="2834640" y="4133087"/>
+            <a:ext cx="3017520" cy="292608"/>
+          </a:xfrm>
+          <a:prstGeom prst="rect">
+            <a:avLst/>
+          </a:prstGeom>
+          <a:noFill/>
+        </p:spPr>
+        <p:txBody>
+          <a:bodyPr wrap="square">
+            <a:spAutoFit/>
+          </a:bodyPr>
+          <a:lstStyle/>
+          <a:p>
+            <a:pPr algn="l">
+              <a:defRPr sz="1000" b="0">
+                <a:solidFill>
+                  <a:srgbClr val="B0B0B0"/>
+                </a:solidFill>
+                <a:latin typeface="Segoe UI"/>
+              </a:defRPr>
+            </a:pPr>
+            <a:r>
+              <a:t>Defog, Vanna, WrenAI, Numbers Station</a:t>
+            </a:r>
+          </a:p>
+        </p:txBody>
+      </p:sp>
+      <p:sp>
+        <p:nvSpPr>
+          <p:cNvPr id="19" name="TextBox 18"/>
+          <p:cNvSpPr txBox="1"/>
+          <p:nvPr/>
+        </p:nvSpPr>
+        <p:spPr>
+          <a:xfrm>
+            <a:off x="457200" y="4517136"/>
+            <a:ext cx="2377440" cy="292608"/>
+          </a:xfrm>
+          <a:prstGeom prst="rect">
+            <a:avLst/>
+          </a:prstGeom>
+          <a:noFill/>
+        </p:spPr>
+        <p:txBody>
+          <a:bodyPr wrap="square">
+            <a:spAutoFit/>
+          </a:bodyPr>
+          <a:lstStyle/>
+          <a:p>
+            <a:pPr algn="l">
+              <a:defRPr sz="1100" b="1">
+                <a:solidFill>
+                  <a:srgbClr val="FFFFFF"/>
+                </a:solidFill>
+                <a:latin typeface="Segoe UI"/>
+              </a:defRPr>
+            </a:pPr>
+            <a:r>
+              <a:t>Cortex Analyst</a:t>
+            </a:r>
+          </a:p>
+        </p:txBody>
+      </p:sp>
+      <p:sp>
+        <p:nvSpPr>
+          <p:cNvPr id="20" name="TextBox 19"/>
+          <p:cNvSpPr txBox="1"/>
+          <p:nvPr/>
+        </p:nvSpPr>
+        <p:spPr>
+          <a:xfrm>
+            <a:off x="2834640" y="4517136"/>
+            <a:ext cx="3017520" cy="292608"/>
+          </a:xfrm>
+          <a:prstGeom prst="rect">
+            <a:avLst/>
+          </a:prstGeom>
+          <a:noFill/>
+        </p:spPr>
+        <p:txBody>
+          <a:bodyPr wrap="square">
+            <a:spAutoFit/>
+          </a:bodyPr>
+          <a:lstStyle/>
+          <a:p>
+            <a:pPr algn="l">
+              <a:defRPr sz="1000" b="0">
+                <a:solidFill>
+                  <a:srgbClr val="B0B0B0"/>
+                </a:solidFill>
+                <a:latin typeface="Segoe UI"/>
+              </a:defRPr>
+            </a:pPr>
+            <a:r>
+              <a:t>Snowflake (first-party, late 2024)</a:t>
+            </a:r>
+          </a:p>
+        </p:txBody>
+      </p:sp>
+      <p:sp>
+        <p:nvSpPr>
+          <p:cNvPr id="21" name="TextBox 20"/>
+          <p:cNvSpPr txBox="1"/>
+          <p:nvPr/>
+        </p:nvSpPr>
+        <p:spPr>
+          <a:xfrm>
+            <a:off x="6400800" y="1463040"/>
+            <a:ext cx="5486400" cy="274320"/>
+          </a:xfrm>
+          <a:prstGeom prst="rect">
+            <a:avLst/>
+          </a:prstGeom>
+          <a:noFill/>
+        </p:spPr>
+        <p:txBody>
+          <a:bodyPr wrap="square">
+            <a:spAutoFit/>
+          </a:bodyPr>
+          <a:lstStyle/>
+          <a:p>
+            <a:pPr algn="l">
+              <a:defRPr sz="1200" b="1">
+                <a:solidFill>
+                  <a:srgbClr val="4DA6FF"/>
+                </a:solidFill>
+                <a:latin typeface="Segoe UI"/>
+              </a:defRPr>
+            </a:pPr>
+            <a:r>
+              <a:t>THE COMMON LOOP — EVERYONE IMPLEMENTS THIS</a:t>
+            </a:r>
+          </a:p>
+        </p:txBody>
+      </p:sp>
+      <p:sp>
+        <p:nvSpPr>
+          <p:cNvPr id="22" name="Rounded Rectangle 21"/>
+          <p:cNvSpPr/>
+          <p:nvPr/>
+        </p:nvSpPr>
+        <p:spPr>
+          <a:xfrm>
+            <a:off x="6400800" y="1828800"/>
+            <a:ext cx="1828800" cy="384048"/>
+          </a:xfrm>
+          <a:prstGeom prst="roundRect">
+            <a:avLst/>
+          </a:prstGeom>
+          <a:solidFill>
+            <a:srgbClr val="4DA6FF"/>
+          </a:solidFill>
+          <a:ln>
+            <a:noFill/>
+          </a:ln>
+        </p:spPr>
+        <p:style>
+          <a:lnRef idx="1">
+            <a:schemeClr val="accent1"/>
+          </a:lnRef>
+          <a:fillRef idx="3">
+            <a:schemeClr val="accent1"/>
+          </a:fillRef>
+          <a:effectRef idx="2">
+            <a:schemeClr val="accent1"/>
+          </a:effectRef>
+          <a:fontRef idx="minor">
+            <a:schemeClr val="lt1"/>
+          </a:fontRef>
+        </p:style>
+        <p:txBody>
+          <a:bodyPr rtlCol="0" anchor="ctr" wrap="square"/>
+          <a:lstStyle/>
+          <a:p>
+            <a:pPr algn="ctr">
+              <a:defRPr sz="1100" b="1">
+                <a:solidFill>
+                  <a:srgbClr val="FFFFFF"/>
+                </a:solidFill>
+                <a:latin typeface="Segoe UI"/>
+              </a:defRPr>
+            </a:pPr>
+            <a:r>
+              <a:t>1  CRAWL</a:t>
+            </a:r>
+          </a:p>
+        </p:txBody>
+      </p:sp>
+      <p:sp>
+        <p:nvSpPr>
+          <p:cNvPr id="23" name="TextBox 22"/>
+          <p:cNvSpPr txBox="1"/>
+          <p:nvPr/>
+        </p:nvSpPr>
+        <p:spPr>
+          <a:xfrm>
+            <a:off x="8366760" y="1892807"/>
+            <a:ext cx="3657600" cy="274320"/>
+          </a:xfrm>
+          <a:prstGeom prst="rect">
+            <a:avLst/>
+          </a:prstGeom>
+          <a:noFill/>
+        </p:spPr>
+        <p:txBody>
+          <a:bodyPr wrap="square">
+            <a:spAutoFit/>
+          </a:bodyPr>
+          <a:lstStyle/>
+          <a:p>
+            <a:pPr algn="l">
+              <a:defRPr sz="1100" b="0">
+                <a:solidFill>
+                  <a:srgbClr val="B0B0B0"/>
+                </a:solidFill>
+                <a:latin typeface="Segoe UI"/>
+              </a:defRPr>
+            </a:pPr>
+            <a:r>
+              <a:t>physical metadata from sources</a:t>
+            </a:r>
+          </a:p>
+        </p:txBody>
+      </p:sp>
+      <p:sp>
+        <p:nvSpPr>
+          <p:cNvPr id="24" name="Rounded Rectangle 23"/>
+          <p:cNvSpPr/>
+          <p:nvPr/>
+        </p:nvSpPr>
+        <p:spPr>
+          <a:xfrm>
+            <a:off x="6400800" y="2304288"/>
+            <a:ext cx="1828800" cy="384048"/>
+          </a:xfrm>
+          <a:prstGeom prst="roundRect">
+            <a:avLst/>
+          </a:prstGeom>
+          <a:solidFill>
+            <a:srgbClr val="FF9F00"/>
+          </a:solidFill>
+          <a:ln>
+            <a:noFill/>
+          </a:ln>
+        </p:spPr>
+        <p:style>
+          <a:lnRef idx="1">
+            <a:schemeClr val="accent1"/>
+          </a:lnRef>
+          <a:fillRef idx="3">
+            <a:schemeClr val="accent1"/>
+          </a:fillRef>
+          <a:effectRef idx="2">
+            <a:schemeClr val="accent1"/>
+          </a:effectRef>
+          <a:fontRef idx="minor">
+            <a:schemeClr val="lt1"/>
+          </a:fontRef>
+        </p:style>
+        <p:txBody>
+          <a:bodyPr rtlCol="0" anchor="ctr" wrap="square"/>
+          <a:lstStyle/>
+          <a:p>
+            <a:pPr algn="ctr">
+              <a:defRPr sz="1100" b="1">
+                <a:solidFill>
+                  <a:srgbClr val="FFFFFF"/>
+                </a:solidFill>
+                <a:latin typeface="Segoe UI"/>
+              </a:defRPr>
+            </a:pPr>
+            <a:r>
+              <a:t>2  MAP</a:t>
+            </a:r>
+          </a:p>
+        </p:txBody>
+      </p:sp>
+      <p:sp>
+        <p:nvSpPr>
+          <p:cNvPr id="25" name="TextBox 24"/>
+          <p:cNvSpPr txBox="1"/>
+          <p:nvPr/>
+        </p:nvSpPr>
+        <p:spPr>
+          <a:xfrm>
+            <a:off x="8366760" y="2368296"/>
+            <a:ext cx="3657600" cy="274320"/>
+          </a:xfrm>
+          <a:prstGeom prst="rect">
+            <a:avLst/>
+          </a:prstGeom>
+          <a:noFill/>
+        </p:spPr>
+        <p:txBody>
+          <a:bodyPr wrap="square">
+            <a:spAutoFit/>
+          </a:bodyPr>
+          <a:lstStyle/>
+          <a:p>
+            <a:pPr algn="l">
+              <a:defRPr sz="1100" b="0">
+                <a:solidFill>
+                  <a:srgbClr val="B0B0B0"/>
+                </a:solidFill>
+                <a:latin typeface="Segoe UI"/>
+              </a:defRPr>
+            </a:pPr>
+            <a:r>
+              <a:t>to a semantic layer (LLM + human)</a:t>
+            </a:r>
+          </a:p>
+        </p:txBody>
+      </p:sp>
+      <p:sp>
+        <p:nvSpPr>
+          <p:cNvPr id="26" name="Rounded Rectangle 25"/>
+          <p:cNvSpPr/>
+          <p:nvPr/>
+        </p:nvSpPr>
+        <p:spPr>
+          <a:xfrm>
+            <a:off x="6400800" y="2779776"/>
+            <a:ext cx="1828800" cy="384048"/>
+          </a:xfrm>
+          <a:prstGeom prst="roundRect">
+            <a:avLst/>
+          </a:prstGeom>
+          <a:solidFill>
+            <a:srgbClr val="AB47BC"/>
+          </a:solidFill>
+          <a:ln>
+            <a:noFill/>
+          </a:ln>
+        </p:spPr>
+        <p:style>
+          <a:lnRef idx="1">
+            <a:schemeClr val="accent1"/>
+          </a:lnRef>
+          <a:fillRef idx="3">
+            <a:schemeClr val="accent1"/>
+          </a:fillRef>
+          <a:effectRef idx="2">
+            <a:schemeClr val="accent1"/>
+          </a:effectRef>
+          <a:fontRef idx="minor">
+            <a:schemeClr val="lt1"/>
+          </a:fontRef>
+        </p:style>
+        <p:txBody>
+          <a:bodyPr rtlCol="0" anchor="ctr" wrap="square"/>
+          <a:lstStyle/>
+          <a:p>
+            <a:pPr algn="ctr">
+              <a:defRPr sz="1100" b="1">
+                <a:solidFill>
+                  <a:srgbClr val="FFFFFF"/>
+                </a:solidFill>
+                <a:latin typeface="Segoe UI"/>
+              </a:defRPr>
+            </a:pPr>
+            <a:r>
+              <a:t>3  STORE</a:t>
+            </a:r>
+          </a:p>
+        </p:txBody>
+      </p:sp>
+      <p:sp>
+        <p:nvSpPr>
+          <p:cNvPr id="27" name="TextBox 26"/>
+          <p:cNvSpPr txBox="1"/>
+          <p:nvPr/>
+        </p:nvSpPr>
+        <p:spPr>
+          <a:xfrm>
+            <a:off x="8366760" y="2843784"/>
+            <a:ext cx="3657600" cy="274320"/>
+          </a:xfrm>
+          <a:prstGeom prst="rect">
+            <a:avLst/>
+          </a:prstGeom>
+          <a:noFill/>
+        </p:spPr>
+        <p:txBody>
+          <a:bodyPr wrap="square">
+            <a:spAutoFit/>
+          </a:bodyPr>
+          <a:lstStyle/>
+          <a:p>
+            <a:pPr algn="l">
+              <a:defRPr sz="1100" b="0">
+                <a:solidFill>
+                  <a:srgbClr val="B0B0B0"/>
+                </a:solidFill>
+                <a:latin typeface="Segoe UI"/>
+              </a:defRPr>
+            </a:pPr>
+            <a:r>
+              <a:t>in a graph / catalog / git</a:t>
+            </a:r>
+          </a:p>
+        </p:txBody>
+      </p:sp>
+      <p:sp>
+        <p:nvSpPr>
+          <p:cNvPr id="28" name="Rounded Rectangle 27"/>
+          <p:cNvSpPr/>
+          <p:nvPr/>
+        </p:nvSpPr>
+        <p:spPr>
+          <a:xfrm>
+            <a:off x="6400800" y="3255264"/>
+            <a:ext cx="1828800" cy="384048"/>
+          </a:xfrm>
+          <a:prstGeom prst="roundRect">
+            <a:avLst/>
+          </a:prstGeom>
+          <a:solidFill>
+            <a:srgbClr val="00C853"/>
+          </a:solidFill>
+          <a:ln>
+            <a:noFill/>
+          </a:ln>
+        </p:spPr>
+        <p:style>
+          <a:lnRef idx="1">
+            <a:schemeClr val="accent1"/>
+          </a:lnRef>
+          <a:fillRef idx="3">
+            <a:schemeClr val="accent1"/>
+          </a:fillRef>
+          <a:effectRef idx="2">
+            <a:schemeClr val="accent1"/>
+          </a:effectRef>
+          <a:fontRef idx="minor">
+            <a:schemeClr val="lt1"/>
+          </a:fontRef>
+        </p:style>
+        <p:txBody>
+          <a:bodyPr rtlCol="0" anchor="ctr" wrap="square"/>
+          <a:lstStyle/>
+          <a:p>
+            <a:pPr algn="ctr">
+              <a:defRPr sz="1100" b="1">
+                <a:solidFill>
+                  <a:srgbClr val="FFFFFF"/>
+                </a:solidFill>
+                <a:latin typeface="Segoe UI"/>
+              </a:defRPr>
+            </a:pPr>
+            <a:r>
+              <a:t>4  RETRIEVE</a:t>
+            </a:r>
+          </a:p>
+        </p:txBody>
+      </p:sp>
+      <p:sp>
+        <p:nvSpPr>
+          <p:cNvPr id="29" name="TextBox 28"/>
+          <p:cNvSpPr txBox="1"/>
+          <p:nvPr/>
+        </p:nvSpPr>
+        <p:spPr>
+          <a:xfrm>
+            <a:off x="8366760" y="3319272"/>
+            <a:ext cx="3657600" cy="274320"/>
+          </a:xfrm>
+          <a:prstGeom prst="rect">
+            <a:avLst/>
+          </a:prstGeom>
+          <a:noFill/>
+        </p:spPr>
+        <p:txBody>
+          <a:bodyPr wrap="square">
+            <a:spAutoFit/>
+          </a:bodyPr>
+          <a:lstStyle/>
+          <a:p>
+            <a:pPr algn="l">
+              <a:defRPr sz="1100" b="0">
+                <a:solidFill>
+                  <a:srgbClr val="B0B0B0"/>
+                </a:solidFill>
+                <a:latin typeface="Segoe UI"/>
+              </a:defRPr>
+            </a:pPr>
+            <a:r>
+              <a:t>relevant semantic context</a:t>
+            </a:r>
+          </a:p>
+        </p:txBody>
+      </p:sp>
+      <p:sp>
+        <p:nvSpPr>
+          <p:cNvPr id="30" name="Rounded Rectangle 29"/>
+          <p:cNvSpPr/>
+          <p:nvPr/>
+        </p:nvSpPr>
+        <p:spPr>
+          <a:xfrm>
+            <a:off x="6400800" y="3730752"/>
+            <a:ext cx="1828800" cy="384048"/>
+          </a:xfrm>
+          <a:prstGeom prst="roundRect">
+            <a:avLst/>
+          </a:prstGeom>
+          <a:solidFill>
+            <a:srgbClr val="007BFF"/>
+          </a:solidFill>
+          <a:ln>
+            <a:noFill/>
+          </a:ln>
+        </p:spPr>
+        <p:style>
+          <a:lnRef idx="1">
+            <a:schemeClr val="accent1"/>
+          </a:lnRef>
+          <a:fillRef idx="3">
+            <a:schemeClr val="accent1"/>
+          </a:fillRef>
+          <a:effectRef idx="2">
+            <a:schemeClr val="accent1"/>
+          </a:effectRef>
+          <a:fontRef idx="minor">
+            <a:schemeClr val="lt1"/>
+          </a:fontRef>
+        </p:style>
+        <p:txBody>
+          <a:bodyPr rtlCol="0" anchor="ctr" wrap="square"/>
+          <a:lstStyle/>
+          <a:p>
+            <a:pPr algn="ctr">
+              <a:defRPr sz="1100" b="1">
+                <a:solidFill>
+                  <a:srgbClr val="FFFFFF"/>
+                </a:solidFill>
+                <a:latin typeface="Segoe UI"/>
+              </a:defRPr>
+            </a:pPr>
+            <a:r>
+              <a:t>5  GENERATE</a:t>
+            </a:r>
+          </a:p>
+        </p:txBody>
+      </p:sp>
+      <p:sp>
+        <p:nvSpPr>
+          <p:cNvPr id="31" name="TextBox 30"/>
+          <p:cNvSpPr txBox="1"/>
+          <p:nvPr/>
+        </p:nvSpPr>
+        <p:spPr>
+          <a:xfrm>
+            <a:off x="8366760" y="3794760"/>
+            <a:ext cx="3657600" cy="274320"/>
+          </a:xfrm>
+          <a:prstGeom prst="rect">
+            <a:avLst/>
+          </a:prstGeom>
+          <a:noFill/>
+        </p:spPr>
+        <p:txBody>
+          <a:bodyPr wrap="square">
+            <a:spAutoFit/>
+          </a:bodyPr>
+          <a:lstStyle/>
+          <a:p>
+            <a:pPr algn="l">
+              <a:defRPr sz="1100" b="0">
+                <a:solidFill>
+                  <a:srgbClr val="B0B0B0"/>
+                </a:solidFill>
+                <a:latin typeface="Segoe UI"/>
+              </a:defRPr>
+            </a:pPr>
+            <a:r>
+              <a:t>SQL / SPARQL / Cypher / KQL</a:t>
+            </a:r>
+          </a:p>
+        </p:txBody>
+      </p:sp>
+      <p:sp>
+        <p:nvSpPr>
+          <p:cNvPr id="32" name="Rounded Rectangle 31"/>
+          <p:cNvSpPr/>
+          <p:nvPr/>
+        </p:nvSpPr>
+        <p:spPr>
+          <a:xfrm>
+            <a:off x="6400800" y="4206240"/>
+            <a:ext cx="1828800" cy="384048"/>
+          </a:xfrm>
+          <a:prstGeom prst="roundRect">
+            <a:avLst/>
+          </a:prstGeom>
+          <a:solidFill>
+            <a:srgbClr val="00C853"/>
+          </a:solidFill>
+          <a:ln>
+            <a:noFill/>
+          </a:ln>
+        </p:spPr>
+        <p:style>
+          <a:lnRef idx="1">
+            <a:schemeClr val="accent1"/>
+          </a:lnRef>
+          <a:fillRef idx="3">
+            <a:schemeClr val="accent1"/>
+          </a:fillRef>
+          <a:effectRef idx="2">
+            <a:schemeClr val="accent1"/>
+          </a:effectRef>
+          <a:fontRef idx="minor">
+            <a:schemeClr val="lt1"/>
+          </a:fontRef>
+        </p:style>
+        <p:txBody>
+          <a:bodyPr rtlCol="0" anchor="ctr" wrap="square"/>
+          <a:lstStyle/>
+          <a:p>
+            <a:pPr algn="ctr">
+              <a:defRPr sz="1100" b="1">
+                <a:solidFill>
+                  <a:srgbClr val="FFFFFF"/>
+                </a:solidFill>
+                <a:latin typeface="Segoe UI"/>
+              </a:defRPr>
+            </a:pPr>
+            <a:r>
+              <a:t>6  EXECUTE</a:t>
+            </a:r>
+          </a:p>
+        </p:txBody>
+      </p:sp>
+      <p:sp>
+        <p:nvSpPr>
+          <p:cNvPr id="33" name="TextBox 32"/>
+          <p:cNvSpPr txBox="1"/>
+          <p:nvPr/>
+        </p:nvSpPr>
+        <p:spPr>
+          <a:xfrm>
+            <a:off x="8366760" y="4270248"/>
+            <a:ext cx="3657600" cy="274320"/>
+          </a:xfrm>
+          <a:prstGeom prst="rect">
+            <a:avLst/>
+          </a:prstGeom>
+          <a:noFill/>
+        </p:spPr>
+        <p:txBody>
+          <a:bodyPr wrap="square">
+            <a:spAutoFit/>
+          </a:bodyPr>
+          <a:lstStyle/>
+          <a:p>
+            <a:pPr algn="l">
+              <a:defRPr sz="1100" b="0">
+                <a:solidFill>
+                  <a:srgbClr val="B0B0B0"/>
+                </a:solidFill>
+                <a:latin typeface="Segoe UI"/>
+              </a:defRPr>
+            </a:pPr>
+            <a:r>
+              <a:t>+ self-correct / re-rank</a:t>
+            </a:r>
+          </a:p>
+        </p:txBody>
+      </p:sp>
+      <p:sp>
+        <p:nvSpPr>
+          <p:cNvPr id="34" name="TextBox 33"/>
+          <p:cNvSpPr txBox="1"/>
+          <p:nvPr/>
+        </p:nvSpPr>
+        <p:spPr>
+          <a:xfrm>
+            <a:off x="6400800" y="4937760"/>
+            <a:ext cx="5486400" cy="914400"/>
+          </a:xfrm>
+          <a:prstGeom prst="rect">
+            <a:avLst/>
+          </a:prstGeom>
+          <a:noFill/>
+        </p:spPr>
+        <p:txBody>
+          <a:bodyPr wrap="square">
+            <a:spAutoFit/>
+          </a:bodyPr>
+          <a:lstStyle/>
+          <a:p>
+            <a:pPr algn="l">
+              <a:defRPr sz="1100" b="0">
+                <a:solidFill>
+                  <a:srgbClr val="FFFFFF"/>
+                </a:solidFill>
+                <a:latin typeface="Segoe UI"/>
+              </a:defRPr>
+            </a:pPr>
+            <a:r>
+              <a:t>Differentiation lives in the details of steps 2 (mapping quality), 4 (retrieval relevance), and 5 (generation grounding). PMOS shares the loop — it competes on how it implements each step.</a:t>
+            </a:r>
+          </a:p>
+        </p:txBody>
+      </p:sp>
+    </p:spTree>
+  </p:cSld>
+  <p:clrMapOvr>
+    <a:masterClrMapping/>
+  </p:clrMapOvr>
+</p:sld>
+</file>
+
+<file path=ppt/slides/slide15.xml><?xml version="1.0" encoding="utf-8"?>
+<p:sld xmlns:a="http://schemas.openxmlformats.org/drawingml/2006/main" xmlns:p="http://schemas.openxmlformats.org/presentationml/2006/main" xmlns:r="http://schemas.openxmlformats.org/officeDocument/2006/relationships">
+  <p:cSld>
+    <p:bg>
+      <p:bgPr>
+        <a:solidFill>
+          <a:srgbClr val="1A1A2E"/>
+        </a:solidFill>
+        <a:effectLst/>
+      </p:bgPr>
+    </p:bg>
+    <p:spTree>
+      <p:nvGrpSpPr>
+        <p:cNvPr id="1" name=""/>
+        <p:cNvGrpSpPr/>
+        <p:nvPr/>
+      </p:nvGrpSpPr>
+      <p:grpSpPr/>
+      <p:sp>
+        <p:nvSpPr>
+          <p:cNvPr id="2" name="TextBox 1"/>
+          <p:cNvSpPr txBox="1"/>
+          <p:nvPr/>
+        </p:nvSpPr>
+        <p:spPr>
+          <a:xfrm>
+            <a:off x="457200" y="274320"/>
+            <a:ext cx="10972800" cy="548640"/>
+          </a:xfrm>
+          <a:prstGeom prst="rect">
+            <a:avLst/>
+          </a:prstGeom>
+          <a:noFill/>
+        </p:spPr>
+        <p:txBody>
+          <a:bodyPr wrap="square">
+            <a:spAutoFit/>
+          </a:bodyPr>
+          <a:lstStyle/>
+          <a:p>
+            <a:pPr algn="ctr">
+              <a:defRPr sz="2600" b="1">
+                <a:solidFill>
+                  <a:srgbClr val="007BFF"/>
+                </a:solidFill>
+                <a:latin typeface="Segoe UI"/>
+              </a:defRPr>
+            </a:pPr>
+            <a:r>
+              <a:t>Competitive Landscape — Six Groups of Players</a:t>
+            </a:r>
+          </a:p>
+        </p:txBody>
+      </p:sp>
+      <p:sp>
+        <p:nvSpPr>
+          <p:cNvPr id="3" name="TextBox 2"/>
+          <p:cNvSpPr txBox="1"/>
+          <p:nvPr/>
+        </p:nvSpPr>
+        <p:spPr>
+          <a:xfrm>
+            <a:off x="457200" y="822960"/>
+            <a:ext cx="10972800" cy="365760"/>
+          </a:xfrm>
+          <a:prstGeom prst="rect">
+            <a:avLst/>
+          </a:prstGeom>
+          <a:noFill/>
+        </p:spPr>
+        <p:txBody>
+          <a:bodyPr wrap="square">
+            <a:spAutoFit/>
+          </a:bodyPr>
+          <a:lstStyle/>
+          <a:p>
+            <a:pPr algn="ctr">
+              <a:defRPr sz="1300" b="0">
+                <a:solidFill>
+                  <a:srgbClr val="B0B0B0"/>
+                </a:solidFill>
+                <a:latin typeface="Segoe UI"/>
+              </a:defRPr>
+            </a:pPr>
+            <a:r>
+              <a:t>The category is real and crowded; vendors that started in different buckets are converging on the same shape</a:t>
+            </a:r>
+          </a:p>
+        </p:txBody>
+      </p:sp>
+      <p:sp>
+        <p:nvSpPr>
+          <p:cNvPr id="4" name="Rounded Rectangle 3"/>
+          <p:cNvSpPr/>
+          <p:nvPr/>
+        </p:nvSpPr>
+        <p:spPr>
+          <a:xfrm>
+            <a:off x="365760" y="1280160"/>
+            <a:ext cx="3794760" cy="2468880"/>
+          </a:xfrm>
+          <a:prstGeom prst="roundRect">
+            <a:avLst/>
+          </a:prstGeom>
+          <a:solidFill>
+            <a:srgbClr val="353555"/>
+          </a:solidFill>
+          <a:ln>
+            <a:noFill/>
+          </a:ln>
+        </p:spPr>
+        <p:style>
+          <a:lnRef idx="1">
+            <a:schemeClr val="accent1"/>
+          </a:lnRef>
+          <a:fillRef idx="3">
+            <a:schemeClr val="accent1"/>
+          </a:fillRef>
+          <a:effectRef idx="2">
+            <a:schemeClr val="accent1"/>
+          </a:effectRef>
+          <a:fontRef idx="minor">
+            <a:schemeClr val="lt1"/>
+          </a:fontRef>
+        </p:style>
+        <p:txBody>
+          <a:bodyPr rtlCol="0" anchor="ctr"/>
+          <a:lstStyle/>
+          <a:p>
+            <a:pPr algn="ctr"/>
+          </a:p>
+        </p:txBody>
+      </p:sp>
+      <p:sp>
+        <p:nvSpPr>
+          <p:cNvPr id="5" name="Rectangle 4"/>
+          <p:cNvSpPr/>
+          <p:nvPr/>
+        </p:nvSpPr>
+        <p:spPr>
+          <a:xfrm>
+            <a:off x="365760" y="1280160"/>
+            <a:ext cx="54864" cy="2468880"/>
+          </a:xfrm>
+          <a:prstGeom prst="rect">
+            <a:avLst/>
+          </a:prstGeom>
+          <a:solidFill>
+            <a:srgbClr val="AB47BC"/>
+          </a:solidFill>
+          <a:ln>
+            <a:noFill/>
+          </a:ln>
+        </p:spPr>
+        <p:style>
+          <a:lnRef idx="1">
+            <a:schemeClr val="accent1"/>
+          </a:lnRef>
+          <a:fillRef idx="3">
+            <a:schemeClr val="accent1"/>
+          </a:fillRef>
+          <a:effectRef idx="2">
+            <a:schemeClr val="accent1"/>
+          </a:effectRef>
+          <a:fontRef idx="minor">
+            <a:schemeClr val="lt1"/>
+          </a:fontRef>
+        </p:style>
+        <p:txBody>
+          <a:bodyPr rtlCol="0" anchor="ctr"/>
+          <a:lstStyle/>
+          <a:p>
+            <a:pPr algn="ctr"/>
+          </a:p>
+        </p:txBody>
+      </p:sp>
+      <p:sp>
+        <p:nvSpPr>
+          <p:cNvPr id="6" name="TextBox 5"/>
+          <p:cNvSpPr txBox="1"/>
+          <p:nvPr/>
+        </p:nvSpPr>
+        <p:spPr>
+          <a:xfrm>
+            <a:off x="548640" y="1371600"/>
+            <a:ext cx="3520440" cy="320040"/>
+          </a:xfrm>
+          <a:prstGeom prst="rect">
+            <a:avLst/>
+          </a:prstGeom>
+          <a:noFill/>
+        </p:spPr>
+        <p:txBody>
+          <a:bodyPr wrap="square">
+            <a:spAutoFit/>
+          </a:bodyPr>
+          <a:lstStyle/>
+          <a:p>
+            <a:pPr algn="l">
+              <a:defRPr sz="1300" b="1">
+                <a:solidFill>
+                  <a:srgbClr val="AB47BC"/>
+                </a:solidFill>
+                <a:latin typeface="Segoe UI"/>
+              </a:defRPr>
+            </a:pPr>
+            <a:r>
+              <a:t>1. KNOWLEDGE-GRAPH NATIVE</a:t>
+            </a:r>
+          </a:p>
+        </p:txBody>
+      </p:sp>
+      <p:sp>
+        <p:nvSpPr>
+          <p:cNvPr id="7" name="TextBox 6"/>
+          <p:cNvSpPr txBox="1"/>
+          <p:nvPr/>
+        </p:nvSpPr>
+        <p:spPr>
+          <a:xfrm>
+            <a:off x="548640" y="1691639"/>
+            <a:ext cx="3520440" cy="1965960"/>
+          </a:xfrm>
+          <a:prstGeom prst="rect">
+            <a:avLst/>
+          </a:prstGeom>
+          <a:noFill/>
+        </p:spPr>
+        <p:txBody>
+          <a:bodyPr wrap="square">
+            <a:spAutoFit/>
+          </a:bodyPr>
+          <a:lstStyle/>
+          <a:p>
+            <a:pPr algn="l">
+              <a:defRPr sz="1000" b="0">
+                <a:solidFill>
+                  <a:srgbClr val="B0B0B0"/>
+                </a:solidFill>
+                <a:latin typeface="Segoe UI"/>
+              </a:defRPr>
+            </a:pPr>
+            <a:r>
+              <a:t>Closest architectural cousins to PMOS.</a:t>
+            </a:r>
+            <a:br/>
+            <a:br/>
+            <a:r>
+              <a:t>• Stardog — RDF KG + Voicebox NL→SPARQL</a:t>
+            </a:r>
+            <a:br/>
+            <a:r>
+              <a:t>• data.world — graph-native, regulated industries</a:t>
+            </a:r>
+            <a:br/>
+            <a:r>
+              <a:t>• Anzo (Cambridge Semantics) — enterprise KG</a:t>
+            </a:r>
+            <a:br/>
+            <a:r>
+              <a:t>• Neo4j — GraphRAG framework + reference arch</a:t>
+            </a:r>
+            <a:br/>
+            <a:br/>
+            <a:r>
+              <a:t>Years on ontology + entity resolution.</a:t>
+            </a:r>
+          </a:p>
+        </p:txBody>
+      </p:sp>
+      <p:sp>
+        <p:nvSpPr>
+          <p:cNvPr id="8" name="Rounded Rectangle 7"/>
+          <p:cNvSpPr/>
+          <p:nvPr/>
+        </p:nvSpPr>
+        <p:spPr>
+          <a:xfrm>
+            <a:off x="4297680" y="1280160"/>
+            <a:ext cx="3794760" cy="2468880"/>
+          </a:xfrm>
+          <a:prstGeom prst="roundRect">
+            <a:avLst/>
+          </a:prstGeom>
+          <a:solidFill>
+            <a:srgbClr val="353555"/>
+          </a:solidFill>
+          <a:ln>
+            <a:noFill/>
+          </a:ln>
+        </p:spPr>
+        <p:style>
+          <a:lnRef idx="1">
+            <a:schemeClr val="accent1"/>
+          </a:lnRef>
+          <a:fillRef idx="3">
+            <a:schemeClr val="accent1"/>
+          </a:fillRef>
+          <a:effectRef idx="2">
+            <a:schemeClr val="accent1"/>
+          </a:effectRef>
+          <a:fontRef idx="minor">
+            <a:schemeClr val="lt1"/>
+          </a:fontRef>
+        </p:style>
+        <p:txBody>
+          <a:bodyPr rtlCol="0" anchor="ctr"/>
+          <a:lstStyle/>
+          <a:p>
+            <a:pPr algn="ctr"/>
+          </a:p>
+        </p:txBody>
+      </p:sp>
+      <p:sp>
+        <p:nvSpPr>
+          <p:cNvPr id="9" name="Rectangle 8"/>
+          <p:cNvSpPr/>
+          <p:nvPr/>
+        </p:nvSpPr>
+        <p:spPr>
+          <a:xfrm>
+            <a:off x="4297680" y="1280160"/>
+            <a:ext cx="54864" cy="2468880"/>
+          </a:xfrm>
+          <a:prstGeom prst="rect">
+            <a:avLst/>
+          </a:prstGeom>
+          <a:solidFill>
+            <a:srgbClr val="007BFF"/>
+          </a:solidFill>
+          <a:ln>
+            <a:noFill/>
+          </a:ln>
+        </p:spPr>
+        <p:style>
+          <a:lnRef idx="1">
+            <a:schemeClr val="accent1"/>
+          </a:lnRef>
+          <a:fillRef idx="3">
+            <a:schemeClr val="accent1"/>
+          </a:fillRef>
+          <a:effectRef idx="2">
+            <a:schemeClr val="accent1"/>
+          </a:effectRef>
+          <a:fontRef idx="minor">
+            <a:schemeClr val="lt1"/>
+          </a:fontRef>
+        </p:style>
+        <p:txBody>
+          <a:bodyPr rtlCol="0" anchor="ctr"/>
+          <a:lstStyle/>
+          <a:p>
+            <a:pPr algn="ctr"/>
+          </a:p>
+        </p:txBody>
+      </p:sp>
+      <p:sp>
+        <p:nvSpPr>
+          <p:cNvPr id="10" name="TextBox 9"/>
+          <p:cNvSpPr txBox="1"/>
+          <p:nvPr/>
+        </p:nvSpPr>
+        <p:spPr>
+          <a:xfrm>
+            <a:off x="4480560" y="1371600"/>
+            <a:ext cx="3520440" cy="320040"/>
+          </a:xfrm>
+          <a:prstGeom prst="rect">
+            <a:avLst/>
+          </a:prstGeom>
+          <a:noFill/>
+        </p:spPr>
+        <p:txBody>
+          <a:bodyPr wrap="square">
+            <a:spAutoFit/>
+          </a:bodyPr>
+          <a:lstStyle/>
+          <a:p>
+            <a:pPr algn="l">
+              <a:defRPr sz="1300" b="1">
+                <a:solidFill>
+                  <a:srgbClr val="007BFF"/>
+                </a:solidFill>
+                <a:latin typeface="Segoe UI"/>
+              </a:defRPr>
+            </a:pPr>
+            <a:r>
+              <a:t>2. MODERN DATA CATALOGS</a:t>
+            </a:r>
+          </a:p>
+        </p:txBody>
+      </p:sp>
+      <p:sp>
+        <p:nvSpPr>
+          <p:cNvPr id="11" name="TextBox 10"/>
+          <p:cNvSpPr txBox="1"/>
+          <p:nvPr/>
+        </p:nvSpPr>
+        <p:spPr>
+          <a:xfrm>
+            <a:off x="4480560" y="1691639"/>
+            <a:ext cx="3520440" cy="1965960"/>
+          </a:xfrm>
+          <a:prstGeom prst="rect">
+            <a:avLst/>
+          </a:prstGeom>
+          <a:noFill/>
+        </p:spPr>
+        <p:txBody>
+          <a:bodyPr wrap="square">
+            <a:spAutoFit/>
+          </a:bodyPr>
+          <a:lstStyle/>
+          <a:p>
+            <a:pPr algn="l">
+              <a:defRPr sz="1000" b="0">
+                <a:solidFill>
+                  <a:srgbClr val="B0B0B0"/>
+                </a:solidFill>
+                <a:latin typeface="Segoe UI"/>
+              </a:defRPr>
+            </a:pPr>
+            <a:r>
+              <a:t>Catalogs catching up by bolting LLMs on top.</a:t>
+            </a:r>
+            <a:br/>
+            <a:br/>
+            <a:r>
+              <a:t>• Alation — Alation Aurora</a:t>
+            </a:r>
+            <a:br/>
+            <a:r>
+              <a:t>• Collibra — Collibra AI</a:t>
+            </a:r>
+            <a:br/>
+            <a:r>
+              <a:t>• Atlan — most aggressive AI positioning</a:t>
+            </a:r>
+            <a:br/>
+            <a:r>
+              <a:t>• Informatica — CLAIRE GPT</a:t>
+            </a:r>
+            <a:br/>
+            <a:br/>
+            <a:r>
+              <a:t>Strong on metadata + distribution; thin AI layers.</a:t>
+            </a:r>
+          </a:p>
+        </p:txBody>
+      </p:sp>
+      <p:sp>
+        <p:nvSpPr>
+          <p:cNvPr id="12" name="Rounded Rectangle 11"/>
+          <p:cNvSpPr/>
+          <p:nvPr/>
+        </p:nvSpPr>
+        <p:spPr>
+          <a:xfrm>
+            <a:off x="8229600" y="1280160"/>
+            <a:ext cx="3794760" cy="2468880"/>
+          </a:xfrm>
+          <a:prstGeom prst="roundRect">
+            <a:avLst/>
+          </a:prstGeom>
+          <a:solidFill>
+            <a:srgbClr val="353555"/>
+          </a:solidFill>
+          <a:ln>
+            <a:noFill/>
+          </a:ln>
+        </p:spPr>
+        <p:style>
+          <a:lnRef idx="1">
+            <a:schemeClr val="accent1"/>
+          </a:lnRef>
+          <a:fillRef idx="3">
+            <a:schemeClr val="accent1"/>
+          </a:fillRef>
+          <a:effectRef idx="2">
+            <a:schemeClr val="accent1"/>
+          </a:effectRef>
+          <a:fontRef idx="minor">
+            <a:schemeClr val="lt1"/>
+          </a:fontRef>
+        </p:style>
+        <p:txBody>
+          <a:bodyPr rtlCol="0" anchor="ctr"/>
+          <a:lstStyle/>
+          <a:p>
+            <a:pPr algn="ctr"/>
+          </a:p>
+        </p:txBody>
+      </p:sp>
+      <p:sp>
+        <p:nvSpPr>
+          <p:cNvPr id="13" name="Rectangle 12"/>
+          <p:cNvSpPr/>
+          <p:nvPr/>
+        </p:nvSpPr>
+        <p:spPr>
+          <a:xfrm>
+            <a:off x="8229600" y="1280160"/>
+            <a:ext cx="54864" cy="2468880"/>
+          </a:xfrm>
+          <a:prstGeom prst="rect">
+            <a:avLst/>
+          </a:prstGeom>
+          <a:solidFill>
+            <a:srgbClr val="FF9F00"/>
+          </a:solidFill>
+          <a:ln>
+            <a:noFill/>
+          </a:ln>
+        </p:spPr>
+        <p:style>
+          <a:lnRef idx="1">
+            <a:schemeClr val="accent1"/>
+          </a:lnRef>
+          <a:fillRef idx="3">
+            <a:schemeClr val="accent1"/>
+          </a:fillRef>
+          <a:effectRef idx="2">
+            <a:schemeClr val="accent1"/>
+          </a:effectRef>
+          <a:fontRef idx="minor">
+            <a:schemeClr val="lt1"/>
+          </a:fontRef>
+        </p:style>
+        <p:txBody>
+          <a:bodyPr rtlCol="0" anchor="ctr"/>
+          <a:lstStyle/>
+          <a:p>
+            <a:pPr algn="ctr"/>
+          </a:p>
+        </p:txBody>
+      </p:sp>
+      <p:sp>
+        <p:nvSpPr>
+          <p:cNvPr id="14" name="TextBox 13"/>
+          <p:cNvSpPr txBox="1"/>
+          <p:nvPr/>
+        </p:nvSpPr>
+        <p:spPr>
+          <a:xfrm>
+            <a:off x="8412480" y="1371600"/>
+            <a:ext cx="3520440" cy="320040"/>
+          </a:xfrm>
+          <a:prstGeom prst="rect">
+            <a:avLst/>
+          </a:prstGeom>
+          <a:noFill/>
+        </p:spPr>
+        <p:txBody>
+          <a:bodyPr wrap="square">
+            <a:spAutoFit/>
+          </a:bodyPr>
+          <a:lstStyle/>
+          <a:p>
+            <a:pPr algn="l">
+              <a:defRPr sz="1300" b="1">
+                <a:solidFill>
+                  <a:srgbClr val="FF9F00"/>
+                </a:solidFill>
+                <a:latin typeface="Segoe UI"/>
+              </a:defRPr>
+            </a:pPr>
+            <a:r>
+              <a:t>3. SEMANTIC / METRIC LAYER</a:t>
+            </a:r>
+          </a:p>
+        </p:txBody>
+      </p:sp>
+      <p:sp>
+        <p:nvSpPr>
+          <p:cNvPr id="15" name="TextBox 14"/>
+          <p:cNvSpPr txBox="1"/>
+          <p:nvPr/>
+        </p:nvSpPr>
+        <p:spPr>
+          <a:xfrm>
+            <a:off x="8412480" y="1691639"/>
+            <a:ext cx="3520440" cy="1965960"/>
+          </a:xfrm>
+          <a:prstGeom prst="rect">
+            <a:avLst/>
+          </a:prstGeom>
+          <a:noFill/>
+        </p:spPr>
+        <p:txBody>
+          <a:bodyPr wrap="square">
+            <a:spAutoFit/>
+          </a:bodyPr>
+          <a:lstStyle/>
+          <a:p>
+            <a:pPr algn="l">
+              <a:defRPr sz="1000" b="0">
+                <a:solidFill>
+                  <a:srgbClr val="B0B0B0"/>
+                </a:solidFill>
+                <a:latin typeface="Segoe UI"/>
+              </a:defRPr>
+            </a:pPr>
+            <a:r>
+              <a:t>Define metrics in code, query through them.</a:t>
+            </a:r>
+            <a:br/>
+            <a:br/>
+            <a:r>
+              <a:t>• dbt Labs — Semantic Layer + MetricFlow</a:t>
+            </a:r>
+            <a:br/>
+            <a:r>
+              <a:t>• Cube — universal semantic layer</a:t>
+            </a:r>
+            <a:br/>
+            <a:r>
+              <a:t>• AtScale — enterprise semantic layer</a:t>
+            </a:r>
+            <a:br/>
+            <a:r>
+              <a:t>• Looker (Google) — LookML + Gemini</a:t>
+            </a:r>
+            <a:br/>
+            <a:r>
+              <a:t>• Power BI / Tableau — Copilot + Pulse</a:t>
+            </a:r>
+            <a:br/>
+            <a:br/>
+            <a:r>
+              <a:t>Strong BI; weak on cross-source federation.</a:t>
+            </a:r>
+          </a:p>
+        </p:txBody>
+      </p:sp>
+      <p:sp>
+        <p:nvSpPr>
+          <p:cNvPr id="16" name="Rounded Rectangle 15"/>
+          <p:cNvSpPr/>
+          <p:nvPr/>
+        </p:nvSpPr>
+        <p:spPr>
+          <a:xfrm>
+            <a:off x="365760" y="3886200"/>
+            <a:ext cx="3794760" cy="2468880"/>
+          </a:xfrm>
+          <a:prstGeom prst="roundRect">
+            <a:avLst/>
+          </a:prstGeom>
+          <a:solidFill>
+            <a:srgbClr val="353555"/>
+          </a:solidFill>
+          <a:ln>
+            <a:noFill/>
+          </a:ln>
+        </p:spPr>
+        <p:style>
+          <a:lnRef idx="1">
+            <a:schemeClr val="accent1"/>
+          </a:lnRef>
+          <a:fillRef idx="3">
+            <a:schemeClr val="accent1"/>
+          </a:fillRef>
+          <a:effectRef idx="2">
+            <a:schemeClr val="accent1"/>
+          </a:effectRef>
+          <a:fontRef idx="minor">
+            <a:schemeClr val="lt1"/>
+          </a:fontRef>
+        </p:style>
+        <p:txBody>
+          <a:bodyPr rtlCol="0" anchor="ctr"/>
+          <a:lstStyle/>
+          <a:p>
+            <a:pPr algn="ctr"/>
+          </a:p>
+        </p:txBody>
+      </p:sp>
+      <p:sp>
+        <p:nvSpPr>
+          <p:cNvPr id="17" name="Rectangle 16"/>
+          <p:cNvSpPr/>
+          <p:nvPr/>
+        </p:nvSpPr>
+        <p:spPr>
+          <a:xfrm>
+            <a:off x="365760" y="3886200"/>
+            <a:ext cx="54864" cy="2468880"/>
+          </a:xfrm>
+          <a:prstGeom prst="rect">
+            <a:avLst/>
+          </a:prstGeom>
+          <a:solidFill>
+            <a:srgbClr val="00C853"/>
+          </a:solidFill>
+          <a:ln>
+            <a:noFill/>
+          </a:ln>
+        </p:spPr>
+        <p:style>
+          <a:lnRef idx="1">
+            <a:schemeClr val="accent1"/>
+          </a:lnRef>
+          <a:fillRef idx="3">
+            <a:schemeClr val="accent1"/>
+          </a:fillRef>
+          <a:effectRef idx="2">
+            <a:schemeClr val="accent1"/>
+          </a:effectRef>
+          <a:fontRef idx="minor">
+            <a:schemeClr val="lt1"/>
+          </a:fontRef>
+        </p:style>
+        <p:txBody>
+          <a:bodyPr rtlCol="0" anchor="ctr"/>
+          <a:lstStyle/>
+          <a:p>
+            <a:pPr algn="ctr"/>
+          </a:p>
+        </p:txBody>
+      </p:sp>
+      <p:sp>
+        <p:nvSpPr>
+          <p:cNvPr id="18" name="TextBox 17"/>
+          <p:cNvSpPr txBox="1"/>
+          <p:nvPr/>
+        </p:nvSpPr>
+        <p:spPr>
+          <a:xfrm>
+            <a:off x="548640" y="3977639"/>
+            <a:ext cx="3520440" cy="320040"/>
+          </a:xfrm>
+          <a:prstGeom prst="rect">
+            <a:avLst/>
+          </a:prstGeom>
+          <a:noFill/>
+        </p:spPr>
+        <p:txBody>
+          <a:bodyPr wrap="square">
+            <a:spAutoFit/>
+          </a:bodyPr>
+          <a:lstStyle/>
+          <a:p>
+            <a:pPr algn="l">
+              <a:defRPr sz="1300" b="1">
+                <a:solidFill>
+                  <a:srgbClr val="00C853"/>
+                </a:solidFill>
+                <a:latin typeface="Segoe UI"/>
+              </a:defRPr>
+            </a:pPr>
+            <a:r>
+              <a:t>4. TEXT-TO-SQL OSS</a:t>
+            </a:r>
+          </a:p>
+        </p:txBody>
+      </p:sp>
+      <p:sp>
+        <p:nvSpPr>
+          <p:cNvPr id="19" name="TextBox 18"/>
+          <p:cNvSpPr txBox="1"/>
+          <p:nvPr/>
+        </p:nvSpPr>
+        <p:spPr>
+          <a:xfrm>
+            <a:off x="548640" y="4297680"/>
+            <a:ext cx="3520440" cy="1965960"/>
+          </a:xfrm>
+          <a:prstGeom prst="rect">
+            <a:avLst/>
+          </a:prstGeom>
+          <a:noFill/>
+        </p:spPr>
+        <p:txBody>
+          <a:bodyPr wrap="square">
+            <a:spAutoFit/>
+          </a:bodyPr>
+          <a:lstStyle/>
+          <a:p>
+            <a:pPr algn="l">
+              <a:defRPr sz="1000" b="0">
+                <a:solidFill>
+                  <a:srgbClr val="B0B0B0"/>
+                </a:solidFill>
+                <a:latin typeface="Segoe UI"/>
+              </a:defRPr>
+            </a:pPr>
+            <a:r>
+              <a:t>Most directly comparable to PMOS internals.</a:t>
+            </a:r>
+            <a:br/>
+            <a:br/>
+            <a:r>
+              <a:t>• WrenAI (Canner) — closest architecturally</a:t>
+            </a:r>
+            <a:br/>
+            <a:r>
+              <a:t>• Vanna.ai — RAG-to-SQL, simpler</a:t>
+            </a:r>
+            <a:br/>
+            <a:r>
+              <a:t>• Defog SQLCoder — fine-tuned SQL models</a:t>
+            </a:r>
+            <a:br/>
+            <a:r>
+              <a:t>• Numbers Station — foundation-model approach</a:t>
+            </a:r>
+            <a:br/>
+            <a:r>
+              <a:t>• Dataherald — pluggable NL-to-SQL</a:t>
+            </a:r>
+            <a:br/>
+            <a:br/>
+            <a:r>
+              <a:t>Read WrenAI's codebase before adding crawlers.</a:t>
+            </a:r>
+          </a:p>
+        </p:txBody>
+      </p:sp>
+      <p:sp>
+        <p:nvSpPr>
+          <p:cNvPr id="20" name="Rounded Rectangle 19"/>
+          <p:cNvSpPr/>
+          <p:nvPr/>
+        </p:nvSpPr>
+        <p:spPr>
+          <a:xfrm>
+            <a:off x="4297680" y="3886200"/>
+            <a:ext cx="3794760" cy="2468880"/>
+          </a:xfrm>
+          <a:prstGeom prst="roundRect">
+            <a:avLst/>
+          </a:prstGeom>
+          <a:solidFill>
+            <a:srgbClr val="353555"/>
+          </a:solidFill>
+          <a:ln>
+            <a:noFill/>
+          </a:ln>
+        </p:spPr>
+        <p:style>
+          <a:lnRef idx="1">
+            <a:schemeClr val="accent1"/>
+          </a:lnRef>
+          <a:fillRef idx="3">
+            <a:schemeClr val="accent1"/>
+          </a:fillRef>
+          <a:effectRef idx="2">
+            <a:schemeClr val="accent1"/>
+          </a:effectRef>
+          <a:fontRef idx="minor">
+            <a:schemeClr val="lt1"/>
+          </a:fontRef>
+        </p:style>
+        <p:txBody>
+          <a:bodyPr rtlCol="0" anchor="ctr"/>
+          <a:lstStyle/>
+          <a:p>
+            <a:pPr algn="ctr"/>
+          </a:p>
+        </p:txBody>
+      </p:sp>
+      <p:sp>
+        <p:nvSpPr>
+          <p:cNvPr id="21" name="Rectangle 20"/>
+          <p:cNvSpPr/>
+          <p:nvPr/>
+        </p:nvSpPr>
+        <p:spPr>
+          <a:xfrm>
+            <a:off x="4297680" y="3886200"/>
+            <a:ext cx="54864" cy="2468880"/>
+          </a:xfrm>
+          <a:prstGeom prst="rect">
+            <a:avLst/>
+          </a:prstGeom>
+          <a:solidFill>
+            <a:srgbClr val="F44336"/>
+          </a:solidFill>
+          <a:ln>
+            <a:noFill/>
+          </a:ln>
+        </p:spPr>
+        <p:style>
+          <a:lnRef idx="1">
+            <a:schemeClr val="accent1"/>
+          </a:lnRef>
+          <a:fillRef idx="3">
+            <a:schemeClr val="accent1"/>
+          </a:fillRef>
+          <a:effectRef idx="2">
+            <a:schemeClr val="accent1"/>
+          </a:effectRef>
+          <a:fontRef idx="minor">
+            <a:schemeClr val="lt1"/>
+          </a:fontRef>
+        </p:style>
+        <p:txBody>
+          <a:bodyPr rtlCol="0" anchor="ctr"/>
+          <a:lstStyle/>
+          <a:p>
+            <a:pPr algn="ctr"/>
+          </a:p>
+        </p:txBody>
+      </p:sp>
+      <p:sp>
+        <p:nvSpPr>
+          <p:cNvPr id="22" name="TextBox 21"/>
+          <p:cNvSpPr txBox="1"/>
+          <p:nvPr/>
+        </p:nvSpPr>
+        <p:spPr>
+          <a:xfrm>
+            <a:off x="4480560" y="3977639"/>
+            <a:ext cx="3520440" cy="320040"/>
+          </a:xfrm>
+          <a:prstGeom prst="rect">
+            <a:avLst/>
+          </a:prstGeom>
+          <a:noFill/>
+        </p:spPr>
+        <p:txBody>
+          <a:bodyPr wrap="square">
+            <a:spAutoFit/>
+          </a:bodyPr>
+          <a:lstStyle/>
+          <a:p>
+            <a:pPr algn="l">
+              <a:defRPr sz="1300" b="1">
+                <a:solidFill>
+                  <a:srgbClr val="F44336"/>
+                </a:solidFill>
+                <a:latin typeface="Segoe UI"/>
+              </a:defRPr>
+            </a:pPr>
+            <a:r>
+              <a:t>5. CLOUD PLATFORMS</a:t>
+            </a:r>
+          </a:p>
+        </p:txBody>
+      </p:sp>
+      <p:sp>
+        <p:nvSpPr>
+          <p:cNvPr id="23" name="TextBox 22"/>
+          <p:cNvSpPr txBox="1"/>
+          <p:nvPr/>
+        </p:nvSpPr>
+        <p:spPr>
+          <a:xfrm>
+            <a:off x="4480560" y="4297680"/>
+            <a:ext cx="3520440" cy="1965960"/>
+          </a:xfrm>
+          <a:prstGeom prst="rect">
+            <a:avLst/>
+          </a:prstGeom>
+          <a:noFill/>
+        </p:spPr>
+        <p:txBody>
+          <a:bodyPr wrap="square">
+            <a:spAutoFit/>
+          </a:bodyPr>
+          <a:lstStyle/>
+          <a:p>
+            <a:pPr algn="l">
+              <a:defRPr sz="1000" b="0">
+                <a:solidFill>
+                  <a:srgbClr val="B0B0B0"/>
+                </a:solidFill>
+                <a:latin typeface="Segoe UI"/>
+              </a:defRPr>
+            </a:pPr>
+            <a:r>
+              <a:t>Late but heavy hitters; will commoditize the easy 80%.</a:t>
+            </a:r>
+            <a:br/>
+            <a:br/>
+            <a:r>
+              <a:t>• Snowflake Cortex Analyst (late 2024)</a:t>
+            </a:r>
+            <a:br/>
+            <a:r>
+              <a:t>• Databricks Genie</a:t>
+            </a:r>
+            <a:br/>
+            <a:r>
+              <a:t>• BigQuery + Gemini</a:t>
+            </a:r>
+            <a:br/>
+            <a:r>
+              <a:t>• AWS Q for Business (laggard, fragmented)</a:t>
+            </a:r>
+            <a:br/>
+            <a:br/>
+            <a:r>
+              <a:t>Polished for their own data; weak on legacy systems they don't own.</a:t>
+            </a:r>
+          </a:p>
+        </p:txBody>
+      </p:sp>
+      <p:sp>
+        <p:nvSpPr>
+          <p:cNvPr id="24" name="Rounded Rectangle 23"/>
+          <p:cNvSpPr/>
+          <p:nvPr/>
+        </p:nvSpPr>
+        <p:spPr>
+          <a:xfrm>
+            <a:off x="8229600" y="3886200"/>
+            <a:ext cx="3794760" cy="2468880"/>
+          </a:xfrm>
+          <a:prstGeom prst="roundRect">
+            <a:avLst/>
+          </a:prstGeom>
+          <a:solidFill>
+            <a:srgbClr val="353555"/>
+          </a:solidFill>
+          <a:ln>
+            <a:noFill/>
+          </a:ln>
+        </p:spPr>
+        <p:style>
+          <a:lnRef idx="1">
+            <a:schemeClr val="accent1"/>
+          </a:lnRef>
+          <a:fillRef idx="3">
+            <a:schemeClr val="accent1"/>
+          </a:fillRef>
+          <a:effectRef idx="2">
+            <a:schemeClr val="accent1"/>
+          </a:effectRef>
+          <a:fontRef idx="minor">
+            <a:schemeClr val="lt1"/>
+          </a:fontRef>
+        </p:style>
+        <p:txBody>
+          <a:bodyPr rtlCol="0" anchor="ctr"/>
+          <a:lstStyle/>
+          <a:p>
+            <a:pPr algn="ctr"/>
+          </a:p>
+        </p:txBody>
+      </p:sp>
+      <p:sp>
+        <p:nvSpPr>
+          <p:cNvPr id="25" name="Rectangle 24"/>
+          <p:cNvSpPr/>
+          <p:nvPr/>
+        </p:nvSpPr>
+        <p:spPr>
+          <a:xfrm>
+            <a:off x="8229600" y="3886200"/>
+            <a:ext cx="54864" cy="2468880"/>
+          </a:xfrm>
+          <a:prstGeom prst="rect">
+            <a:avLst/>
+          </a:prstGeom>
+          <a:solidFill>
+            <a:srgbClr val="4DA6FF"/>
+          </a:solidFill>
+          <a:ln>
+            <a:noFill/>
+          </a:ln>
+        </p:spPr>
+        <p:style>
+          <a:lnRef idx="1">
+            <a:schemeClr val="accent1"/>
+          </a:lnRef>
+          <a:fillRef idx="3">
+            <a:schemeClr val="accent1"/>
+          </a:fillRef>
+          <a:effectRef idx="2">
+            <a:schemeClr val="accent1"/>
+          </a:effectRef>
+          <a:fontRef idx="minor">
+            <a:schemeClr val="lt1"/>
+          </a:fontRef>
+        </p:style>
+        <p:txBody>
+          <a:bodyPr rtlCol="0" anchor="ctr"/>
+          <a:lstStyle/>
+          <a:p>
+            <a:pPr algn="ctr"/>
+          </a:p>
+        </p:txBody>
+      </p:sp>
+      <p:sp>
+        <p:nvSpPr>
+          <p:cNvPr id="26" name="TextBox 25"/>
+          <p:cNvSpPr txBox="1"/>
+          <p:nvPr/>
+        </p:nvSpPr>
+        <p:spPr>
+          <a:xfrm>
+            <a:off x="8412480" y="3977639"/>
+            <a:ext cx="3520440" cy="320040"/>
+          </a:xfrm>
+          <a:prstGeom prst="rect">
+            <a:avLst/>
+          </a:prstGeom>
+          <a:noFill/>
+        </p:spPr>
+        <p:txBody>
+          <a:bodyPr wrap="square">
+            <a:spAutoFit/>
+          </a:bodyPr>
+          <a:lstStyle/>
+          <a:p>
+            <a:pPr algn="l">
+              <a:defRPr sz="1300" b="1">
+                <a:solidFill>
+                  <a:srgbClr val="4DA6FF"/>
+                </a:solidFill>
+                <a:latin typeface="Segoe UI"/>
+              </a:defRPr>
+            </a:pPr>
+            <a:r>
+              <a:t>6. IN-HOUSE ENTERPRISE</a:t>
+            </a:r>
+          </a:p>
+        </p:txBody>
+      </p:sp>
+      <p:sp>
+        <p:nvSpPr>
+          <p:cNvPr id="27" name="TextBox 26"/>
+          <p:cNvSpPr txBox="1"/>
+          <p:nvPr/>
+        </p:nvSpPr>
+        <p:spPr>
+          <a:xfrm>
+            <a:off x="8412480" y="4297680"/>
+            <a:ext cx="3520440" cy="1965960"/>
+          </a:xfrm>
+          <a:prstGeom prst="rect">
+            <a:avLst/>
+          </a:prstGeom>
+          <a:noFill/>
+        </p:spPr>
+        <p:txBody>
+          <a:bodyPr wrap="square">
+            <a:spAutoFit/>
+          </a:bodyPr>
+          <a:lstStyle/>
+          <a:p>
+            <a:pPr algn="l">
+              <a:defRPr sz="1000" b="0">
+                <a:solidFill>
+                  <a:srgbClr val="B0B0B0"/>
+                </a:solidFill>
+                <a:latin typeface="Segoe UI"/>
+              </a:defRPr>
+            </a:pPr>
+            <a:r>
+              <a:t>Case studies, not products; prove pattern at scale.</a:t>
+            </a:r>
+            <a:br/>
+            <a:br/>
+            <a:r>
+              <a:t>• Uber QueryGPT — multi-agent, well-documented</a:t>
+            </a:r>
+            <a:br/>
+            <a:r>
+              <a:t>• LinkedIn DARWIN / SQLGen</a:t>
+            </a:r>
+            <a:br/>
+            <a:r>
+              <a:t>• Pinterest Querybot</a:t>
+            </a:r>
+            <a:br/>
+            <a:r>
+              <a:t>• Airbnb internal text-to-SQL</a:t>
+            </a:r>
+            <a:br/>
+            <a:r>
+              <a:t>• Meta + Stripe internal versions</a:t>
+            </a:r>
+            <a:br/>
+            <a:br/>
+            <a:r>
+              <a:t>Architectures public via papers and posts.</a:t>
+            </a:r>
+          </a:p>
+        </p:txBody>
+      </p:sp>
+    </p:spTree>
+  </p:cSld>
+  <p:clrMapOvr>
+    <a:masterClrMapping/>
+  </p:clrMapOvr>
+</p:sld>
+</file>
+
+<file path=ppt/slides/slide16.xml><?xml version="1.0" encoding="utf-8"?>
+<p:sld xmlns:a="http://schemas.openxmlformats.org/drawingml/2006/main" xmlns:p="http://schemas.openxmlformats.org/presentationml/2006/main" xmlns:r="http://schemas.openxmlformats.org/officeDocument/2006/relationships">
+  <p:cSld>
+    <p:bg>
+      <p:bgPr>
+        <a:solidFill>
+          <a:srgbClr val="1A1A2E"/>
+        </a:solidFill>
+        <a:effectLst/>
+      </p:bgPr>
+    </p:bg>
+    <p:spTree>
+      <p:nvGrpSpPr>
+        <p:cNvPr id="1" name=""/>
+        <p:cNvGrpSpPr/>
+        <p:nvPr/>
+      </p:nvGrpSpPr>
+      <p:grpSpPr/>
+      <p:sp>
+        <p:nvSpPr>
+          <p:cNvPr id="2" name="TextBox 1"/>
+          <p:cNvSpPr txBox="1"/>
+          <p:nvPr/>
+        </p:nvSpPr>
+        <p:spPr>
+          <a:xfrm>
+            <a:off x="457200" y="274320"/>
+            <a:ext cx="10972800" cy="548640"/>
+          </a:xfrm>
+          <a:prstGeom prst="rect">
+            <a:avLst/>
+          </a:prstGeom>
+          <a:noFill/>
+        </p:spPr>
+        <p:txBody>
+          <a:bodyPr wrap="square">
+            <a:spAutoFit/>
+          </a:bodyPr>
+          <a:lstStyle/>
+          <a:p>
+            <a:pPr algn="ctr">
+              <a:defRPr sz="2600" b="1">
+                <a:solidFill>
+                  <a:srgbClr val="007BFF"/>
+                </a:solidFill>
+                <a:latin typeface="Segoe UI"/>
+              </a:defRPr>
+            </a:pPr>
+            <a:r>
+              <a:t>Where PMOS Does What Others Don't</a:t>
+            </a:r>
+          </a:p>
+        </p:txBody>
+      </p:sp>
+      <p:sp>
+        <p:nvSpPr>
+          <p:cNvPr id="3" name="TextBox 2"/>
+          <p:cNvSpPr txBox="1"/>
+          <p:nvPr/>
+        </p:nvSpPr>
+        <p:spPr>
+          <a:xfrm>
+            <a:off x="457200" y="822960"/>
+            <a:ext cx="10972800" cy="365760"/>
+          </a:xfrm>
+          <a:prstGeom prst="rect">
+            <a:avLst/>
+          </a:prstGeom>
+          <a:noFill/>
+        </p:spPr>
+        <p:txBody>
+          <a:bodyPr wrap="square">
+            <a:spAutoFit/>
+          </a:bodyPr>
+          <a:lstStyle/>
+          <a:p>
+            <a:pPr algn="ctr">
+              <a:defRPr sz="1300" b="0">
+                <a:solidFill>
+                  <a:srgbClr val="B0B0B0"/>
+                </a:solidFill>
+                <a:latin typeface="Segoe UI"/>
+              </a:defRPr>
+            </a:pPr>
+            <a:r>
+              <a:t>Three differences that make PMOS more than yet-another text-to-SQL tool</a:t>
+            </a:r>
+          </a:p>
+        </p:txBody>
+      </p:sp>
+      <p:sp>
+        <p:nvSpPr>
+          <p:cNvPr id="4" name="Rounded Rectangle 3"/>
+          <p:cNvSpPr/>
+          <p:nvPr/>
+        </p:nvSpPr>
+        <p:spPr>
+          <a:xfrm>
+            <a:off x="457200" y="1463040"/>
+            <a:ext cx="3657600" cy="4937760"/>
+          </a:xfrm>
+          <a:prstGeom prst="roundRect">
+            <a:avLst/>
+          </a:prstGeom>
+          <a:solidFill>
+            <a:srgbClr val="353555"/>
+          </a:solidFill>
+          <a:ln>
+            <a:noFill/>
+          </a:ln>
+        </p:spPr>
+        <p:style>
+          <a:lnRef idx="1">
+            <a:schemeClr val="accent1"/>
+          </a:lnRef>
+          <a:fillRef idx="3">
+            <a:schemeClr val="accent1"/>
+          </a:fillRef>
+          <a:effectRef idx="2">
+            <a:schemeClr val="accent1"/>
+          </a:effectRef>
+          <a:fontRef idx="minor">
+            <a:schemeClr val="lt1"/>
+          </a:fontRef>
+        </p:style>
+        <p:txBody>
+          <a:bodyPr rtlCol="0" anchor="ctr"/>
+          <a:lstStyle/>
+          <a:p>
+            <a:pPr algn="ctr"/>
+          </a:p>
+        </p:txBody>
+      </p:sp>
+      <p:sp>
+        <p:nvSpPr>
+          <p:cNvPr id="5" name="Rectangle 4"/>
+          <p:cNvSpPr/>
+          <p:nvPr/>
+        </p:nvSpPr>
+        <p:spPr>
+          <a:xfrm>
+            <a:off x="457200" y="1463040"/>
+            <a:ext cx="54864" cy="4937760"/>
+          </a:xfrm>
+          <a:prstGeom prst="rect">
+            <a:avLst/>
+          </a:prstGeom>
+          <a:solidFill>
+            <a:srgbClr val="AB47BC"/>
+          </a:solidFill>
+          <a:ln>
+            <a:noFill/>
+          </a:ln>
+        </p:spPr>
+        <p:style>
+          <a:lnRef idx="1">
+            <a:schemeClr val="accent1"/>
+          </a:lnRef>
+          <a:fillRef idx="3">
+            <a:schemeClr val="accent1"/>
+          </a:fillRef>
+          <a:effectRef idx="2">
+            <a:schemeClr val="accent1"/>
+          </a:effectRef>
+          <a:fontRef idx="minor">
+            <a:schemeClr val="lt1"/>
+          </a:fontRef>
+        </p:style>
+        <p:txBody>
+          <a:bodyPr rtlCol="0" anchor="ctr"/>
+          <a:lstStyle/>
+          <a:p>
+            <a:pPr algn="ctr"/>
+          </a:p>
+        </p:txBody>
+      </p:sp>
+      <p:sp>
+        <p:nvSpPr>
+          <p:cNvPr id="6" name="TextBox 5"/>
+          <p:cNvSpPr txBox="1"/>
+          <p:nvPr/>
+        </p:nvSpPr>
+        <p:spPr>
+          <a:xfrm>
+            <a:off x="640080" y="1554480"/>
+            <a:ext cx="3383280" cy="320040"/>
+          </a:xfrm>
+          <a:prstGeom prst="rect">
+            <a:avLst/>
+          </a:prstGeom>
+          <a:noFill/>
+        </p:spPr>
+        <p:txBody>
+          <a:bodyPr wrap="square">
+            <a:spAutoFit/>
+          </a:bodyPr>
+          <a:lstStyle/>
+          <a:p>
+            <a:pPr algn="l">
+              <a:defRPr sz="1300" b="1">
+                <a:solidFill>
+                  <a:srgbClr val="AB47BC"/>
+                </a:solidFill>
+                <a:latin typeface="Segoe UI"/>
+              </a:defRPr>
+            </a:pPr>
+            <a:r>
+              <a:t>1. MULTI-AGENT BIDDING + RL</a:t>
+            </a:r>
+          </a:p>
+        </p:txBody>
+      </p:sp>
+      <p:sp>
+        <p:nvSpPr>
+          <p:cNvPr id="7" name="TextBox 6"/>
+          <p:cNvSpPr txBox="1"/>
+          <p:nvPr/>
+        </p:nvSpPr>
+        <p:spPr>
+          <a:xfrm>
+            <a:off x="640080" y="1874520"/>
+            <a:ext cx="3383280" cy="4434840"/>
+          </a:xfrm>
+          <a:prstGeom prst="rect">
+            <a:avLst/>
+          </a:prstGeom>
+          <a:noFill/>
+        </p:spPr>
+        <p:txBody>
+          <a:bodyPr wrap="square">
+            <a:spAutoFit/>
+          </a:bodyPr>
+          <a:lstStyle/>
+          <a:p>
+            <a:pPr algn="l">
+              <a:defRPr sz="1000" b="0">
+                <a:solidFill>
+                  <a:srgbClr val="B0B0B0"/>
+                </a:solidFill>
+                <a:latin typeface="Segoe UI"/>
+              </a:defRPr>
+            </a:pPr>
+            <a:r>
+              <a:t>None of the named products treat agent selection as a contextual bandit.</a:t>
+            </a:r>
+            <a:br/>
+            <a:br/>
+            <a:r>
+              <a:t>They have ONE LLM (or a fixed router) doing everything.</a:t>
+            </a:r>
+            <a:br/>
+            <a:br/>
+            <a:r>
+              <a:t>PMOS has a population of agents that:</a:t>
+            </a:r>
+            <a:br/>
+            <a:r>
+              <a:t>• Compete for tasks via bidding</a:t>
+            </a:r>
+            <a:br/>
+            <a:r>
+              <a:t>• Get scored after execution</a:t>
+            </a:r>
+            <a:br/>
+            <a:r>
+              <a:t>• Receive RL feedback (rewards)</a:t>
+            </a:r>
+            <a:br/>
+            <a:r>
+              <a:t>• Converge over time</a:t>
+            </a:r>
+            <a:br/>
+            <a:br/>
+            <a:r>
+              <a:t>Catalog vendors don't think this way at all — their world is one agent answering one question.</a:t>
+            </a:r>
+          </a:p>
+        </p:txBody>
+      </p:sp>
+      <p:sp>
+        <p:nvSpPr>
+          <p:cNvPr id="8" name="Rounded Rectangle 7"/>
+          <p:cNvSpPr/>
+          <p:nvPr/>
+        </p:nvSpPr>
+        <p:spPr>
+          <a:xfrm>
+            <a:off x="4297680" y="1463040"/>
+            <a:ext cx="3657600" cy="4937760"/>
+          </a:xfrm>
+          <a:prstGeom prst="roundRect">
+            <a:avLst/>
+          </a:prstGeom>
+          <a:solidFill>
+            <a:srgbClr val="353555"/>
+          </a:solidFill>
+          <a:ln>
+            <a:noFill/>
+          </a:ln>
+        </p:spPr>
+        <p:style>
+          <a:lnRef idx="1">
+            <a:schemeClr val="accent1"/>
+          </a:lnRef>
+          <a:fillRef idx="3">
+            <a:schemeClr val="accent1"/>
+          </a:fillRef>
+          <a:effectRef idx="2">
+            <a:schemeClr val="accent1"/>
+          </a:effectRef>
+          <a:fontRef idx="minor">
+            <a:schemeClr val="lt1"/>
+          </a:fontRef>
+        </p:style>
+        <p:txBody>
+          <a:bodyPr rtlCol="0" anchor="ctr"/>
+          <a:lstStyle/>
+          <a:p>
+            <a:pPr algn="ctr"/>
+          </a:p>
+        </p:txBody>
+      </p:sp>
+      <p:sp>
+        <p:nvSpPr>
+          <p:cNvPr id="9" name="Rectangle 8"/>
+          <p:cNvSpPr/>
+          <p:nvPr/>
+        </p:nvSpPr>
+        <p:spPr>
+          <a:xfrm>
+            <a:off x="4297680" y="1463040"/>
+            <a:ext cx="54864" cy="4937760"/>
+          </a:xfrm>
+          <a:prstGeom prst="rect">
+            <a:avLst/>
+          </a:prstGeom>
+          <a:solidFill>
+            <a:srgbClr val="00C853"/>
+          </a:solidFill>
+          <a:ln>
+            <a:noFill/>
+          </a:ln>
+        </p:spPr>
+        <p:style>
+          <a:lnRef idx="1">
+            <a:schemeClr val="accent1"/>
+          </a:lnRef>
+          <a:fillRef idx="3">
+            <a:schemeClr val="accent1"/>
+          </a:fillRef>
+          <a:effectRef idx="2">
+            <a:schemeClr val="accent1"/>
+          </a:effectRef>
+          <a:fontRef idx="minor">
+            <a:schemeClr val="lt1"/>
+          </a:fontRef>
+        </p:style>
+        <p:txBody>
+          <a:bodyPr rtlCol="0" anchor="ctr"/>
+          <a:lstStyle/>
+          <a:p>
+            <a:pPr algn="ctr"/>
+          </a:p>
+        </p:txBody>
+      </p:sp>
+      <p:sp>
+        <p:nvSpPr>
+          <p:cNvPr id="10" name="TextBox 9"/>
+          <p:cNvSpPr txBox="1"/>
+          <p:nvPr/>
+        </p:nvSpPr>
+        <p:spPr>
+          <a:xfrm>
+            <a:off x="4480560" y="1554480"/>
+            <a:ext cx="3383280" cy="320040"/>
+          </a:xfrm>
+          <a:prstGeom prst="rect">
+            <a:avLst/>
+          </a:prstGeom>
+          <a:noFill/>
+        </p:spPr>
+        <p:txBody>
+          <a:bodyPr wrap="square">
+            <a:spAutoFit/>
+          </a:bodyPr>
+          <a:lstStyle/>
+          <a:p>
+            <a:pPr algn="l">
+              <a:defRPr sz="1300" b="1">
+                <a:solidFill>
+                  <a:srgbClr val="00C853"/>
+                </a:solidFill>
+                <a:latin typeface="Segoe UI"/>
+              </a:defRPr>
+            </a:pPr>
+            <a:r>
+              <a:t>2. INFERENCE TRACEABILITY UI</a:t>
+            </a:r>
+          </a:p>
+        </p:txBody>
+      </p:sp>
+      <p:sp>
+        <p:nvSpPr>
+          <p:cNvPr id="11" name="TextBox 10"/>
+          <p:cNvSpPr txBox="1"/>
+          <p:nvPr/>
+        </p:nvSpPr>
+        <p:spPr>
+          <a:xfrm>
+            <a:off x="4480560" y="1874520"/>
+            <a:ext cx="3383280" cy="4434840"/>
+          </a:xfrm>
+          <a:prstGeom prst="rect">
+            <a:avLst/>
+          </a:prstGeom>
+          <a:noFill/>
+        </p:spPr>
+        <p:txBody>
+          <a:bodyPr wrap="square">
+            <a:spAutoFit/>
+          </a:bodyPr>
+          <a:lstStyle/>
+          <a:p>
+            <a:pPr algn="l">
+              <a:defRPr sz="1000" b="0">
+                <a:solidFill>
+                  <a:srgbClr val="B0B0B0"/>
+                </a:solidFill>
+                <a:latin typeface="Segoe UI"/>
+              </a:defRPr>
+            </a:pPr>
+            <a:r>
+              <a:t>The Model Governance page shows the full hop-by-hop reasoning chain:</a:t>
+            </a:r>
+            <a:br/>
+            <a:br/>
+            <a:r>
+              <a:t>user → bid → task nodes → tool calls → scoring → RL feedback → response</a:t>
+            </a:r>
+            <a:br/>
+            <a:br/>
+            <a:r>
+              <a:t>as a layered timeline an operator can read like a flight recorder.</a:t>
+            </a:r>
+            <a:br/>
+            <a:br/>
+            <a:r>
+              <a:t>Stardog and data.world come closest because the knowledge graph naturally records the path — but neither surfaces it as a UI the way PMOS does.</a:t>
+            </a:r>
+          </a:p>
+        </p:txBody>
+      </p:sp>
+      <p:sp>
+        <p:nvSpPr>
+          <p:cNvPr id="12" name="Rounded Rectangle 11"/>
+          <p:cNvSpPr/>
+          <p:nvPr/>
+        </p:nvSpPr>
+        <p:spPr>
+          <a:xfrm>
+            <a:off x="8138160" y="1463040"/>
+            <a:ext cx="3657600" cy="4937760"/>
+          </a:xfrm>
+          <a:prstGeom prst="roundRect">
+            <a:avLst/>
+          </a:prstGeom>
+          <a:solidFill>
+            <a:srgbClr val="353555"/>
+          </a:solidFill>
+          <a:ln>
+            <a:noFill/>
+          </a:ln>
+        </p:spPr>
+        <p:style>
+          <a:lnRef idx="1">
+            <a:schemeClr val="accent1"/>
+          </a:lnRef>
+          <a:fillRef idx="3">
+            <a:schemeClr val="accent1"/>
+          </a:fillRef>
+          <a:effectRef idx="2">
+            <a:schemeClr val="accent1"/>
+          </a:effectRef>
+          <a:fontRef idx="minor">
+            <a:schemeClr val="lt1"/>
+          </a:fontRef>
+        </p:style>
+        <p:txBody>
+          <a:bodyPr rtlCol="0" anchor="ctr"/>
+          <a:lstStyle/>
+          <a:p>
+            <a:pPr algn="ctr"/>
+          </a:p>
+        </p:txBody>
+      </p:sp>
+      <p:sp>
+        <p:nvSpPr>
+          <p:cNvPr id="13" name="Rectangle 12"/>
+          <p:cNvSpPr/>
+          <p:nvPr/>
+        </p:nvSpPr>
+        <p:spPr>
+          <a:xfrm>
+            <a:off x="8138160" y="1463040"/>
+            <a:ext cx="54864" cy="4937760"/>
+          </a:xfrm>
+          <a:prstGeom prst="rect">
+            <a:avLst/>
+          </a:prstGeom>
+          <a:solidFill>
+            <a:srgbClr val="FF9F00"/>
+          </a:solidFill>
+          <a:ln>
+            <a:noFill/>
+          </a:ln>
+        </p:spPr>
+        <p:style>
+          <a:lnRef idx="1">
+            <a:schemeClr val="accent1"/>
+          </a:lnRef>
+          <a:fillRef idx="3">
+            <a:schemeClr val="accent1"/>
+          </a:fillRef>
+          <a:effectRef idx="2">
+            <a:schemeClr val="accent1"/>
+          </a:effectRef>
+          <a:fontRef idx="minor">
+            <a:schemeClr val="lt1"/>
+          </a:fontRef>
+        </p:style>
+        <p:txBody>
+          <a:bodyPr rtlCol="0" anchor="ctr"/>
+          <a:lstStyle/>
+          <a:p>
+            <a:pPr algn="ctr"/>
+          </a:p>
+        </p:txBody>
+      </p:sp>
+      <p:sp>
+        <p:nvSpPr>
+          <p:cNvPr id="14" name="TextBox 13"/>
+          <p:cNvSpPr txBox="1"/>
+          <p:nvPr/>
+        </p:nvSpPr>
+        <p:spPr>
+          <a:xfrm>
+            <a:off x="8321040" y="1554480"/>
+            <a:ext cx="3383280" cy="320040"/>
+          </a:xfrm>
+          <a:prstGeom prst="rect">
+            <a:avLst/>
+          </a:prstGeom>
+          <a:noFill/>
+        </p:spPr>
+        <p:txBody>
+          <a:bodyPr wrap="square">
+            <a:spAutoFit/>
+          </a:bodyPr>
+          <a:lstStyle/>
+          <a:p>
+            <a:pPr algn="l">
+              <a:defRPr sz="1300" b="1">
+                <a:solidFill>
+                  <a:srgbClr val="FF9F00"/>
+                </a:solidFill>
+                <a:latin typeface="Segoe UI"/>
+              </a:defRPr>
+            </a:pPr>
+            <a:r>
+              <a:t>3. AGENTS + DATA IN ONE GRAPH</a:t>
+            </a:r>
+          </a:p>
+        </p:txBody>
+      </p:sp>
+      <p:sp>
+        <p:nvSpPr>
+          <p:cNvPr id="15" name="TextBox 14"/>
+          <p:cNvSpPr txBox="1"/>
+          <p:nvPr/>
+        </p:nvSpPr>
+        <p:spPr>
+          <a:xfrm>
+            <a:off x="8321040" y="1874520"/>
+            <a:ext cx="3383280" cy="4434840"/>
+          </a:xfrm>
+          <a:prstGeom prst="rect">
+            <a:avLst/>
+          </a:prstGeom>
+          <a:noFill/>
+        </p:spPr>
+        <p:txBody>
+          <a:bodyPr wrap="square">
+            <a:spAutoFit/>
+          </a:bodyPr>
+          <a:lstStyle/>
+          <a:p>
+            <a:pPr algn="l">
+              <a:defRPr sz="1000" b="0">
+                <a:solidFill>
+                  <a:srgbClr val="B0B0B0"/>
+                </a:solidFill>
+                <a:latin typeface="Segoe UI"/>
+              </a:defRPr>
+            </a:pPr>
+            <a:r>
+              <a:t>Most products keep the catalog (data side) and the orchestration runtime (agent side) in SEPARATE stores.</a:t>
+            </a:r>
+            <a:br/>
+            <a:br/>
+            <a:r>
+              <a:t>PMOS puts in ONE Neo4j instance:</a:t>
+            </a:r>
+            <a:br/>
+            <a:r>
+              <a:t>• TaskNode + AgentInteraction (runtime)</a:t>
+            </a:r>
+            <a:br/>
+            <a:r>
+              <a:t>• BusinessEntity + DataAsset (catalog)</a:t>
+            </a:r>
+            <a:br/>
+            <a:r>
+              <a:t>• MAPS_TO + SPAWNED_BY edges</a:t>
+            </a:r>
+            <a:br/>
+            <a:br/>
+            <a:r>
+              <a:t>The bet: the JOIN between 'what the agent did' and 'what the data means' is itself a useful query target — and the system that learns from its own behavior needs that join.</a:t>
+            </a:r>
+          </a:p>
+        </p:txBody>
+      </p:sp>
+    </p:spTree>
+  </p:cSld>
+  <p:clrMapOvr>
+    <a:masterClrMapping/>
+  </p:clrMapOvr>
+</p:sld>
+</file>
+
+<file path=ppt/slides/slide17.xml><?xml version="1.0" encoding="utf-8"?>
+<p:sld xmlns:a="http://schemas.openxmlformats.org/drawingml/2006/main" xmlns:p="http://schemas.openxmlformats.org/presentationml/2006/main" xmlns:r="http://schemas.openxmlformats.org/officeDocument/2006/relationships">
+  <p:cSld>
+    <p:bg>
+      <p:bgPr>
+        <a:solidFill>
+          <a:srgbClr val="1A1A2E"/>
+        </a:solidFill>
+        <a:effectLst/>
+      </p:bgPr>
+    </p:bg>
+    <p:spTree>
+      <p:nvGrpSpPr>
+        <p:cNvPr id="1" name=""/>
+        <p:cNvGrpSpPr/>
+        <p:nvPr/>
+      </p:nvGrpSpPr>
+      <p:grpSpPr/>
+      <p:sp>
+        <p:nvSpPr>
+          <p:cNvPr id="2" name="TextBox 1"/>
+          <p:cNvSpPr txBox="1"/>
+          <p:nvPr/>
+        </p:nvSpPr>
+        <p:spPr>
+          <a:xfrm>
+            <a:off x="457200" y="274320"/>
+            <a:ext cx="10972800" cy="548640"/>
+          </a:xfrm>
+          <a:prstGeom prst="rect">
+            <a:avLst/>
+          </a:prstGeom>
+          <a:noFill/>
+        </p:spPr>
+        <p:txBody>
+          <a:bodyPr wrap="square">
+            <a:spAutoFit/>
+          </a:bodyPr>
+          <a:lstStyle/>
+          <a:p>
+            <a:pPr algn="ctr">
+              <a:defRPr sz="2600" b="1">
+                <a:solidFill>
+                  <a:srgbClr val="007BFF"/>
+                </a:solidFill>
+                <a:latin typeface="Segoe UI"/>
+              </a:defRPr>
+            </a:pPr>
+            <a:r>
+              <a:t>Honest Gaps and Strategic Positioning</a:t>
+            </a:r>
+          </a:p>
+        </p:txBody>
+      </p:sp>
+      <p:sp>
+        <p:nvSpPr>
+          <p:cNvPr id="3" name="TextBox 2"/>
+          <p:cNvSpPr txBox="1"/>
+          <p:nvPr/>
+        </p:nvSpPr>
+        <p:spPr>
+          <a:xfrm>
+            <a:off x="457200" y="822960"/>
+            <a:ext cx="10972800" cy="365760"/>
+          </a:xfrm>
+          <a:prstGeom prst="rect">
+            <a:avLst/>
+          </a:prstGeom>
+          <a:noFill/>
+        </p:spPr>
+        <p:txBody>
+          <a:bodyPr wrap="square">
+            <a:spAutoFit/>
+          </a:bodyPr>
+          <a:lstStyle/>
+          <a:p>
+            <a:pPr algn="ctr">
+              <a:defRPr sz="1300" b="0">
+                <a:solidFill>
+                  <a:srgbClr val="B0B0B0"/>
+                </a:solidFill>
+                <a:latin typeface="Segoe UI"/>
+              </a:defRPr>
+            </a:pPr>
+            <a:r>
+              <a:t>What others do better than PMOS today, and where PMOS should choose to compete</a:t>
+            </a:r>
+          </a:p>
+        </p:txBody>
+      </p:sp>
+      <p:sp>
+        <p:nvSpPr>
+          <p:cNvPr id="4" name="Rounded Rectangle 3"/>
+          <p:cNvSpPr/>
+          <p:nvPr/>
+        </p:nvSpPr>
+        <p:spPr>
+          <a:xfrm>
+            <a:off x="457200" y="1371600"/>
+            <a:ext cx="5486400" cy="2743200"/>
+          </a:xfrm>
+          <a:prstGeom prst="roundRect">
+            <a:avLst/>
+          </a:prstGeom>
+          <a:solidFill>
+            <a:srgbClr val="353555"/>
+          </a:solidFill>
+          <a:ln>
+            <a:noFill/>
+          </a:ln>
+        </p:spPr>
+        <p:style>
+          <a:lnRef idx="1">
+            <a:schemeClr val="accent1"/>
+          </a:lnRef>
+          <a:fillRef idx="3">
+            <a:schemeClr val="accent1"/>
+          </a:fillRef>
+          <a:effectRef idx="2">
+            <a:schemeClr val="accent1"/>
+          </a:effectRef>
+          <a:fontRef idx="minor">
+            <a:schemeClr val="lt1"/>
+          </a:fontRef>
+        </p:style>
+        <p:txBody>
+          <a:bodyPr rtlCol="0" anchor="ctr"/>
+          <a:lstStyle/>
+          <a:p>
+            <a:pPr algn="ctr"/>
+          </a:p>
+        </p:txBody>
+      </p:sp>
+      <p:sp>
+        <p:nvSpPr>
+          <p:cNvPr id="5" name="Rectangle 4"/>
+          <p:cNvSpPr/>
+          <p:nvPr/>
+        </p:nvSpPr>
+        <p:spPr>
+          <a:xfrm>
+            <a:off x="457200" y="1371600"/>
+            <a:ext cx="54864" cy="2743200"/>
+          </a:xfrm>
+          <a:prstGeom prst="rect">
+            <a:avLst/>
+          </a:prstGeom>
+          <a:solidFill>
+            <a:srgbClr val="F44336"/>
+          </a:solidFill>
+          <a:ln>
+            <a:noFill/>
+          </a:ln>
+        </p:spPr>
+        <p:style>
+          <a:lnRef idx="1">
+            <a:schemeClr val="accent1"/>
+          </a:lnRef>
+          <a:fillRef idx="3">
+            <a:schemeClr val="accent1"/>
+          </a:fillRef>
+          <a:effectRef idx="2">
+            <a:schemeClr val="accent1"/>
+          </a:effectRef>
+          <a:fontRef idx="minor">
+            <a:schemeClr val="lt1"/>
+          </a:fontRef>
+        </p:style>
+        <p:txBody>
+          <a:bodyPr rtlCol="0" anchor="ctr"/>
+          <a:lstStyle/>
+          <a:p>
+            <a:pPr algn="ctr"/>
+          </a:p>
+        </p:txBody>
+      </p:sp>
+      <p:sp>
+        <p:nvSpPr>
+          <p:cNvPr id="6" name="TextBox 5"/>
+          <p:cNvSpPr txBox="1"/>
+          <p:nvPr/>
+        </p:nvSpPr>
+        <p:spPr>
+          <a:xfrm>
+            <a:off x="640080" y="1463040"/>
+            <a:ext cx="5212080" cy="320040"/>
+          </a:xfrm>
+          <a:prstGeom prst="rect">
+            <a:avLst/>
+          </a:prstGeom>
+          <a:noFill/>
+        </p:spPr>
+        <p:txBody>
+          <a:bodyPr wrap="square">
+            <a:spAutoFit/>
+          </a:bodyPr>
+          <a:lstStyle/>
+          <a:p>
+            <a:pPr algn="l">
+              <a:defRPr sz="1300" b="1">
+                <a:solidFill>
+                  <a:srgbClr val="F44336"/>
+                </a:solidFill>
+                <a:latin typeface="Segoe UI"/>
+              </a:defRPr>
+            </a:pPr>
+            <a:r>
+              <a:t>WHAT OTHERS DO BETTER</a:t>
+            </a:r>
+          </a:p>
+        </p:txBody>
+      </p:sp>
+      <p:sp>
+        <p:nvSpPr>
+          <p:cNvPr id="7" name="TextBox 6"/>
+          <p:cNvSpPr txBox="1"/>
+          <p:nvPr/>
+        </p:nvSpPr>
+        <p:spPr>
+          <a:xfrm>
+            <a:off x="640080" y="1783080"/>
+            <a:ext cx="5212080" cy="2240280"/>
+          </a:xfrm>
+          <a:prstGeom prst="rect">
+            <a:avLst/>
+          </a:prstGeom>
+          <a:noFill/>
+        </p:spPr>
+        <p:txBody>
+          <a:bodyPr wrap="square">
+            <a:spAutoFit/>
+          </a:bodyPr>
+          <a:lstStyle/>
+          <a:p>
+            <a:pPr algn="l">
+              <a:defRPr sz="1000" b="0">
+                <a:solidFill>
+                  <a:srgbClr val="B0B0B0"/>
+                </a:solidFill>
+                <a:latin typeface="Segoe UI"/>
+              </a:defRPr>
+            </a:pPr>
+            <a:r>
+              <a:t>• Ontology curation tooling — Stardog, Atlan: years of entity resolution, glossary, lineage propagation</a:t>
+            </a:r>
+            <a:br/>
+            <a:r>
+              <a:t>• Connector library — Alation/Collibra/Atlan/Informatica have hundreds of connectors; PMOS has one (MySQL)</a:t>
+            </a:r>
+            <a:br/>
+            <a:r>
+              <a:t>• Enterprise security — column ACLs, masking, ABAC, audit-log compliance</a:t>
+            </a:r>
+            <a:br/>
+            <a:r>
+              <a:t>• BI tool integration — dbt/Cube/AtScale plug into Tableau, Power BI, Looker, ThoughtSpot natively</a:t>
+            </a:r>
+          </a:p>
+        </p:txBody>
+      </p:sp>
+      <p:sp>
+        <p:nvSpPr>
+          <p:cNvPr id="8" name="Rounded Rectangle 7"/>
+          <p:cNvSpPr/>
+          <p:nvPr/>
+        </p:nvSpPr>
+        <p:spPr>
+          <a:xfrm>
+            <a:off x="6217920" y="1371600"/>
+            <a:ext cx="5486400" cy="2743200"/>
+          </a:xfrm>
+          <a:prstGeom prst="roundRect">
+            <a:avLst/>
+          </a:prstGeom>
+          <a:solidFill>
+            <a:srgbClr val="353555"/>
+          </a:solidFill>
+          <a:ln>
+            <a:noFill/>
+          </a:ln>
+        </p:spPr>
+        <p:style>
+          <a:lnRef idx="1">
+            <a:schemeClr val="accent1"/>
+          </a:lnRef>
+          <a:fillRef idx="3">
+            <a:schemeClr val="accent1"/>
+          </a:fillRef>
+          <a:effectRef idx="2">
+            <a:schemeClr val="accent1"/>
+          </a:effectRef>
+          <a:fontRef idx="minor">
+            <a:schemeClr val="lt1"/>
+          </a:fontRef>
+        </p:style>
+        <p:txBody>
+          <a:bodyPr rtlCol="0" anchor="ctr"/>
+          <a:lstStyle/>
+          <a:p>
+            <a:pPr algn="ctr"/>
+          </a:p>
+        </p:txBody>
+      </p:sp>
+      <p:sp>
+        <p:nvSpPr>
+          <p:cNvPr id="9" name="Rectangle 8"/>
+          <p:cNvSpPr/>
+          <p:nvPr/>
+        </p:nvSpPr>
+        <p:spPr>
+          <a:xfrm>
+            <a:off x="6217920" y="1371600"/>
+            <a:ext cx="54864" cy="2743200"/>
+          </a:xfrm>
+          <a:prstGeom prst="rect">
+            <a:avLst/>
+          </a:prstGeom>
+          <a:solidFill>
+            <a:srgbClr val="00C853"/>
+          </a:solidFill>
+          <a:ln>
+            <a:noFill/>
+          </a:ln>
+        </p:spPr>
+        <p:style>
+          <a:lnRef idx="1">
+            <a:schemeClr val="accent1"/>
+          </a:lnRef>
+          <a:fillRef idx="3">
+            <a:schemeClr val="accent1"/>
+          </a:fillRef>
+          <a:effectRef idx="2">
+            <a:schemeClr val="accent1"/>
+          </a:effectRef>
+          <a:fontRef idx="minor">
+            <a:schemeClr val="lt1"/>
+          </a:fontRef>
+        </p:style>
+        <p:txBody>
+          <a:bodyPr rtlCol="0" anchor="ctr"/>
+          <a:lstStyle/>
+          <a:p>
+            <a:pPr algn="ctr"/>
+          </a:p>
+        </p:txBody>
+      </p:sp>
+      <p:sp>
+        <p:nvSpPr>
+          <p:cNvPr id="10" name="TextBox 9"/>
+          <p:cNvSpPr txBox="1"/>
+          <p:nvPr/>
+        </p:nvSpPr>
+        <p:spPr>
+          <a:xfrm>
+            <a:off x="6400800" y="1463040"/>
+            <a:ext cx="5212080" cy="320040"/>
+          </a:xfrm>
+          <a:prstGeom prst="rect">
+            <a:avLst/>
+          </a:prstGeom>
+          <a:noFill/>
+        </p:spPr>
+        <p:txBody>
+          <a:bodyPr wrap="square">
+            <a:spAutoFit/>
+          </a:bodyPr>
+          <a:lstStyle/>
+          <a:p>
+            <a:pPr algn="l">
+              <a:defRPr sz="1300" b="1">
+                <a:solidFill>
+                  <a:srgbClr val="00C853"/>
+                </a:solidFill>
+                <a:latin typeface="Segoe UI"/>
+              </a:defRPr>
+            </a:pPr>
+            <a:r>
+              <a:t>WHERE PMOS SHOULD COMPETE</a:t>
+            </a:r>
+          </a:p>
+        </p:txBody>
+      </p:sp>
+      <p:sp>
+        <p:nvSpPr>
+          <p:cNvPr id="11" name="TextBox 10"/>
+          <p:cNvSpPr txBox="1"/>
+          <p:nvPr/>
+        </p:nvSpPr>
+        <p:spPr>
+          <a:xfrm>
+            <a:off x="6400800" y="1783080"/>
+            <a:ext cx="5212080" cy="2240280"/>
+          </a:xfrm>
+          <a:prstGeom prst="rect">
+            <a:avLst/>
+          </a:prstGeom>
+          <a:noFill/>
+        </p:spPr>
+        <p:txBody>
+          <a:bodyPr wrap="square">
+            <a:spAutoFit/>
+          </a:bodyPr>
+          <a:lstStyle/>
+          <a:p>
+            <a:pPr algn="l">
+              <a:defRPr sz="1000" b="0">
+                <a:solidFill>
+                  <a:srgbClr val="B0B0B0"/>
+                </a:solidFill>
+                <a:latin typeface="Segoe UI"/>
+              </a:defRPr>
+            </a:pPr>
+            <a:r>
+              <a:t>NOT 'another text-to-SQL on Snowflake' — that race is over before it starts (Cortex Analyst already won).</a:t>
+            </a:r>
+            <a:br/>
+            <a:br/>
+            <a:r>
+              <a:t>INSTEAD: 'Multi-agent reasoning system with KG-based semantic substrate, full inference traceability, and RL-driven self-improvement, designed for FEDERATED data estates the cloud vendors don't own.'</a:t>
+            </a:r>
+            <a:br/>
+            <a:br/>
+            <a:r>
+              <a:t>Buyers: financial services, healthcare, government, large industrials — anywhere data sprawls across 30 systems no one will migrate.</a:t>
+            </a:r>
+          </a:p>
+        </p:txBody>
+      </p:sp>
+      <p:sp>
+        <p:nvSpPr>
+          <p:cNvPr id="12" name="TextBox 11"/>
+          <p:cNvSpPr txBox="1"/>
+          <p:nvPr/>
+        </p:nvSpPr>
+        <p:spPr>
+          <a:xfrm>
+            <a:off x="457200" y="4389120"/>
+            <a:ext cx="10972800" cy="365760"/>
+          </a:xfrm>
+          <a:prstGeom prst="rect">
+            <a:avLst/>
+          </a:prstGeom>
+          <a:noFill/>
+        </p:spPr>
+        <p:txBody>
+          <a:bodyPr wrap="square">
+            <a:spAutoFit/>
+          </a:bodyPr>
+          <a:lstStyle/>
+          <a:p>
+            <a:pPr algn="ctr">
+              <a:defRPr sz="1400" b="1">
+                <a:solidFill>
+                  <a:srgbClr val="4DA6FF"/>
+                </a:solidFill>
+                <a:latin typeface="Segoe UI"/>
+              </a:defRPr>
+            </a:pPr>
+            <a:r>
+              <a:t>THREE COMPETITORS TO WATCH CLOSELY</a:t>
+            </a:r>
+          </a:p>
+        </p:txBody>
+      </p:sp>
+      <p:sp>
+        <p:nvSpPr>
+          <p:cNvPr id="13" name="Rounded Rectangle 12"/>
+          <p:cNvSpPr/>
+          <p:nvPr/>
+        </p:nvSpPr>
+        <p:spPr>
+          <a:xfrm>
+            <a:off x="457200" y="4846320"/>
+            <a:ext cx="3749039" cy="1645920"/>
+          </a:xfrm>
+          <a:prstGeom prst="roundRect">
+            <a:avLst/>
+          </a:prstGeom>
+          <a:solidFill>
+            <a:srgbClr val="353555"/>
+          </a:solidFill>
+          <a:ln>
+            <a:noFill/>
+          </a:ln>
+        </p:spPr>
+        <p:style>
+          <a:lnRef idx="1">
+            <a:schemeClr val="accent1"/>
+          </a:lnRef>
+          <a:fillRef idx="3">
+            <a:schemeClr val="accent1"/>
+          </a:fillRef>
+          <a:effectRef idx="2">
+            <a:schemeClr val="accent1"/>
+          </a:effectRef>
+          <a:fontRef idx="minor">
+            <a:schemeClr val="lt1"/>
+          </a:fontRef>
+        </p:style>
+        <p:txBody>
+          <a:bodyPr rtlCol="0" anchor="ctr" wrap="square"/>
+          <a:lstStyle/>
+          <a:p>
+            <a:pPr algn="ctr">
+              <a:defRPr sz="1100" b="1">
+                <a:solidFill>
+                  <a:srgbClr val="FFFFFF"/>
+                </a:solidFill>
+                <a:latin typeface="Segoe UI"/>
+              </a:defRPr>
+            </a:pPr>
+            <a:r>
+              <a:t>WrenAI (open source)</a:t>
+            </a:r>
+            <a:br/>
+            <a:br/>
+            <a:r>
+              <a:t>Architecturally closest. If they add the agent-bidding layer, they become a direct competitor.</a:t>
+            </a:r>
+          </a:p>
+        </p:txBody>
+      </p:sp>
+      <p:sp>
+        <p:nvSpPr>
+          <p:cNvPr id="14" name="Rounded Rectangle 13"/>
+          <p:cNvSpPr/>
+          <p:nvPr/>
+        </p:nvSpPr>
+        <p:spPr>
+          <a:xfrm>
+            <a:off x="4297680" y="4846320"/>
+            <a:ext cx="3749039" cy="1645920"/>
+          </a:xfrm>
+          <a:prstGeom prst="roundRect">
+            <a:avLst/>
+          </a:prstGeom>
+          <a:solidFill>
+            <a:srgbClr val="353555"/>
+          </a:solidFill>
+          <a:ln>
+            <a:noFill/>
+          </a:ln>
+        </p:spPr>
+        <p:style>
+          <a:lnRef idx="1">
+            <a:schemeClr val="accent1"/>
+          </a:lnRef>
+          <a:fillRef idx="3">
+            <a:schemeClr val="accent1"/>
+          </a:fillRef>
+          <a:effectRef idx="2">
+            <a:schemeClr val="accent1"/>
+          </a:effectRef>
+          <a:fontRef idx="minor">
+            <a:schemeClr val="lt1"/>
+          </a:fontRef>
+        </p:style>
+        <p:txBody>
+          <a:bodyPr rtlCol="0" anchor="ctr" wrap="square"/>
+          <a:lstStyle/>
+          <a:p>
+            <a:pPr algn="ctr">
+              <a:defRPr sz="1100" b="1">
+                <a:solidFill>
+                  <a:srgbClr val="FFFFFF"/>
+                </a:solidFill>
+                <a:latin typeface="Segoe UI"/>
+              </a:defRPr>
+            </a:pPr>
+            <a:r>
+              <a:t>Snowflake Cortex Analyst</a:t>
+            </a:r>
+            <a:br/>
+            <a:br/>
+            <a:r>
+              <a:t>If they make it easy to register external sources via their semantic model, they capture every Snowflake customer.</a:t>
+            </a:r>
+          </a:p>
+        </p:txBody>
+      </p:sp>
+      <p:sp>
+        <p:nvSpPr>
+          <p:cNvPr id="15" name="Rounded Rectangle 14"/>
+          <p:cNvSpPr/>
+          <p:nvPr/>
+        </p:nvSpPr>
+        <p:spPr>
+          <a:xfrm>
+            <a:off x="8138160" y="4846320"/>
+            <a:ext cx="3749039" cy="1645920"/>
+          </a:xfrm>
+          <a:prstGeom prst="roundRect">
+            <a:avLst/>
+          </a:prstGeom>
+          <a:solidFill>
+            <a:srgbClr val="353555"/>
+          </a:solidFill>
+          <a:ln>
+            <a:noFill/>
+          </a:ln>
+        </p:spPr>
+        <p:style>
+          <a:lnRef idx="1">
+            <a:schemeClr val="accent1"/>
+          </a:lnRef>
+          <a:fillRef idx="3">
+            <a:schemeClr val="accent1"/>
+          </a:fillRef>
+          <a:effectRef idx="2">
+            <a:schemeClr val="accent1"/>
+          </a:effectRef>
+          <a:fontRef idx="minor">
+            <a:schemeClr val="lt1"/>
+          </a:fontRef>
+        </p:style>
+        <p:txBody>
+          <a:bodyPr rtlCol="0" anchor="ctr" wrap="square"/>
+          <a:lstStyle/>
+          <a:p>
+            <a:pPr algn="ctr">
+              <a:defRPr sz="1100" b="1">
+                <a:solidFill>
+                  <a:srgbClr val="FFFFFF"/>
+                </a:solidFill>
+                <a:latin typeface="Segoe UI"/>
+              </a:defRPr>
+            </a:pPr>
+            <a:r>
+              <a:t>Atlan (catalog vendor)</a:t>
+            </a:r>
+            <a:br/>
+            <a:br/>
+            <a:r>
+              <a:t>Most likely catalog vendor to add a governance trace UI. If they ship it, the differentiation gap closes on that axis.</a:t>
+            </a:r>
+          </a:p>
+        </p:txBody>
+      </p:sp>
+    </p:spTree>
+  </p:cSld>
+  <p:clrMapOvr>
+    <a:masterClrMapping/>
+  </p:clrMapOvr>
+</p:sld>
+</file>
+
+<file path=ppt/slides/slide18.xml><?xml version="1.0" encoding="utf-8"?>
+<p:sld xmlns:a="http://schemas.openxmlformats.org/drawingml/2006/main" xmlns:p="http://schemas.openxmlformats.org/presentationml/2006/main" xmlns:r="http://schemas.openxmlformats.org/officeDocument/2006/relationships">
+  <p:cSld>
+    <p:bg>
+      <p:bgPr>
+        <a:solidFill>
+          <a:srgbClr val="1A1A2E"/>
+        </a:solidFill>
+        <a:effectLst/>
+      </p:bgPr>
+    </p:bg>
+    <p:spTree>
+      <p:nvGrpSpPr>
+        <p:cNvPr id="1" name=""/>
+        <p:cNvGrpSpPr/>
+        <p:nvPr/>
+      </p:nvGrpSpPr>
+      <p:grpSpPr/>
+      <p:sp>
+        <p:nvSpPr>
+          <p:cNvPr id="2" name="TextBox 1"/>
+          <p:cNvSpPr txBox="1"/>
+          <p:nvPr/>
+        </p:nvSpPr>
+        <p:spPr>
+          <a:xfrm>
+            <a:off x="914400" y="548640"/>
+            <a:ext cx="10058400" cy="914400"/>
+          </a:xfrm>
+          <a:prstGeom prst="rect">
+            <a:avLst/>
+          </a:prstGeom>
+          <a:noFill/>
+        </p:spPr>
+        <p:txBody>
+          <a:bodyPr wrap="square">
+            <a:spAutoFit/>
+          </a:bodyPr>
+          <a:lstStyle/>
+          <a:p>
+            <a:pPr algn="ctr">
+              <a:defRPr sz="5400" b="1">
+                <a:solidFill>
+                  <a:srgbClr val="007BFF"/>
+                </a:solidFill>
+                <a:latin typeface="Segoe UI"/>
+              </a:defRPr>
+            </a:pPr>
+            <a:r>
+              <a:t>PMOS</a:t>
+            </a:r>
+          </a:p>
+        </p:txBody>
+      </p:sp>
+      <p:sp>
+        <p:nvSpPr>
+          <p:cNvPr id="3" name="TextBox 2"/>
+          <p:cNvSpPr txBox="1"/>
+          <p:nvPr/>
+        </p:nvSpPr>
+        <p:spPr>
+          <a:xfrm>
+            <a:off x="914400" y="1645920"/>
+            <a:ext cx="10058400" cy="548640"/>
+          </a:xfrm>
+          <a:prstGeom prst="rect">
+            <a:avLst/>
+          </a:prstGeom>
+          <a:noFill/>
+        </p:spPr>
+        <p:txBody>
+          <a:bodyPr wrap="square">
+            <a:spAutoFit/>
+          </a:bodyPr>
+          <a:lstStyle/>
+          <a:p>
+            <a:pPr algn="ctr">
+              <a:defRPr sz="2200" b="0">
+                <a:solidFill>
+                  <a:srgbClr val="FFFFFF"/>
+                </a:solidFill>
+                <a:latin typeface="Segoe UI"/>
+              </a:defRPr>
+            </a:pPr>
+            <a:r>
+              <a:t>Connect any data source. Ask any question.</a:t>
+            </a:r>
+            <a:br/>
+            <a:r>
+              <a:t>Get deterministic answers in minutes, not hours.</a:t>
+            </a:r>
+          </a:p>
+        </p:txBody>
+      </p:sp>
+      <p:sp>
+        <p:nvSpPr>
+          <p:cNvPr id="4" name="TextBox 3"/>
+          <p:cNvSpPr txBox="1"/>
+          <p:nvPr/>
+        </p:nvSpPr>
+        <p:spPr>
+          <a:xfrm>
+            <a:off x="1371600" y="2743200"/>
+            <a:ext cx="9144000" cy="3383280"/>
+          </a:xfrm>
+          <a:prstGeom prst="rect">
+            <a:avLst/>
+          </a:prstGeom>
+          <a:noFill/>
+        </p:spPr>
+        <p:txBody>
+          <a:bodyPr wrap="square">
+            <a:spAutoFit/>
+          </a:bodyPr>
+          <a:lstStyle/>
+          <a:p>
             <a:pPr algn="ctr">
               <a:defRPr sz="1400" b="0">
                 <a:solidFill>
@@ -7162,17 +10958,22 @@
             <a:br/>
             <a:br/>
             <a:r>
-              <a:t>ML Insights — bandits, Node2Vec, learned scorer, SOP discovery, all shadow-mode</a:t>
-            </a:r>
-            <a:br/>
-            <a:br/>
-            <a:r>
-              <a:t>Data Catalog — metadata crawler framework + semantic knowledge graph + auditor RL</a:t>
-            </a:r>
-            <a:br/>
-            <a:br/>
-            <a:r>
-              <a:t>One question → decompose → negotiate → execute → score → learn → respond</a:t>
+              <a:t>ML Insights — bandits, Node2Vec, learned scorer, SOP discovery, shadow-mode</a:t>
+            </a:r>
+            <a:br/>
+            <a:br/>
+            <a:r>
+              <a:t>Data Catalog — metadata crawler + semantic KG + auditor RL feedback</a:t>
+            </a:r>
+            <a:br/>
+            <a:br/>
+            <a:r>
+              <a:t>Positioning: federated reasoning system, NOT text-to-SQL-on-Snowflake</a:t>
+            </a:r>
+            <a:br/>
+            <a:br/>
+            <a:r>
+              <a:t>Closest cousins: Stardog, data.world, WrenAI  |  Watch: Cortex, Atlan</a:t>
             </a:r>
           </a:p>
         </p:txBody>
@@ -7185,7 +10986,7 @@
         </p:nvSpPr>
         <p:spPr>
           <a:xfrm>
-            <a:off x="2743200" y="6126480"/>
+            <a:off x="2743200" y="6263640"/>
             <a:ext cx="6400800" cy="457200"/>
           </a:xfrm>
           <a:prstGeom prst="rect">
